--- a/wavesplat/docs/labmeeting_2026_05_13.pptx
+++ b/wavesplat/docs/labmeeting_2026_05_13.pptx
@@ -36,6 +36,7 @@
     <p:sldId id="284" r:id="rId36"/>
     <p:sldId id="285" r:id="rId37"/>
     <p:sldId id="286" r:id="rId38"/>
+    <p:sldId id="287" r:id="rId39"/>
   </p:sldIdLst>
   <p:sldSz cx="12191695" cy="6858000" type="screen4x3"/>
   <p:notesSz cx="6858000" cy="9144000"/>
@@ -620,82 +621,87 @@
           <a:lstStyle/>
           <a:p>
             <a:r>
-              <a:t>110 episode의 통제된 benchmark를 구축했습니다.</a:t>
+              <a:t>이전 슬라이드에서 LiDAR 모사 단계 (ray emit → mesh → intersection → vessel motion 보정) 를 설명드렸습니다. 이 슬라이드는 두 가지 핵심 효과 — raydrop 과 shadowing — 의 모사가 왜 합당한지 자세히 설명드립니다.</a:t>
             </a:r>
           </a:p>
           <a:p/>
           <a:p>
             <a:r>
-              <a:t>Episode 설계:</a:t>
-            </a:r>
-          </a:p>
-          <a:p>
-            <a:r>
-              <a:t>  - Sea state: BF2 (아주 잔잔) ~ BF7 (매우 거친) — 6단계 Beaufort scale</a:t>
-            </a:r>
-          </a:p>
-          <a:p>
-            <a:r>
-              <a:t>  - N_components: 1 ~ 30 — 알고리즘이 component 수에 robust한지 검증</a:t>
-            </a:r>
-          </a:p>
-          <a:p>
-            <a:r>
-              <a:t>  - Sensor type: uniform (균등 분포), slope (거리 비례 분포)</a:t>
-            </a:r>
-          </a:p>
-          <a:p>
-            <a:r>
-              <a:t>  - Seeds: BF2-BF5는 seed 0-4 (5개씩), BF6-BF7은 seed 0 (1개씩)</a:t>
+              <a:t>(1) Raydrop 의 합당성:</a:t>
+            </a:r>
+          </a:p>
+          <a:p>
+            <a:r>
+              <a:t>  실제 LiDAR 에서 점이 누락되는 가장 큰 원인은 specular reflection (일방향 반사) 입니다. 물 표면은 매끄러우면 specular, 거칠면 diffuse (다방향 산란) 가 됩니다. Specular 비중이 높을 때, ray 가 LiDAR receiver 가 아닌 다른 방향으로 모두 반사되면 return signal 이 없어 점이 누락됩니다.   - 입사각 (incidence angle, θ_i) 이 표면 normal 에 가까우면 일부 ray 가 LiDAR 로 돌아옴 (점 검출).</a:t>
+            </a:r>
+          </a:p>
+          <a:p>
+            <a:r>
+              <a:t>  - θ_i 가 표면 normal 에서 멀어질수록 specular 가 강해지고 LiDAR 로 안 돌아옴 (점 누락).</a:t>
+            </a:r>
+          </a:p>
+          <a:p>
+            <a:r>
+              <a:t>이 specular 비중을 Fresnel reflectance 식 R(θ_i) 로 계산. Fresnel 식 자체는 air-water 광학 경계의 표준 physics — 대학 광학 교과서 (예: Hecht, Optics) 에 표준으로 등장. Air refractive index n₁ ≈ 1, water n₂ ≈ 1.33 가 우리 simulator 의 default 값. 이 식은 ocean LiDAR 분야 (Nouguier-Grilli-Guérin 2014, IEEE TGRS) 에서도 동일하게 사용 — 검증된 표준.</a:t>
             </a:r>
           </a:p>
           <a:p/>
           <a:p>
             <a:r>
-              <a:t>Episode당 데이터:</a:t>
-            </a:r>
-          </a:p>
-          <a:p>
-            <a:r>
-              <a:t>  - 30초 시뮬레이션, 0.1초 간격 → 300 frame</a:t>
-            </a:r>
-          </a:p>
-          <a:p>
-            <a:r>
-              <a:t>  - Ground-truth η field 50×50 격자 — 평가 시 참값</a:t>
-            </a:r>
-          </a:p>
-          <a:p>
-            <a:r>
-              <a:t>  - LiDAR scan은 raydrop/shadowing 적용 후 frame당 ~50점</a:t>
+              <a:t>(2) Geometric shadowing 의 합당성:</a:t>
+            </a:r>
+          </a:p>
+          <a:p>
+            <a:r>
+              <a:t>  실제 LiDAR 에서 앞쪽 큰 파도가 뒤쪽 파도를 가리는 현상 (shadowing). 우리 simulator 는 이걸 별도 modeling 안 함 — ray-triangle intersection 의 first-hit (가장 가까운 intersection) 만 반환. 결과적으로 앞쪽 triangle 이 뒤쪽 triangle 의 ray path 를 자연스럽게 차단. 이건 geometric optics (광선 직진 + 첫 충돌점 측정) 의 자연스러운 결과 — 추가 가정 0. Möller-Trumbore 알고리즘이 first-hit 만 반환하므로 코드 수준에서도 자동으로 처리됨.</a:t>
             </a:r>
           </a:p>
           <a:p/>
           <a:p>
             <a:r>
-              <a:t>전체 110 episode를 HDF5 파일로 저장.</a:t>
+              <a:t>(3) 검증 (validation):</a:t>
+            </a:r>
+          </a:p>
+          <a:p>
+            <a:r>
+              <a:t>  - 108 unit test 통과 — ray-triangle intersection, Fresnel 계산, shadowing edge case (예: 거의 수직 입사), vessel motion 모두 별도 검증.</a:t>
+            </a:r>
+          </a:p>
+          <a:p>
+            <a:r>
+              <a:t>  - 110 episode 합성 dataset — BF2 (아주 잔잔) ~ BF7 (매우 거친), N_components 1–30, directional spreading 다양화. 각 episode 30 초 / 0.1 초 간격 / 50×50 ground-truth grid + LiDAR scan ~50 점/frame. HDF5 format.</a:t>
+            </a:r>
+          </a:p>
+          <a:p>
+            <a:r>
+              <a:t>  - Sea trial 실측 LiDAR 데이터 (sea_trial_lidar.png 참조) 와 시각적 비교. Synthetic LiDAR scan 의 점 분포 (raydrop 패턴, 거리에 따른 density 변화) 가 실측과 정성적으로 일치.</a:t>
             </a:r>
           </a:p>
           <a:p/>
           <a:p>
             <a:r>
-              <a:t>Reproducibility 보장:</a:t>
-            </a:r>
-          </a:p>
-          <a:p>
-            <a:r>
-              <a:t>  - Seed 저장 — 동일 seed로 재실행 시 동일 결과</a:t>
-            </a:r>
-          </a:p>
-          <a:p>
-            <a:r>
-              <a:t>  - 53 + 55 = 108개 unit test — simulator와 estimator 모두 검증</a:t>
+              <a:t>(4) 정직한 한계:</a:t>
+            </a:r>
+          </a:p>
+          <a:p>
+            <a:r>
+              <a:t>  - 미세파 (capillary wave, mm 단위 surface roughness): 실제 LiDAR raydrop 에 추가 영향. 우리는 미반영. Operational sea state (BF2–BF6) 에서는 dominant 영향 아님.</a:t>
+            </a:r>
+          </a:p>
+          <a:p>
+            <a:r>
+              <a:t>  - Foam, white cap (BF6 이상): wave breaking 시 발생, 우리 LWT family 가 처리 못 하는 비선형 현상.</a:t>
+            </a:r>
+          </a:p>
+          <a:p>
+            <a:r>
+              <a:t>  - Breaking wave: VOF-EnKF 영역, 우리는 future work 로.</a:t>
             </a:r>
           </a:p>
           <a:p/>
           <a:p>
             <a:r>
-              <a:t>이 dataset 자체가 paper의 contribution 일부입니다. Ehlers 2023도 비슷한 합성 benchmark를 만들었지만 1D였고, 우리는 2D directional + LiDAR sensor model까지 포함.</a:t>
+              <a:t>이 정도의 sensor model 을 simulate 한 prior art 는 12 편 정독 결과 0 편입니다. Sensor 물리까지 포함된 simulator + 110 episode 합성 dataset 자체가 paper 의 contribution 일부입니다.</a:t>
             </a:r>
           </a:p>
         </p:txBody>
@@ -4207,6 +4213,145 @@
 </p:notes>
 </file>
 
+<file path=ppt/notesSlides/notesSlide32.xml><?xml version="1.0" encoding="utf-8"?>
+<p:notes xmlns:a="http://schemas.openxmlformats.org/drawingml/2006/main" xmlns:p="http://schemas.openxmlformats.org/presentationml/2006/main" xmlns:r="http://schemas.openxmlformats.org/officeDocument/2006/relationships">
+  <p:cSld>
+    <p:spTree>
+      <p:nvGrpSpPr>
+        <p:cNvPr id="1" name=""/>
+        <p:cNvGrpSpPr/>
+        <p:nvPr/>
+      </p:nvGrpSpPr>
+      <p:grpSpPr>
+        <a:xfrm>
+          <a:off x="0" y="0"/>
+          <a:ext cx="0" cy="0"/>
+          <a:chOff x="0" y="0"/>
+          <a:chExt cx="0" cy="0"/>
+        </a:xfrm>
+      </p:grpSpPr>
+      <p:sp>
+        <p:nvSpPr>
+          <p:cNvPr id="2" name="Slide Image Placeholder 1"/>
+          <p:cNvSpPr>
+            <a:spLocks noGrp="1"/>
+          </p:cNvSpPr>
+          <p:nvPr>
+            <p:ph type="sldImg" idx="2"/>
+          </p:nvPr>
+        </p:nvSpPr>
+        <p:spPr/>
+      </p:sp>
+      <p:sp>
+        <p:nvSpPr>
+          <p:cNvPr id="3" name="Notes Placeholder 2"/>
+          <p:cNvSpPr>
+            <a:spLocks noGrp="1"/>
+          </p:cNvSpPr>
+          <p:nvPr>
+            <p:ph type="body" idx="3" sz="quarter"/>
+          </p:nvPr>
+        </p:nvSpPr>
+        <p:spPr/>
+        <p:txBody>
+          <a:bodyPr/>
+          <a:lstStyle/>
+          <a:p>
+            <a:r>
+              <a:t>WaveSim 합성 dataset 의 detail 입니다.</a:t>
+            </a:r>
+          </a:p>
+          <a:p/>
+          <a:p>
+            <a:r>
+              <a:t>Episode 설계:</a:t>
+            </a:r>
+          </a:p>
+          <a:p>
+            <a:r>
+              <a:t>  - Sea state: BF2 (잔잔) ~ BF7 (매우 거친) 6 단계. ε (steepness) 는 BF2 ~0.02, BF7 ~0.10.</a:t>
+            </a:r>
+          </a:p>
+          <a:p>
+            <a:r>
+              <a:t>  - N_components: 1 ~ 30 — 알고리즘이 component 수에 robust 한지 검증.</a:t>
+            </a:r>
+          </a:p>
+          <a:p>
+            <a:r>
+              <a:t>  - Sensor type 두 가지: uniform (균등 분포), slope (거리 비례 분포 — 실제 LiDAR 의 elevation grid).</a:t>
+            </a:r>
+          </a:p>
+          <a:p>
+            <a:r>
+              <a:t>  - Seeds: BF2-BF5 는 seed 0-4 (5 개씩, 통계 평가용), BF6-BF7 은 seed 0 (1 개씩, 극한 sea state).</a:t>
+            </a:r>
+          </a:p>
+          <a:p/>
+          <a:p>
+            <a:r>
+              <a:t>Episode 당 데이터 구성:</a:t>
+            </a:r>
+          </a:p>
+          <a:p>
+            <a:r>
+              <a:t>  - 30 초 시뮬레이션, 0.1 초 간격 → 300 frame.</a:t>
+            </a:r>
+          </a:p>
+          <a:p>
+            <a:r>
+              <a:t>  - Ground-truth η field 50×50 격자 — 평가 시 참값.</a:t>
+            </a:r>
+          </a:p>
+          <a:p>
+            <a:r>
+              <a:t>  - LiDAR scan: raydrop / shadowing 적용 후 frame 당 ~50 점.</a:t>
+            </a:r>
+          </a:p>
+          <a:p/>
+          <a:p>
+            <a:r>
+              <a:t>Reproducibility 보장:</a:t>
+            </a:r>
+          </a:p>
+          <a:p>
+            <a:r>
+              <a:t>  - Seed 저장 — 동일 seed 로 재실행 시 동일 결과.</a:t>
+            </a:r>
+          </a:p>
+          <a:p>
+            <a:r>
+              <a:t>  - 53 + 55 = 108 unit test — simulator 와 estimator 모두 검증.</a:t>
+            </a:r>
+          </a:p>
+          <a:p/>
+          <a:p>
+            <a:r>
+              <a:t>이 dataset 자체가 paper 의 contribution 일부입니다. Ehlers 2023 도 비슷한 합성 benchmark 만들었지만 1D + radar 였고, 우리는 2D directional + LiDAR sensor model 까지 포함.</a:t>
+            </a:r>
+          </a:p>
+        </p:txBody>
+      </p:sp>
+      <p:sp>
+        <p:nvSpPr>
+          <p:cNvPr id="4" name="Slide Number Placeholder 3"/>
+          <p:cNvSpPr>
+            <a:spLocks noGrp="1"/>
+          </p:cNvSpPr>
+          <p:nvPr>
+            <p:ph type="sldNum" idx="5" sz="quarter"/>
+          </p:nvPr>
+        </p:nvSpPr>
+        <p:spPr/>
+      </p:sp>
+    </p:spTree>
+  </p:cSld>
+  <p:clrMapOvr>
+    <a:masterClrMapping/>
+  </p:clrMapOvr>
+</p:notes>
+</file>
+
 <file path=ppt/notesSlides/notesSlide4.xml><?xml version="1.0" encoding="utf-8"?>
 <p:notes xmlns:a="http://schemas.openxmlformats.org/drawingml/2006/main" xmlns:p="http://schemas.openxmlformats.org/presentationml/2006/main" xmlns:r="http://schemas.openxmlformats.org/officeDocument/2006/relationships">
   <p:cSld>
@@ -4263,76 +4408,66 @@
           </a:p>
           <a:p>
             <a:r>
-              <a:t>  nRMSE란 무엇인가? '정규화된 평균 제곱근 오차'입니다.</a:t>
-            </a:r>
-          </a:p>
-          <a:p>
-            <a:r>
-              <a:t>  쉽게 말하면 0에 가까울수록 좋고, 1에 가까울수록 나쁩니다.</a:t>
-            </a:r>
-          </a:p>
-          <a:p>
-            <a:r>
-              <a:t>  예를 들어 nRMSE 0.2는 '실제 파도의 80% 정도를 맞춘다'고 이해하시면 됩니다.</a:t>
+              <a:t>  nRMSE 는 '정규화된 평균 제곱근 오차' 입니다 (관측 wave 표준편차로 normalize).</a:t>
+            </a:r>
+          </a:p>
+          <a:p>
+            <a:r>
+              <a:t>  값이 0 에 가까울수록 추정 정확도 높음, 1 에 가까울수록 낮음.</a:t>
+            </a:r>
+          </a:p>
+          <a:p>
+            <a:r>
+              <a:t>  nRMSE 0.2 는 '실제 wave 와 추정의 차이가 wave 표준편차의 약 20%' 라는 의미입니다.</a:t>
             </a:r>
           </a:p>
           <a:p/>
           <a:p>
             <a:r>
-              <a:t>  - WaveSplat (우리 방법): 0.211 — 약 79% 수준으로 맞춤</a:t>
-            </a:r>
-          </a:p>
-          <a:p>
-            <a:r>
-              <a:t>  - Wang2025 (최신 선행연구를 충실히 재현한 것): 0.253 — 약 75% 수준</a:t>
+              <a:t>  - WaveSplat (우리 방법): 0.211</a:t>
+            </a:r>
+          </a:p>
+          <a:p>
+            <a:r>
+              <a:t>  - Wang2025 (최신 선행연구 재현): 0.253</a:t>
             </a:r>
           </a:p>
           <a:p/>
           <a:p>
             <a:r>
-              <a:t>비교 대상인 Wang2025는 우리가 임의로 만든 baseline이 아니라,</a:t>
-            </a:r>
-          </a:p>
-          <a:p>
-            <a:r>
-              <a:t>2025년에 출판된 논문(Wang, Coastal Engineering 197)의 방법을</a:t>
-            </a:r>
-          </a:p>
-          <a:p>
-            <a:r>
-              <a:t>그대로 재현한 것입니다. 앙상블 300개, fuzzy R 적응 등 원논문 세팅을 따랐습니다.</a:t>
+              <a:t>Wang2025 는 2025년 발표된 논문 (Wang, Coastal Engineering 197) 의 방법을 그대로 재현한 것입니다. 앙상블 300 개, fuzzy R 적응 등 원논문 세팅을 따랐습니다.</a:t>
             </a:r>
           </a:p>
           <a:p/>
           <a:p>
             <a:r>
-              <a:t>오른쪽은 여러 방법의 속도를 로그 스케일로 비교한 그래프입니다.</a:t>
-            </a:r>
-          </a:p>
-          <a:p>
-            <a:r>
-              <a:t>  - 빨간 점선이 '실시간 기준선' (100ms)입니다. 이 왼쪽에 있어야 제어에 쓸 수 있습니다.</a:t>
-            </a:r>
-          </a:p>
-          <a:p>
-            <a:r>
-              <a:t>  - WaveSplat 13ms = 초당 약 75번 추정 가능 → 10Hz 제어 루프에 충분히 여유 있습니다</a:t>
-            </a:r>
-          </a:p>
-          <a:p>
-            <a:r>
-              <a:t>  - Wang2025 632ms = 실시간으로는 쓸 수 없는 속도입니다</a:t>
-            </a:r>
-          </a:p>
-          <a:p>
-            <a:r>
-              <a:t>  - PFT-PINN 30분 = 완전히 오프라인 전용입니다 (Ehlers 2025, RTX 3090 기준)</a:t>
+              <a:t>오른쪽은 여러 방법의 추정 시간 (per frame) 을 로그 스케일로 비교한 그래프입니다.</a:t>
+            </a:r>
+          </a:p>
+          <a:p>
+            <a:r>
+              <a:t>  - WaveSplat 13.4 ms — 초당 약 75 번 추정 가능, 10 Hz 제어 루프에 적합</a:t>
+            </a:r>
+          </a:p>
+          <a:p>
+            <a:r>
+              <a:t>  - Wang2025 632 ms — 추정 한 번에 0.6 초 이상 소요</a:t>
+            </a:r>
+          </a:p>
+          <a:p>
+            <a:r>
+              <a:t>  - FNO 1.9 ms — 빠르나 supervised pre-training 필요 (Ehlers 2023)</a:t>
+            </a:r>
+          </a:p>
+          <a:p>
+            <a:r>
+              <a:t>  - PFT-PINN 30 분 — instance 마다 NN 학습 (RTX 3090 기준, Ehlers 2025)</a:t>
             </a:r>
           </a:p>
           <a:p/>
           <a:p>
             <a:r>
-              <a:t>핵심 메시지: 우리 방법이 '더 정확하면서 47배 빠른' 방법입니다.</a:t>
+              <a:t>핵심 메시지: WaveSplat 이 더 정확하면서 47 배 빠른 방법입니다.</a:t>
             </a:r>
           </a:p>
           <a:p>
@@ -4407,138 +4542,123 @@
           <a:lstStyle/>
           <a:p>
             <a:r>
-              <a:t>13편의 논문을 정독한 결과를 5가지 접근법으로 분류했습니다.</a:t>
-            </a:r>
-          </a:p>
-          <a:p>
-            <a:r>
-              <a:t>각 카테고리를 쉽게 설명하겠습니다.</a:t>
+              <a:t>13 편의 논문을 정독한 결과를 5 가지 접근법으로 분류했습니다.</a:t>
+            </a:r>
+          </a:p>
+          <a:p>
+            <a:r>
+              <a:t>각 접근법의 작동 원리와 강점/한계를 자세히 설명드립니다.</a:t>
             </a:r>
           </a:p>
           <a:p/>
           <a:p>
             <a:r>
-              <a:t>(1) 격자 기반 최적화 — 가장 전통적인 방법입니다.</a:t>
-            </a:r>
-          </a:p>
-          <a:p>
-            <a:r>
-              <a:t>  비유: 바둑판 위에 파도를 그리는 것과 비슷합니다.</a:t>
-            </a:r>
-          </a:p>
-          <a:p>
-            <a:r>
-              <a:t>  공간을 일정 간격의 격자로 나누고, 각 격자 점에서 파고를 추정합니다.</a:t>
-            </a:r>
-          </a:p>
-          <a:p>
-            <a:r>
-              <a:t>  '내가 추정한 파도'와 '실제 관측한 점'의 차이를 줄이도록 최적화합니다.</a:t>
-            </a:r>
-          </a:p>
-          <a:p>
-            <a:r>
-              <a:t>  Desmars 2018/2020/2023이 대표적이고, 우리와 문제 설정이 가장 비슷합니다.</a:t>
-            </a:r>
-          </a:p>
-          <a:p>
-            <a:r>
-              <a:t>  한계: 격자 간격보다 짧은 파도는 표현할 수 없습니다 (Nyquist 한계).</a:t>
+              <a:t>(1) 격자 기반 최적화 (Desmars 2018, 2020, 2023):</a:t>
+            </a:r>
+          </a:p>
+          <a:p>
+            <a:r>
+              <a:t>  - 작동 원리: 공간을 일정 간격 격자로 나눔 (예: x = 0, 5, 10, ... m). 각 격자점에서 wave 의 amplitude 추정. 추정한 wave 가 만들 측정값과 실제 측정값의 차이를 cost function 으로 정의해 최적화로 최소화.</a:t>
+            </a:r>
+          </a:p>
+          <a:p>
+            <a:r>
+              <a:t>  - 강점: 수치해석 분야에서 framework 자체가 잘 정립 — 안정성·수렴성·convergence rate 모두 알려져 있음. Desmars 2020 은 wave tank 실험으로 정확도 검증 완료.</a:t>
+            </a:r>
+          </a:p>
+          <a:p>
+            <a:r>
+              <a:t>  - 한계: 추정 가능한 wavenumber 가 격자 간격에 의해 제약. Nyquist-Shannon 정리에 의해 k_max = π/Δx (Δx 는 격자 간격). 격자 사이 wavenumber (예: k = 0.15 rad/m 인데 격자가 0.1, 0.2 만 가지면) 는 표현 불가. 또 거의 모든 prior art 가 1D 가정 (선박 진행 방향만) — 실제 multi-directional sea state 처리 안 함.</a:t>
             </a:r>
           </a:p>
           <a:p/>
           <a:p>
             <a:r>
-              <a:t>(2) 앙상블 칼만 필터 — 확률론적 방법입니다.</a:t>
-            </a:r>
-          </a:p>
-          <a:p>
-            <a:r>
-              <a:t>  비유: '300명이 각자 파도를 추측하고, 실제 관측을 보면서 다 함께 고치는' 방식입니다.</a:t>
-            </a:r>
-          </a:p>
-          <a:p>
-            <a:r>
-              <a:t>  Wang-Pan 2021이 처음 시도, Wang 2025가 최신 변형입니다.</a:t>
-            </a:r>
-          </a:p>
-          <a:p>
-            <a:r>
-              <a:t>  Yan 2025는 가장 정확한 유체역학(Navier-Stokes)에 이 필터를 적용했습니다.</a:t>
-            </a:r>
-          </a:p>
-          <a:p>
-            <a:r>
-              <a:t>  물리적으로 가장 정확하지만, 수백 개 시뮬레이션 비용 때문에 느립니다.</a:t>
+              <a:t>(2) 앙상블 칼만 필터 (Wang-Pan 2021/22, Wang 2025, Yan 2025):</a:t>
+            </a:r>
+          </a:p>
+          <a:p>
+            <a:r>
+              <a:t>  - 작동 원리: 50–300 개의 wave simulation 을 동시에 진행 (각각 약간 다른 초기 조건). 측정값이 들어올 때마다 50 개 simulation 의 평균과 분산을 베이지안 update rule 로 갱신. Wang-Pan 은 forecast 모델로 HOS (High-Order Spectral, 비선형 wave model) 사용. Yan 2025 는 VOF + 전체 Navier-Stokes 까지 사용 → wave breaking 처리 가능.</a:t>
+            </a:r>
+          </a:p>
+          <a:p>
+            <a:r>
+              <a:t>  - 강점: forecast 모델 자체가 비선형이라 Stokes 비선형, plunging breaker 같은 비선형 현상까지 reconstruction. 물리 충실도가 가장 높음.</a:t>
+            </a:r>
+          </a:p>
+          <a:p>
+            <a:r>
+              <a:t>  - 한계: 50–300 개 simulation 을 매 시점 동시 진행 — GPU 사용해도 수백 ms 이상. Real-time control loop (10 Hz, 100 ms 예산) 에 부적합. 또 격자 기반이라 1D 위주.</a:t>
             </a:r>
           </a:p>
           <a:p/>
           <a:p>
             <a:r>
-              <a:t>(3) 지도학습 신경망 — 미리 학습된 인공지능으로 빠르게 추정합니다.</a:t>
-            </a:r>
-          </a:p>
-          <a:p>
-            <a:r>
-              <a:t>  Ehlers 2023의 FNO가 1.9ms로 가장 빠릅니다.</a:t>
-            </a:r>
-          </a:p>
-          <a:p>
-            <a:r>
-              <a:t>  하지만 학습 데이터 3120개가 필요하고, 학습하지 않은 환경에서는 성능이 떨어집니다.</a:t>
+              <a:t>(3) 지도학습 신경망 (Ehlers 2023 FNO):</a:t>
+            </a:r>
+          </a:p>
+          <a:p>
+            <a:r>
+              <a:t>  - 작동 원리: 수천 개 (Ehlers 2023 의 경우 3120 개) HOS 합성 데이터로 NN 을 미리 학습. 학습 후에는 sparse measurement 를 입력하면 wave field 를 출력. FNO (Fourier Neural Operator) architecture 가 Fourier 공간에서 global mapping 학습.</a:t>
+            </a:r>
+          </a:p>
+          <a:p>
+            <a:r>
+              <a:t>  - 강점: 학습 후 inference 매우 빠름 (1.9 ms / instance). 학습 데이터 분포 안에서는 정확.</a:t>
+            </a:r>
+          </a:p>
+          <a:p>
+            <a:r>
+              <a:t>  - 한계: 학습 데이터 합성 자체가 큰 작업 (3120 HOS simulation). 학습 분포 밖 sea state 또는 다른 sensor 조건에서는 정확도 저하 (distribution shift). Black-box — 왜 그렇게 추정했는지 해석 어려움. 1D 만.</a:t>
             </a:r>
           </a:p>
           <a:p/>
           <a:p>
             <a:r>
-              <a:t>(4) 물리 기반 비지도 NN — 학습 데이터 없이 물리 법칙만으로 학습합니다.</a:t>
-            </a:r>
-          </a:p>
-          <a:p>
-            <a:r>
-              <a:t>  Ehlers 2025의 PFT-PINN이 대표적입니다.</a:t>
-            </a:r>
-          </a:p>
-          <a:p>
-            <a:r>
-              <a:t>  비선형 파도까지 처리할 수 있지만, 한 번 추정에 약 30분이 걸립니다.</a:t>
+              <a:t>(4) 물리 기반 비지도 NN (Ehlers 2025 PFT-PINN):</a:t>
+            </a:r>
+          </a:p>
+          <a:p>
+            <a:r>
+              <a:t>  - 작동 원리: PINN (physics-informed neural network) 으로 학습 데이터 없이 학습. Loss 함수가 PDE residual (Laplace 방정식 + 표면 boundary condition + 바닥 condition) 이라 NN 이 wave physics 자체를 학습. Auto-differentiation 으로 PDE residual 계산.</a:t>
+            </a:r>
+          </a:p>
+          <a:p>
+            <a:r>
+              <a:t>  - 강점: 학습 데이터 0 개로 비선형 wave 처리 (linear LWT 부터 NLSE2 같은 weak nonlinear 까지). Wave flume 실험으로 검증 (SSP &lt; 0.05).</a:t>
+            </a:r>
+          </a:p>
+          <a:p>
+            <a:r>
+              <a:t>  - 한계: Instance 마다 처음부터 30 분 학습 (RTX 3090, 40K+ epochs) — real-time 불가. Buoy time-series 입력만 처리 — sparse spatial LiDAR setup 미지원. 1D + t.</a:t>
             </a:r>
           </a:p>
           <a:p/>
           <a:p>
             <a:r>
-              <a:t>(5) 연속 파라미터 추정 — 우리 WaveSplat의 접근법입니다.</a:t>
-            </a:r>
-          </a:p>
-          <a:p>
-            <a:r>
-              <a:t>  격자를 쓰지 않고, 파도 하나하나를 '파수, 주파수, 진폭, 위상'이라는</a:t>
-            </a:r>
-          </a:p>
-          <a:p>
-            <a:r>
-              <a:t>  물리적 파라미터로 직접 표현합니다.</a:t>
-            </a:r>
-          </a:p>
-          <a:p>
-            <a:r>
-              <a:t>  핵심 비결: 분산 관계(dispersion relation)라는 물리 법칙을 강제합니다.</a:t>
-            </a:r>
-          </a:p>
-          <a:p>
-            <a:r>
-              <a:t>  ω = √(g·|k|·tanh(|k|·d)) — 이 관계 덕분에 추정해야 할 변수가 줄어들고,</a:t>
-            </a:r>
-          </a:p>
-          <a:p>
-            <a:r>
-              <a:t>  50개 관측점만으로도 파도장을 추정할 수 있습니다.</a:t>
+              <a:t>(5) 연속 파라미터 추정 — WaveSplat (우리):</a:t>
+            </a:r>
+          </a:p>
+          <a:p>
+            <a:r>
+              <a:t>  - 작동 원리: wave 를 N 개 plane wave 의 파라미터 (A_n, k_xn, k_yn, ω_n, φ_n) 로 직접 표현 — 격자 없이 연속 wavenumber. Dispersion 관계 ω = √(g·|k|·tanh(|k|·d)) 를 hard constraint 로 강제 → 자유도 5N → 4N. Adam optimizer 로 measurement 와 model prediction 의 차이 최소화.</a:t>
+            </a:r>
+          </a:p>
+          <a:p>
+            <a:r>
+              <a:t>  - 강점: &lt;100 ms inference (CPU) — real-time control loop 적합. 2D directional 처리. LiDAR raydrop, shadowing, Fresnel 까지 simulator 에 모사.</a:t>
+            </a:r>
+          </a:p>
+          <a:p>
+            <a:r>
+              <a:t>  - 한계: Linear superposition 가정 (LWT family). Klein 2020 의 정량 비교에서 HOSM &gt; NLSE2 &gt; LWT — 비선형 wave 처리 못 함. ε &lt; 0.07 operational range 에서만 신뢰.</a:t>
             </a:r>
           </a:p>
           <a:p/>
           <a:p>
             <a:r>
-              <a:t>다음 슬라이드에서 가장 중요한 선행연구 2편을 자세히 소개합니다.</a:t>
+              <a:t>다음 슬라이드부터 가장 중요한 선행 연구 2 편을 자세히 소개하겠습니다.</a:t>
             </a:r>
           </a:p>
         </p:txBody>
@@ -4608,117 +4728,138 @@
           <a:lstStyle/>
           <a:p>
             <a:r>
-              <a:t>이 논문 family가 우리의 가장 직접적인 비교 대상입니다.</a:t>
+              <a:t>이 논문 family 가 우리의 가장 직접적 비교 대상입니다. 주요 두 용어를 먼저 정의하겠습니다.</a:t>
             </a:r>
           </a:p>
           <a:p/>
           <a:p>
             <a:r>
-              <a:t>EnKF(앙상블 칼만 필터)를 쉽게 설명하면:</a:t>
-            </a:r>
-          </a:p>
-          <a:p>
-            <a:r>
-              <a:t>  '시뮬레이션 300개를 동시에 돌리고, 실제 관측을 받을 때마다</a:t>
-            </a:r>
-          </a:p>
-          <a:p>
-            <a:r>
-              <a:t>   각 시뮬레이션을 확률적으로 보정하는 필터'입니다.</a:t>
-            </a:r>
-          </a:p>
-          <a:p>
-            <a:r>
-              <a:t>  원래 날씨 예보에서 쓰이던 기법인데, 파도 추정에도 적용된 것입니다.</a:t>
+              <a:t>EnKF (Ensemble Kalman Filter, 앙상블 칼만 필터):</a:t>
+            </a:r>
+          </a:p>
+          <a:p>
+            <a:r>
+              <a:t>  - 50–300 개의 wave simulation 을 동시에 진행 (각각 약간 다른 초기 조건).</a:t>
+            </a:r>
+          </a:p>
+          <a:p>
+            <a:r>
+              <a:t>  - Forecast 단계: 각 ensemble member 가 wave model 로 시간 진행 (예: 1초 후 wave field 예측).</a:t>
+            </a:r>
+          </a:p>
+          <a:p>
+            <a:r>
+              <a:t>  - Analysis 단계: measurement 가 들어올 때마다 ensemble 의 평균과 covariance 로부터 Kalman gain 계산.</a:t>
+            </a:r>
+          </a:p>
+          <a:p>
+            <a:r>
+              <a:t>  - 베이지안 update rule: x_a = x_f + K (y - H x_f). 여기서 K 가 Kalman gain, y 가 measurement, H 가 observation operator.</a:t>
+            </a:r>
+          </a:p>
+          <a:p>
+            <a:r>
+              <a:t>  - 원래 기상학 데이터 동화에서 출발 (Evensen 1994), Hunt 2007 의 LETKF 가 표준 변형.</a:t>
+            </a:r>
+          </a:p>
+          <a:p>
+            <a:r>
+              <a:t>  - Wave estimation 에는 Wang-Pan 2021 이 처음 적용.</a:t>
             </a:r>
           </a:p>
           <a:p/>
           <a:p>
             <a:r>
-              <a:t>이 family의 발전 과정:</a:t>
-            </a:r>
-          </a:p>
-          <a:p>
-            <a:r>
-              <a:t>  - Wang &amp; Pan 2021 (JFM 918): EnKF + HOS를 처음 결합</a:t>
-            </a:r>
-          </a:p>
-          <a:p>
-            <a:r>
-              <a:t>  - Wang &amp; Pan 2022 (JFM 949): 해류(current)까지 동시 추정하도록 확장</a:t>
-            </a:r>
-          </a:p>
-          <a:p>
-            <a:r>
-              <a:t>  - Wang 2025 (Coastal Eng 197): 앙상블 300개, fuzzy R(노이즈 자동 적응),</a:t>
-            </a:r>
-          </a:p>
-          <a:p>
-            <a:r>
-              <a:t>    Delaunay 보간(불규칙 관측점 처리)으로 개선</a:t>
+              <a:t>HOS (High-Order Spectral method, 고차 스펙트럴 방법):</a:t>
+            </a:r>
+          </a:p>
+          <a:p>
+            <a:r>
+              <a:t>  - 비선형 wave model. Linear Wave Theory (LWT) 의 확장.</a:t>
+            </a:r>
+          </a:p>
+          <a:p>
+            <a:r>
+              <a:t>  - LWT 는 wave field 를 plane wave 의 단순 선형 중첩으로 표현 (ε &lt; 0.07 에서만 정확).</a:t>
+            </a:r>
+          </a:p>
+          <a:p>
+            <a:r>
+              <a:t>  - HOS 는 표면 boundary condition 의 비선형 항 (wave-wave interaction, 즉 두 wave 가 만나서 생기는 추가 wave) 까지 spectral 표현으로 계산.</a:t>
+            </a:r>
+          </a:p>
+          <a:p>
+            <a:r>
+              <a:t>  - Wave steepness ε ~ 0.1 까지 처리 가능 — Stokes wave, swell-wind interaction 같은 비선형 현상까지.</a:t>
+            </a:r>
+          </a:p>
+          <a:p>
+            <a:r>
+              <a:t>  - Dommermuth &amp; Yue 1987, West et al. 1987 에서 독립적으로 제안. 이후 ocean engineering 에서 표준 비선형 wave model 로 자리잡음.</a:t>
+            </a:r>
+          </a:p>
+          <a:p>
+            <a:r>
+              <a:t>  - Klein 2020 의 정량 비교에서 HOSM &gt; NLSE2 &gt; NLSE &gt; LWT 순 정확도.</a:t>
             </a:r>
           </a:p>
           <a:p/>
           <a:p>
             <a:r>
-              <a:t>우리는 Wang 2025를 코드로 충실하게 재현했습니다:</a:t>
-            </a:r>
-          </a:p>
-          <a:p>
-            <a:r>
-              <a:t>  - Ne=300, 80x60 격자(dx=3m), fuzzy R, Delaunay, sub-state ETKF</a:t>
-            </a:r>
-          </a:p>
-          <a:p>
-            <a:r>
-              <a:t>  - 원논문과의 차이: HOS 대신 linear dispersion 사용</a:t>
-            </a:r>
-          </a:p>
-          <a:p>
-            <a:r>
-              <a:t>    (우리 방법도 linear이므로, 공정한 비교를 위해 같은 물리 모델을 적용)</a:t>
+              <a:t>이 family 의 발전 과정:</a:t>
+            </a:r>
+          </a:p>
+          <a:p>
+            <a:r>
+              <a:t>  - Wang &amp; Pan 2021 (JFM 918): EnKF + HOS 를 처음 결합한 paper.</a:t>
+            </a:r>
+          </a:p>
+          <a:p>
+            <a:r>
+              <a:t>  - Wang &amp; Pan 2022 (JFM 949): 해류 (current) 까지 동시 추정 (EnKF-HOS-C).</a:t>
+            </a:r>
+          </a:p>
+          <a:p>
+            <a:r>
+              <a:t>  - Wang 2025 (Coastal Eng 197): 앙상블 300 개, fuzzy R (measurement noise 자동 적응), Delaunay 보간 (불규칙 측정점 처리) 추가.</a:t>
             </a:r>
           </a:p>
           <a:p/>
           <a:p>
             <a:r>
+              <a:t>우리는 Wang 2025 의 방법을 코드로 충실히 재현했습니다 (Ne=300, 80×60 격자, dx=3m, fuzzy R, Delaunay). 원논문과의 차이는 forecast 모델로 HOS 대신 linear dispersion 사용 — 우리 WaveSplat 도 linear 이므로 공정 비교 위해 같은 model.</a:t>
+            </a:r>
+          </a:p>
+          <a:p/>
+          <a:p>
+            <a:r>
               <a:t>비교 결과:</a:t>
             </a:r>
           </a:p>
           <a:p>
             <a:r>
-              <a:t>  - WaveSplat: 0.211 nRMSE / 13ms (더 정확하고 훨씬 빠름)</a:t>
-            </a:r>
-          </a:p>
-          <a:p>
-            <a:r>
-              <a:t>  - Wang2025: 0.253 nRMSE / 632ms (격자 한계로 0.25 아래로 못 내려감)</a:t>
+              <a:t>  - WaveSplat: nRMSE 0.211, 13 ms / frame</a:t>
+            </a:r>
+          </a:p>
+          <a:p>
+            <a:r>
+              <a:t>  - Wang2025: nRMSE 0.253, 632 ms / frame</a:t>
             </a:r>
           </a:p>
           <a:p/>
           <a:p>
             <a:r>
-              <a:t>에피소드별 패턴 (뒤에서 자세히 보여드립니다):</a:t>
-            </a:r>
-          </a:p>
-          <a:p>
-            <a:r>
-              <a:t>  - 단순한 파도(1~5개 성분): WaveSplat이 압도적으로 우수</a:t>
-            </a:r>
-          </a:p>
-          <a:p>
-            <a:r>
-              <a:t>    예) BF3_2comp: WaveSplat 0.052 vs Wang 0.250</a:t>
-            </a:r>
-          </a:p>
-          <a:p>
-            <a:r>
-              <a:t>  - 복잡한 파도(15~30개 성분): Wang2025가 더 나은 경우도 있음</a:t>
-            </a:r>
-          </a:p>
-          <a:p>
-            <a:r>
-              <a:t>  - 이 trade-off는 정직하게 보고할 예정입니다</a:t>
+              <a:t>에피소드별 패턴:</a:t>
+            </a:r>
+          </a:p>
+          <a:p>
+            <a:r>
+              <a:t>  - 단순 파도 (N_components 1–5): WaveSplat 우위 (예: BF3_2comp 에서 WaveSplat 0.052 vs Wang 0.250)</a:t>
+            </a:r>
+          </a:p>
+          <a:p>
+            <a:r>
+              <a:t>  - 복잡 파도 (N_components 15–30): Wang2025 가 일부 episode 에서 우위 — trade-off 정직하게 보고 예정</a:t>
             </a:r>
           </a:p>
         </p:txBody>
@@ -5130,66 +5271,37 @@
           <a:lstStyle/>
           <a:p>
             <a:r>
-              <a:t>WaveSim은 우리가 만든 simulator입니다. 두 부분으로 나뉩니다.</a:t>
+              <a:t>WaveSim 의 LiDAR 센서 모사 부분을 단계별로 설명드립니다. 다음 슬라이드에서 raydrop 과 shadowing 의 합당성을 다루겠습니다.</a:t>
             </a:r>
           </a:p>
           <a:p/>
           <a:p>
             <a:r>
-              <a:t>(1) 수면 model (physics):</a:t>
-            </a:r>
-          </a:p>
-          <a:p>
-            <a:r>
-              <a:t>  - Linear Wave Theory — N개 plane wave의 선형 중첩으로 수면 표현</a:t>
-            </a:r>
-          </a:p>
-          <a:p>
-            <a:r>
-              <a:t>  - Dispersion relation — frequency ω와 wavenumber k의 관계 (깊은 물에서 ω² = g·k·tanh(kd))</a:t>
-            </a:r>
-          </a:p>
-          <a:p>
-            <a:r>
-              <a:t>  - JONSWAP-2D 스펙트럼 — 실제 바다의 통계적 특성 모방</a:t>
+              <a:t>(1) Ray emit — vessel 위치 (선박의 LiDAR 장착 점) 에서 laser ray 발사. 실제 LiDAR (Velodyne VLP-16, Ouster OS1-64 등) 는 azimuth (수평 방위각) × elevation (수직 각도) 의 fixed angular grid 로 ray 를 발사. 예: 수평 0–360°, 수직 −15° ~ +15°, 1024 azimuth × 16 elevation = 16,384 ray / scan. 우리는 이 angular grid 를 시뮬레이션 입력으로 받음 — 실제 sensor spec 그대로 적용 가능.</a:t>
             </a:r>
           </a:p>
           <a:p/>
           <a:p>
             <a:r>
-              <a:t>한계는 정직하게 인정합니다 — Klein 2020이 정량 비교한 HOSM &gt; NLSE &gt; LWT 중 우리는 LWT family로 가장 단순. ε (steepness) &lt; 0.07 영역에서만 신뢰 가능.</a:t>
+              <a:t>(2) Wave mesh 생성 — wave 표면 η(x, y, t) 를 격자 (50×50 또는 더 dense) 로 sampling 후 두 triangle/cell 로 triangulation. 결과: 시간 t 에서의 wave 표면 = 약 4900 개 triangle 의 mesh.</a:t>
             </a:r>
           </a:p>
           <a:p/>
           <a:p>
             <a:r>
-              <a:t>(2) LiDAR sensor model — 이게 우리의 unique contribution:</a:t>
-            </a:r>
-          </a:p>
-          <a:p>
-            <a:r>
-              <a:t>  - Ray-triangle intersection: LiDAR ray가 mesh와 만나는 점을 계산. Möller-Trumbore 1997 알고리즘 사용 (그래픽 분야 표준)</a:t>
-            </a:r>
-          </a:p>
-          <a:p>
-            <a:r>
-              <a:t>  - Raydrop: 파도 표면에서 ray가 반사되어 LiDAR에 못 돌아오는 확률. Fresnel reflectance 사용 (specular = 거울 반사, diffuse = 산란)</a:t>
-            </a:r>
-          </a:p>
-          <a:p>
-            <a:r>
-              <a:t>  - Shadowing: 앞쪽 파도가 뒤쪽 파도를 가림</a:t>
-            </a:r>
-          </a:p>
-          <a:p>
-            <a:r>
-              <a:t>  - Vessel motion: 선박이 V=11.3 m/s로 움직이므로 매 frame 다른 위치에서 관측</a:t>
+              <a:t>(3) Ray-triangle intersection — 각 ray 가 발사된 후 모든 triangle 과 교차 검사. Möller &amp; Trumbore 1997 알고리즘 사용 — 1997 년 Journal of Graphics Tools 에 발표된 표준 ray-triangle intersection 알고리즘. 특징: barycentric 좌표 직접 계산, 수치적 안정, preprocessing 불필요, 매우 빠름. 이 알고리즘은 그래픽 (ray tracing renderer), 시뮬레이션, 물리 엔진 분야에서 30 년 동안 표준으로 사용. 각 ray 의 first-hit point (가장 가까운 intersection) 가 LiDAR 의 측정값.</a:t>
             </a:r>
           </a:p>
           <a:p/>
           <a:p>
             <a:r>
-              <a:t>12편 prior art 중 이 정도 sensor model을 simulate한 것은 없습니다. 39개 unit test로 simulator 정확성 검증, 100 episode를 합성 dataset으로 생성했습니다.</a:t>
+              <a:t>(4) Vessel motion 보정 — 선박이 frame 사이 (Δt = 0.1 s) 에 1.13 m 전진. 각 ray 의 emit 위치는 vessel 의 frame 별 위치 (world frame). 측정된 hit point 도 world frame 으로 표현. 실제 선박에서는 IMU + GPS 로 vessel pose (위치 + orientation) 측정 → 좌표계 변환의 표준 절차.</a:t>
+            </a:r>
+          </a:p>
+          <a:p/>
+          <a:p>
+            <a:r>
+              <a:t>이 4 단계가 LiDAR scan 한 번의 시뮬레이션 절차입니다. 다음 슬라이드에서 raydrop (점이 누락되는 현상) 과 shadowing (가려짐) 의 모사가 왜 합당한지 설명드립니다.</a:t>
             </a:r>
           </a:p>
         </p:txBody>
@@ -8476,7 +8588,7 @@
               </a:defRPr>
             </a:pPr>
             <a:r>
-              <a:t>Part 2 · WaveSim — 합성 dataset</a:t>
+              <a:t>Part 2 · WaveSim — LiDAR 모사 (2/2: 합당성)</a:t>
             </a:r>
           </a:p>
         </p:txBody>
@@ -8512,7 +8624,7 @@
               </a:defRPr>
             </a:pPr>
             <a:r>
-              <a:t>110 episode — 통제된 benchmark</a:t>
+              <a:t>Raydrop, shadowing — 합당성과 검증</a:t>
             </a:r>
           </a:p>
         </p:txBody>
@@ -8548,7 +8660,7 @@
               </a:defRPr>
             </a:pPr>
             <a:r>
-              <a:t>재현 가능, 다양한 복잡도, ground-truth η + LiDAR 점 모두 보존</a:t>
+              <a:t>Fresnel 반사 + 기하 차폐 — 광학·기하학의 표준; 108 unit test + 110 episodes 로 검증</a:t>
             </a:r>
           </a:p>
         </p:txBody>
@@ -8561,8 +8673,8 @@
         </p:nvSpPr>
         <p:spPr>
           <a:xfrm>
-            <a:off x="548640" y="1691640"/>
-            <a:ext cx="7315200" cy="4846320"/>
+            <a:off x="365760" y="1691640"/>
+            <a:ext cx="11430000" cy="5029200"/>
           </a:xfrm>
           <a:prstGeom prst="rect">
             <a:avLst/>
@@ -8577,11 +8689,11 @@
           <a:p>
             <a:pPr>
               <a:spcAft>
-                <a:spcPts val="300"/>
-              </a:spcAft>
-            </a:pPr>
-            <a:r>
-              <a:rPr sz="1300">
+                <a:spcPts val="200"/>
+              </a:spcAft>
+            </a:pPr>
+            <a:r>
+              <a:rPr sz="1100">
                 <a:solidFill>
                   <a:srgbClr val="1A1A2E"/>
                 </a:solidFill>
@@ -8590,16 +8702,16 @@
               <a:t>• </a:t>
             </a:r>
             <a:r>
-              <a:rPr sz="1300" b="1">
-                <a:solidFill>
-                  <a:srgbClr val="1A1A2E"/>
-                </a:solidFill>
-                <a:latin typeface="Calibri"/>
-              </a:rPr>
-              <a:t>Episode 변수</a:t>
-            </a:r>
-            <a:r>
-              <a:rPr sz="1300" b="0">
+              <a:rPr sz="1100" b="1">
+                <a:solidFill>
+                  <a:srgbClr val="1A1A2E"/>
+                </a:solidFill>
+                <a:latin typeface="Calibri"/>
+              </a:rPr>
+              <a:t>Raydrop — 점이 왜 누락되는가</a:t>
+            </a:r>
+            <a:r>
+              <a:rPr sz="1100" b="0">
                 <a:solidFill>
                   <a:srgbClr val="1A1A2E"/>
                 </a:solidFill>
@@ -8611,86 +8723,122 @@
           <a:p>
             <a:pPr>
               <a:spcAft>
-                <a:spcPts val="300"/>
-              </a:spcAft>
-            </a:pPr>
-            <a:r>
-              <a:rPr sz="1300">
-                <a:solidFill>
-                  <a:srgbClr val="1A1A2E"/>
-                </a:solidFill>
-                <a:latin typeface="Calibri"/>
-              </a:rPr>
-              <a:t>   – Sea state: BF2–BF7 (6단계 Beaufort scale, 잔잔 → 매우 거친)</a:t>
-            </a:r>
-          </a:p>
-          <a:p>
-            <a:pPr>
-              <a:spcAft>
-                <a:spcPts val="300"/>
-              </a:spcAft>
-            </a:pPr>
-            <a:r>
-              <a:rPr sz="1300">
-                <a:solidFill>
-                  <a:srgbClr val="1A1A2E"/>
-                </a:solidFill>
-                <a:latin typeface="Calibri"/>
-              </a:rPr>
-              <a:t>   – N_components: 1, 2, 5, 15, 20, 30 (저/중/고 복잡도)</a:t>
-            </a:r>
-          </a:p>
-          <a:p>
-            <a:pPr>
-              <a:spcAft>
-                <a:spcPts val="300"/>
-              </a:spcAft>
-            </a:pPr>
-            <a:r>
-              <a:rPr sz="1300">
-                <a:solidFill>
-                  <a:srgbClr val="1A1A2E"/>
-                </a:solidFill>
-                <a:latin typeface="Calibri"/>
-              </a:rPr>
-              <a:t>   – Sensor type: uniform / slope (LiDAR scan 분포)</a:t>
-            </a:r>
-          </a:p>
-          <a:p>
-            <a:pPr>
-              <a:spcAft>
-                <a:spcPts val="300"/>
-              </a:spcAft>
-            </a:pPr>
-            <a:r>
-              <a:rPr sz="1300">
-                <a:solidFill>
-                  <a:srgbClr val="1A1A2E"/>
-                </a:solidFill>
-                <a:latin typeface="Calibri"/>
-              </a:rPr>
-              <a:t>   – Seeds: 0–4 (BF2–5), 0 (BF6–7) — 재현성 보장</a:t>
-            </a:r>
-          </a:p>
-          <a:p>
-            <a:pPr>
-              <a:spcAft>
-                <a:spcPts val="300"/>
-              </a:spcAft>
-            </a:pPr>
-            <a:r>
-              <a:rPr sz="600"/>
+                <a:spcPts val="200"/>
+              </a:spcAft>
+            </a:pPr>
+            <a:r>
+              <a:rPr sz="1100">
+                <a:solidFill>
+                  <a:srgbClr val="1A1A2E"/>
+                </a:solidFill>
+                <a:latin typeface="Calibri"/>
+              </a:rPr>
+              <a:t>   – 실제 LiDAR: 파도 표면이 specular (반사가 한 방향으로 집중) 이면 ray 가 LiDAR 가 아닌 다른 방향으로 반사 → return signal 없음</a:t>
+            </a:r>
+          </a:p>
+          <a:p>
+            <a:pPr>
+              <a:spcAft>
+                <a:spcPts val="200"/>
+              </a:spcAft>
+            </a:pPr>
+            <a:r>
+              <a:rPr sz="1100">
+                <a:solidFill>
+                  <a:srgbClr val="1A1A2E"/>
+                </a:solidFill>
+                <a:latin typeface="Calibri"/>
+              </a:rPr>
+              <a:t>   – 입사각이 표면 normal 에서 멀어질수록 specular 비중 증가 → raydrop 확률 ↑</a:t>
+            </a:r>
+          </a:p>
+          <a:p>
+            <a:pPr>
+              <a:spcAft>
+                <a:spcPts val="200"/>
+              </a:spcAft>
+            </a:pPr>
+            <a:r>
+              <a:rPr sz="1100">
+                <a:solidFill>
+                  <a:srgbClr val="1A1A2E"/>
+                </a:solidFill>
+                <a:latin typeface="Calibri"/>
+              </a:rPr>
+              <a:t>   – </a:t>
+            </a:r>
+            <a:r>
+              <a:rPr sz="1100" b="1">
+                <a:solidFill>
+                  <a:srgbClr val="1A1A2E"/>
+                </a:solidFill>
+                <a:latin typeface="Calibri"/>
+              </a:rPr>
+              <a:t>모사</a:t>
+            </a:r>
+            <a:r>
+              <a:rPr sz="1100" b="0">
+                <a:solidFill>
+                  <a:srgbClr val="1A1A2E"/>
+                </a:solidFill>
+                <a:latin typeface="Calibri"/>
+              </a:rPr>
+              <a:t>: Fresnel reflectance R(θ_i) = ((n₁cos θ_i − n₂cos θ_t) / (n₁cos θ_i + n₂cos θ_t))² 로 specular 확률 계산</a:t>
+            </a:r>
+          </a:p>
+          <a:p>
+            <a:pPr>
+              <a:spcAft>
+                <a:spcPts val="200"/>
+              </a:spcAft>
+            </a:pPr>
+            <a:r>
+              <a:rPr sz="1100">
+                <a:solidFill>
+                  <a:srgbClr val="1A1A2E"/>
+                </a:solidFill>
+                <a:latin typeface="Calibri"/>
+              </a:rPr>
+              <a:t>   – </a:t>
+            </a:r>
+            <a:r>
+              <a:rPr sz="1100" b="1">
+                <a:solidFill>
+                  <a:srgbClr val="1A1A2E"/>
+                </a:solidFill>
+                <a:latin typeface="Calibri"/>
+              </a:rPr>
+              <a:t>합당성</a:t>
+            </a:r>
+            <a:r>
+              <a:rPr sz="1100" b="0">
+                <a:solidFill>
+                  <a:srgbClr val="1A1A2E"/>
+                </a:solidFill>
+                <a:latin typeface="Calibri"/>
+              </a:rPr>
+              <a:t>: Fresnel 식은 air-water 광학 경계의 표준 physics — 광학 교과서 표준, ocean LiDAR (Nouguier 2014) 에서 검증</a:t>
+            </a:r>
+          </a:p>
+          <a:p>
+            <a:pPr>
+              <a:spcAft>
+                <a:spcPts val="200"/>
+              </a:spcAft>
+            </a:pPr>
+            <a:r>
+              <a:rPr sz="500"/>
               <a:t> </a:t>
             </a:r>
           </a:p>
           <a:p>
             <a:pPr>
               <a:spcAft>
-                <a:spcPts val="300"/>
-              </a:spcAft>
-            </a:pPr>
-            <a:r>
-              <a:rPr sz="1300">
+                <a:spcPts val="200"/>
+              </a:spcAft>
+            </a:pPr>
+            <a:r>
+              <a:rPr sz="1100">
                 <a:solidFill>
                   <a:srgbClr val="1A1A2E"/>
                 </a:solidFill>
@@ -8699,16 +8847,16 @@
               <a:t>• </a:t>
             </a:r>
             <a:r>
-              <a:rPr sz="1300" b="1">
-                <a:solidFill>
-                  <a:srgbClr val="1A1A2E"/>
-                </a:solidFill>
-                <a:latin typeface="Calibri"/>
-              </a:rPr>
-              <a:t>Episode당 데이터</a:t>
-            </a:r>
-            <a:r>
-              <a:rPr sz="1300" b="0">
+              <a:rPr sz="1100" b="1">
+                <a:solidFill>
+                  <a:srgbClr val="1A1A2E"/>
+                </a:solidFill>
+                <a:latin typeface="Calibri"/>
+              </a:rPr>
+              <a:t>Geometric shadowing</a:t>
+            </a:r>
+            <a:r>
+              <a:rPr sz="1100" b="0">
                 <a:solidFill>
                   <a:srgbClr val="1A1A2E"/>
                 </a:solidFill>
@@ -8720,86 +8868,106 @@
           <a:p>
             <a:pPr>
               <a:spcAft>
-                <a:spcPts val="300"/>
-              </a:spcAft>
-            </a:pPr>
-            <a:r>
-              <a:rPr sz="1300">
-                <a:solidFill>
-                  <a:srgbClr val="1A1A2E"/>
-                </a:solidFill>
-                <a:latin typeface="Calibri"/>
-              </a:rPr>
-              <a:t>   – T = 30 s, Δt = 0.1 s → 300 frames</a:t>
-            </a:r>
-          </a:p>
-          <a:p>
-            <a:pPr>
-              <a:spcAft>
-                <a:spcPts val="300"/>
-              </a:spcAft>
-            </a:pPr>
-            <a:r>
-              <a:rPr sz="1300">
-                <a:solidFill>
-                  <a:srgbClr val="1A1A2E"/>
-                </a:solidFill>
-                <a:latin typeface="Calibri"/>
-              </a:rPr>
-              <a:t>   – Ground-truth η field: 50×50 격자 (참값으로 평가용)</a:t>
-            </a:r>
-          </a:p>
-          <a:p>
-            <a:pPr>
-              <a:spcAft>
-                <a:spcPts val="300"/>
-              </a:spcAft>
-            </a:pPr>
-            <a:r>
-              <a:rPr sz="1300">
-                <a:solidFill>
-                  <a:srgbClr val="1A1A2E"/>
-                </a:solidFill>
-                <a:latin typeface="Calibri"/>
-              </a:rPr>
-              <a:t>   – LiDAR scan: ~50 valid pts/frame (raydrop 후)</a:t>
-            </a:r>
-          </a:p>
-          <a:p>
-            <a:pPr>
-              <a:spcAft>
-                <a:spcPts val="300"/>
-              </a:spcAft>
-            </a:pPr>
-            <a:r>
-              <a:rPr sz="1300">
-                <a:solidFill>
-                  <a:srgbClr val="1A1A2E"/>
-                </a:solidFill>
-                <a:latin typeface="Calibri"/>
-              </a:rPr>
-              <a:t>   – HDF5 format, 110 files</a:t>
-            </a:r>
-          </a:p>
-          <a:p>
-            <a:pPr>
-              <a:spcAft>
-                <a:spcPts val="300"/>
-              </a:spcAft>
-            </a:pPr>
-            <a:r>
-              <a:rPr sz="600"/>
+                <a:spcPts val="200"/>
+              </a:spcAft>
+            </a:pPr>
+            <a:r>
+              <a:rPr sz="1100">
+                <a:solidFill>
+                  <a:srgbClr val="1A1A2E"/>
+                </a:solidFill>
+                <a:latin typeface="Calibri"/>
+              </a:rPr>
+              <a:t>   – 실제 LiDAR: 앞쪽 큰 파도 (높은 crest) 가 뒤쪽 파도를 가림 → 가려진 영역 점 누락</a:t>
+            </a:r>
+          </a:p>
+          <a:p>
+            <a:pPr>
+              <a:spcAft>
+                <a:spcPts val="200"/>
+              </a:spcAft>
+            </a:pPr>
+            <a:r>
+              <a:rPr sz="1100">
+                <a:solidFill>
+                  <a:srgbClr val="1A1A2E"/>
+                </a:solidFill>
+                <a:latin typeface="Calibri"/>
+              </a:rPr>
+              <a:t>   – </a:t>
+            </a:r>
+            <a:r>
+              <a:rPr sz="1100" b="1">
+                <a:solidFill>
+                  <a:srgbClr val="1A1A2E"/>
+                </a:solidFill>
+                <a:latin typeface="Calibri"/>
+              </a:rPr>
+              <a:t>모사</a:t>
+            </a:r>
+            <a:r>
+              <a:rPr sz="1100" b="0">
+                <a:solidFill>
+                  <a:srgbClr val="1A1A2E"/>
+                </a:solidFill>
+                <a:latin typeface="Calibri"/>
+              </a:rPr>
+              <a:t>: ray-triangle intersection 의 first-hit 결과로 자동 처리</a:t>
+            </a:r>
+          </a:p>
+          <a:p>
+            <a:pPr>
+              <a:spcAft>
+                <a:spcPts val="200"/>
+              </a:spcAft>
+            </a:pPr>
+            <a:r>
+              <a:rPr sz="1100">
+                <a:solidFill>
+                  <a:srgbClr val="1A1A2E"/>
+                </a:solidFill>
+                <a:latin typeface="Calibri"/>
+              </a:rPr>
+              <a:t>   – </a:t>
+            </a:r>
+            <a:r>
+              <a:rPr sz="1100" b="1">
+                <a:solidFill>
+                  <a:srgbClr val="1A1A2E"/>
+                </a:solidFill>
+                <a:latin typeface="Calibri"/>
+              </a:rPr>
+              <a:t>합당성</a:t>
+            </a:r>
+            <a:r>
+              <a:rPr sz="1100" b="0">
+                <a:solidFill>
+                  <a:srgbClr val="1A1A2E"/>
+                </a:solidFill>
+                <a:latin typeface="Calibri"/>
+              </a:rPr>
+              <a:t>: ray tracing 의 geometric optics 결과, 추가 가정 없음 (광선 직진 + 첫 충돌점만 측정)</a:t>
+            </a:r>
+          </a:p>
+          <a:p>
+            <a:pPr>
+              <a:spcAft>
+                <a:spcPts val="200"/>
+              </a:spcAft>
+            </a:pPr>
+            <a:r>
+              <a:rPr sz="500"/>
               <a:t> </a:t>
             </a:r>
           </a:p>
           <a:p>
             <a:pPr>
               <a:spcAft>
-                <a:spcPts val="300"/>
-              </a:spcAft>
-            </a:pPr>
-            <a:r>
-              <a:rPr sz="1300">
+                <a:spcPts val="200"/>
+              </a:spcAft>
+            </a:pPr>
+            <a:r>
+              <a:rPr sz="1100">
                 <a:solidFill>
                   <a:srgbClr val="1A1A2E"/>
                 </a:solidFill>
@@ -8808,16 +8976,16 @@
               <a:t>• </a:t>
             </a:r>
             <a:r>
-              <a:rPr sz="1300" b="1">
-                <a:solidFill>
-                  <a:srgbClr val="1A1A2E"/>
-                </a:solidFill>
-                <a:latin typeface="Calibri"/>
-              </a:rPr>
-              <a:t>Test coverage</a:t>
-            </a:r>
-            <a:r>
-              <a:rPr sz="1300" b="0">
+              <a:rPr sz="1100" b="1">
+                <a:solidFill>
+                  <a:srgbClr val="1A1A2E"/>
+                </a:solidFill>
+                <a:latin typeface="Calibri"/>
+              </a:rPr>
+              <a:t>검증 (validation)</a:t>
+            </a:r>
+            <a:r>
+              <a:rPr sz="1100" b="0">
                 <a:solidFill>
                   <a:srgbClr val="1A1A2E"/>
                 </a:solidFill>
@@ -8829,82 +8997,117 @@
           <a:p>
             <a:pPr>
               <a:spcAft>
-                <a:spcPts val="300"/>
-              </a:spcAft>
-            </a:pPr>
-            <a:r>
-              <a:rPr sz="1300">
-                <a:solidFill>
-                  <a:srgbClr val="1A1A2E"/>
-                </a:solidFill>
-                <a:latin typeface="Calibri"/>
-              </a:rPr>
-              <a:t>   – </a:t>
-            </a:r>
-            <a:r>
-              <a:rPr sz="1300" b="0">
-                <a:solidFill>
-                  <a:srgbClr val="1A1A2E"/>
-                </a:solidFill>
-                <a:latin typeface="Calibri"/>
-              </a:rPr>
-              <a:t>53 unit test (wavesim/) + 55 (wavesplat/) = </a:t>
-            </a:r>
-            <a:r>
-              <a:rPr sz="1300" b="1">
-                <a:solidFill>
-                  <a:srgbClr val="1A1A2E"/>
-                </a:solidFill>
-                <a:latin typeface="Calibri"/>
-              </a:rPr>
-              <a:t>108 total, 모두 통과</a:t>
-            </a:r>
-          </a:p>
-          <a:p>
-            <a:pPr>
-              <a:spcAft>
-                <a:spcPts val="300"/>
-              </a:spcAft>
-            </a:pPr>
-            <a:r>
-              <a:rPr sz="1300">
-                <a:solidFill>
-                  <a:srgbClr val="1A1A2E"/>
-                </a:solidFill>
-                <a:latin typeface="Calibri"/>
-              </a:rPr>
-              <a:t>   – → simulator + estimator의 정확성 보증</a:t>
-            </a:r>
-          </a:p>
-        </p:txBody>
-      </p:sp>
-      <p:pic>
-        <p:nvPicPr>
-          <p:cNvPr id="6" name="Picture 5" descr="wavesim_BF4_5c_wave_lidar.png"/>
-          <p:cNvPicPr>
-            <a:picLocks noChangeAspect="1"/>
-          </p:cNvPicPr>
-          <p:nvPr/>
-        </p:nvPicPr>
-        <p:blipFill>
-          <a:blip r:embed="rId2"/>
-          <a:stretch>
-            <a:fillRect/>
-          </a:stretch>
-        </p:blipFill>
-        <p:spPr>
-          <a:xfrm>
-            <a:off x="7955279" y="1828800"/>
-            <a:ext cx="3931920" cy="2625019"/>
-          </a:xfrm>
-          <a:prstGeom prst="rect">
-            <a:avLst/>
-          </a:prstGeom>
-        </p:spPr>
-      </p:pic>
-      <p:sp>
-        <p:nvSpPr>
-          <p:cNvPr id="7" name="TextBox 6"/>
+                <a:spcPts val="200"/>
+              </a:spcAft>
+            </a:pPr>
+            <a:r>
+              <a:rPr sz="1100">
+                <a:solidFill>
+                  <a:srgbClr val="1A1A2E"/>
+                </a:solidFill>
+                <a:latin typeface="Calibri"/>
+              </a:rPr>
+              <a:t>   – 108 unit test — ray-triangle 정확성, Fresnel 계산, shadowing edge case, vessel motion 모두 검증 통과</a:t>
+            </a:r>
+          </a:p>
+          <a:p>
+            <a:pPr>
+              <a:spcAft>
+                <a:spcPts val="200"/>
+              </a:spcAft>
+            </a:pPr>
+            <a:r>
+              <a:rPr sz="1100">
+                <a:solidFill>
+                  <a:srgbClr val="1A1A2E"/>
+                </a:solidFill>
+                <a:latin typeface="Calibri"/>
+              </a:rPr>
+              <a:t>   – 110 episodes 합성 dataset — BF2–BF7 × N=1–30 × directional spreading 으로 다양성 확보</a:t>
+            </a:r>
+          </a:p>
+          <a:p>
+            <a:pPr>
+              <a:spcAft>
+                <a:spcPts val="200"/>
+              </a:spcAft>
+            </a:pPr>
+            <a:r>
+              <a:rPr sz="1100">
+                <a:solidFill>
+                  <a:srgbClr val="1A1A2E"/>
+                </a:solidFill>
+                <a:latin typeface="Calibri"/>
+              </a:rPr>
+              <a:t>   – Sea trial 실측 LiDAR 데이터와 시각적 비교 (sea_trial_lidar.png — 분포 패턴 일치)</a:t>
+            </a:r>
+          </a:p>
+          <a:p>
+            <a:pPr>
+              <a:spcAft>
+                <a:spcPts val="200"/>
+              </a:spcAft>
+            </a:pPr>
+            <a:r>
+              <a:rPr sz="500"/>
+              <a:t> </a:t>
+            </a:r>
+          </a:p>
+          <a:p>
+            <a:pPr>
+              <a:spcAft>
+                <a:spcPts val="200"/>
+              </a:spcAft>
+            </a:pPr>
+            <a:r>
+              <a:rPr sz="1100">
+                <a:solidFill>
+                  <a:srgbClr val="1A1A2E"/>
+                </a:solidFill>
+                <a:latin typeface="Calibri"/>
+              </a:rPr>
+              <a:t>• </a:t>
+            </a:r>
+            <a:r>
+              <a:rPr sz="1100" b="1">
+                <a:solidFill>
+                  <a:srgbClr val="1A1A2E"/>
+                </a:solidFill>
+                <a:latin typeface="Calibri"/>
+              </a:rPr>
+              <a:t>한계 (정직 인정)</a:t>
+            </a:r>
+            <a:r>
+              <a:rPr sz="1100" b="0">
+                <a:solidFill>
+                  <a:srgbClr val="1A1A2E"/>
+                </a:solidFill>
+                <a:latin typeface="Calibri"/>
+              </a:rPr>
+              <a:t>:</a:t>
+            </a:r>
+          </a:p>
+          <a:p>
+            <a:pPr>
+              <a:spcAft>
+                <a:spcPts val="200"/>
+              </a:spcAft>
+            </a:pPr>
+            <a:r>
+              <a:rPr sz="1100">
+                <a:solidFill>
+                  <a:srgbClr val="1A1A2E"/>
+                </a:solidFill>
+                <a:latin typeface="Calibri"/>
+              </a:rPr>
+              <a:t>   – 미세파 (capillary, mm 단위), foam, breaking wave 영향 미반영 — operational sea state (BF2–BF6) 에서는 부차적</a:t>
+            </a:r>
+          </a:p>
+        </p:txBody>
+      </p:sp>
+      <p:sp>
+        <p:nvSpPr>
+          <p:cNvPr id="6" name="TextBox 5"/>
           <p:cNvSpPr txBox="1"/>
           <p:nvPr/>
         </p:nvSpPr>
@@ -20060,6 +20263,427 @@
 </p:sld>
 </file>
 
+<file path=ppt/slides/slide32.xml><?xml version="1.0" encoding="utf-8"?>
+<p:sld xmlns:a="http://schemas.openxmlformats.org/drawingml/2006/main" xmlns:p="http://schemas.openxmlformats.org/presentationml/2006/main" xmlns:r="http://schemas.openxmlformats.org/officeDocument/2006/relationships">
+  <p:cSld>
+    <p:bg>
+      <p:bgPr>
+        <a:solidFill>
+          <a:srgbClr val="FFFFFF"/>
+        </a:solidFill>
+        <a:effectLst/>
+      </p:bgPr>
+    </p:bg>
+    <p:spTree>
+      <p:nvGrpSpPr>
+        <p:cNvPr id="1" name=""/>
+        <p:cNvGrpSpPr/>
+        <p:nvPr/>
+      </p:nvGrpSpPr>
+      <p:grpSpPr/>
+      <p:sp>
+        <p:nvSpPr>
+          <p:cNvPr id="2" name="TextBox 1"/>
+          <p:cNvSpPr txBox="1"/>
+          <p:nvPr/>
+        </p:nvSpPr>
+        <p:spPr>
+          <a:xfrm>
+            <a:off x="457200" y="182880"/>
+            <a:ext cx="4572000" cy="274320"/>
+          </a:xfrm>
+          <a:prstGeom prst="rect">
+            <a:avLst/>
+          </a:prstGeom>
+          <a:noFill/>
+        </p:spPr>
+        <p:txBody>
+          <a:bodyPr wrap="square">
+            <a:spAutoFit/>
+          </a:bodyPr>
+          <a:lstStyle/>
+          <a:p>
+            <a:pPr algn="l">
+              <a:defRPr sz="1100" b="1" i="0">
+                <a:solidFill>
+                  <a:srgbClr val="666666"/>
+                </a:solidFill>
+                <a:latin typeface="Calibri"/>
+              </a:defRPr>
+            </a:pPr>
+            <a:r>
+              <a:t>Backup · A12 (Q&amp;A 시 참조)</a:t>
+            </a:r>
+          </a:p>
+        </p:txBody>
+      </p:sp>
+      <p:sp>
+        <p:nvSpPr>
+          <p:cNvPr id="3" name="TextBox 2"/>
+          <p:cNvSpPr txBox="1"/>
+          <p:nvPr/>
+        </p:nvSpPr>
+        <p:spPr>
+          <a:xfrm>
+            <a:off x="457200" y="502920"/>
+            <a:ext cx="11247120" cy="640080"/>
+          </a:xfrm>
+          <a:prstGeom prst="rect">
+            <a:avLst/>
+          </a:prstGeom>
+          <a:noFill/>
+        </p:spPr>
+        <p:txBody>
+          <a:bodyPr wrap="square">
+            <a:spAutoFit/>
+          </a:bodyPr>
+          <a:lstStyle/>
+          <a:p>
+            <a:pPr algn="l">
+              <a:defRPr sz="2200" b="1" i="0">
+                <a:solidFill>
+                  <a:srgbClr val="1A1A2E"/>
+                </a:solidFill>
+                <a:latin typeface="Calibri"/>
+              </a:defRPr>
+            </a:pPr>
+            <a:r>
+              <a:t>WaveSim — 110 episodes 합성 dataset</a:t>
+            </a:r>
+          </a:p>
+        </p:txBody>
+      </p:sp>
+      <p:sp>
+        <p:nvSpPr>
+          <p:cNvPr id="4" name="TextBox 3"/>
+          <p:cNvSpPr txBox="1"/>
+          <p:nvPr/>
+        </p:nvSpPr>
+        <p:spPr>
+          <a:xfrm>
+            <a:off x="548640" y="1600200"/>
+            <a:ext cx="10972800" cy="4846320"/>
+          </a:xfrm>
+          <a:prstGeom prst="rect">
+            <a:avLst/>
+          </a:prstGeom>
+          <a:noFill/>
+        </p:spPr>
+        <p:txBody>
+          <a:bodyPr wrap="square">
+            <a:spAutoFit/>
+          </a:bodyPr>
+          <a:lstStyle/>
+          <a:p>
+            <a:pPr>
+              <a:spcAft>
+                <a:spcPts val="300"/>
+              </a:spcAft>
+            </a:pPr>
+            <a:r>
+              <a:rPr sz="1200">
+                <a:solidFill>
+                  <a:srgbClr val="1A1A2E"/>
+                </a:solidFill>
+                <a:latin typeface="Calibri"/>
+              </a:rPr>
+              <a:t>• </a:t>
+            </a:r>
+            <a:r>
+              <a:rPr sz="1200" b="1">
+                <a:solidFill>
+                  <a:srgbClr val="1A1A2E"/>
+                </a:solidFill>
+                <a:latin typeface="Calibri"/>
+              </a:rPr>
+              <a:t>Episode 변수</a:t>
+            </a:r>
+            <a:r>
+              <a:rPr sz="1200" b="0">
+                <a:solidFill>
+                  <a:srgbClr val="1A1A2E"/>
+                </a:solidFill>
+                <a:latin typeface="Calibri"/>
+              </a:rPr>
+              <a:t>:</a:t>
+            </a:r>
+          </a:p>
+          <a:p>
+            <a:pPr>
+              <a:spcAft>
+                <a:spcPts val="300"/>
+              </a:spcAft>
+            </a:pPr>
+            <a:r>
+              <a:rPr sz="1200">
+                <a:solidFill>
+                  <a:srgbClr val="1A1A2E"/>
+                </a:solidFill>
+                <a:latin typeface="Calibri"/>
+              </a:rPr>
+              <a:t>   – Sea state: BF2–BF7 (6 단계 Beaufort scale, 잔잔 → 매우 거친)</a:t>
+            </a:r>
+          </a:p>
+          <a:p>
+            <a:pPr>
+              <a:spcAft>
+                <a:spcPts val="300"/>
+              </a:spcAft>
+            </a:pPr>
+            <a:r>
+              <a:rPr sz="1200">
+                <a:solidFill>
+                  <a:srgbClr val="1A1A2E"/>
+                </a:solidFill>
+                <a:latin typeface="Calibri"/>
+              </a:rPr>
+              <a:t>   – N_components: 1, 2, 5, 15, 20, 30 (저/중/고 복잡도)</a:t>
+            </a:r>
+          </a:p>
+          <a:p>
+            <a:pPr>
+              <a:spcAft>
+                <a:spcPts val="300"/>
+              </a:spcAft>
+            </a:pPr>
+            <a:r>
+              <a:rPr sz="1200">
+                <a:solidFill>
+                  <a:srgbClr val="1A1A2E"/>
+                </a:solidFill>
+                <a:latin typeface="Calibri"/>
+              </a:rPr>
+              <a:t>   – Sensor type: uniform / slope (LiDAR scan 분포)</a:t>
+            </a:r>
+          </a:p>
+          <a:p>
+            <a:pPr>
+              <a:spcAft>
+                <a:spcPts val="300"/>
+              </a:spcAft>
+            </a:pPr>
+            <a:r>
+              <a:rPr sz="1200">
+                <a:solidFill>
+                  <a:srgbClr val="1A1A2E"/>
+                </a:solidFill>
+                <a:latin typeface="Calibri"/>
+              </a:rPr>
+              <a:t>   – Seeds: BF2–BF5 = seed 0–4 (5 개씩), BF6–BF7 = seed 0</a:t>
+            </a:r>
+          </a:p>
+          <a:p>
+            <a:pPr>
+              <a:spcAft>
+                <a:spcPts val="300"/>
+              </a:spcAft>
+            </a:pPr>
+            <a:r>
+              <a:rPr sz="1200">
+                <a:solidFill>
+                  <a:srgbClr val="1A1A2E"/>
+                </a:solidFill>
+                <a:latin typeface="Calibri"/>
+              </a:rPr>
+              <a:t>• </a:t>
+            </a:r>
+            <a:r>
+              <a:rPr sz="1200" b="1">
+                <a:solidFill>
+                  <a:srgbClr val="1A1A2E"/>
+                </a:solidFill>
+                <a:latin typeface="Calibri"/>
+              </a:rPr>
+              <a:t>Episode 당 데이터</a:t>
+            </a:r>
+            <a:r>
+              <a:rPr sz="1200" b="0">
+                <a:solidFill>
+                  <a:srgbClr val="1A1A2E"/>
+                </a:solidFill>
+                <a:latin typeface="Calibri"/>
+              </a:rPr>
+              <a:t>:</a:t>
+            </a:r>
+          </a:p>
+          <a:p>
+            <a:pPr>
+              <a:spcAft>
+                <a:spcPts val="300"/>
+              </a:spcAft>
+            </a:pPr>
+            <a:r>
+              <a:rPr sz="1200">
+                <a:solidFill>
+                  <a:srgbClr val="1A1A2E"/>
+                </a:solidFill>
+                <a:latin typeface="Calibri"/>
+              </a:rPr>
+              <a:t>   – T = 30 s, Δt = 0.1 s → 300 frames</a:t>
+            </a:r>
+          </a:p>
+          <a:p>
+            <a:pPr>
+              <a:spcAft>
+                <a:spcPts val="300"/>
+              </a:spcAft>
+            </a:pPr>
+            <a:r>
+              <a:rPr sz="1200">
+                <a:solidFill>
+                  <a:srgbClr val="1A1A2E"/>
+                </a:solidFill>
+                <a:latin typeface="Calibri"/>
+              </a:rPr>
+              <a:t>   – Ground-truth η field: 50×50 격자 (참값으로 평가용)</a:t>
+            </a:r>
+          </a:p>
+          <a:p>
+            <a:pPr>
+              <a:spcAft>
+                <a:spcPts val="300"/>
+              </a:spcAft>
+            </a:pPr>
+            <a:r>
+              <a:rPr sz="1200">
+                <a:solidFill>
+                  <a:srgbClr val="1A1A2E"/>
+                </a:solidFill>
+                <a:latin typeface="Calibri"/>
+              </a:rPr>
+              <a:t>   – LiDAR scan: ~50 valid pts/frame (raydrop 후)</a:t>
+            </a:r>
+          </a:p>
+          <a:p>
+            <a:pPr>
+              <a:spcAft>
+                <a:spcPts val="300"/>
+              </a:spcAft>
+            </a:pPr>
+            <a:r>
+              <a:rPr sz="1200">
+                <a:solidFill>
+                  <a:srgbClr val="1A1A2E"/>
+                </a:solidFill>
+                <a:latin typeface="Calibri"/>
+              </a:rPr>
+              <a:t>   – HDF5 format, 110 files</a:t>
+            </a:r>
+          </a:p>
+          <a:p>
+            <a:pPr>
+              <a:spcAft>
+                <a:spcPts val="300"/>
+              </a:spcAft>
+            </a:pPr>
+            <a:r>
+              <a:rPr sz="1200">
+                <a:solidFill>
+                  <a:srgbClr val="1A1A2E"/>
+                </a:solidFill>
+                <a:latin typeface="Calibri"/>
+              </a:rPr>
+              <a:t>• </a:t>
+            </a:r>
+            <a:r>
+              <a:rPr sz="1200" b="1">
+                <a:solidFill>
+                  <a:srgbClr val="1A1A2E"/>
+                </a:solidFill>
+                <a:latin typeface="Calibri"/>
+              </a:rPr>
+              <a:t>Reproducibility</a:t>
+            </a:r>
+            <a:r>
+              <a:rPr sz="1200" b="0">
+                <a:solidFill>
+                  <a:srgbClr val="1A1A2E"/>
+                </a:solidFill>
+                <a:latin typeface="Calibri"/>
+              </a:rPr>
+              <a:t>: seed 저장 — 동일 seed 로 재실행 시 동일 결과</a:t>
+            </a:r>
+          </a:p>
+          <a:p>
+            <a:pPr>
+              <a:spcAft>
+                <a:spcPts val="300"/>
+              </a:spcAft>
+            </a:pPr>
+            <a:r>
+              <a:rPr sz="1200">
+                <a:solidFill>
+                  <a:srgbClr val="1A1A2E"/>
+                </a:solidFill>
+                <a:latin typeface="Calibri"/>
+              </a:rPr>
+              <a:t>• </a:t>
+            </a:r>
+            <a:r>
+              <a:rPr sz="1200" b="1">
+                <a:solidFill>
+                  <a:srgbClr val="1A1A2E"/>
+                </a:solidFill>
+                <a:latin typeface="Calibri"/>
+              </a:rPr>
+              <a:t>Test coverage</a:t>
+            </a:r>
+            <a:r>
+              <a:rPr sz="1200" b="0">
+                <a:solidFill>
+                  <a:srgbClr val="1A1A2E"/>
+                </a:solidFill>
+                <a:latin typeface="Calibri"/>
+              </a:rPr>
+              <a:t>: 53 (wavesim) + 55 (wavesplat) = 108 unit test 모두 통과</a:t>
+            </a:r>
+          </a:p>
+        </p:txBody>
+      </p:sp>
+      <p:sp>
+        <p:nvSpPr>
+          <p:cNvPr id="5" name="TextBox 4"/>
+          <p:cNvSpPr txBox="1"/>
+          <p:nvPr/>
+        </p:nvSpPr>
+        <p:spPr>
+          <a:xfrm>
+            <a:off x="11430000" y="6446520"/>
+            <a:ext cx="640080" cy="320040"/>
+          </a:xfrm>
+          <a:prstGeom prst="rect">
+            <a:avLst/>
+          </a:prstGeom>
+          <a:noFill/>
+        </p:spPr>
+        <p:txBody>
+          <a:bodyPr wrap="square">
+            <a:spAutoFit/>
+          </a:bodyPr>
+          <a:lstStyle/>
+          <a:p>
+            <a:pPr algn="r">
+              <a:defRPr sz="1000" b="0" i="0">
+                <a:solidFill>
+                  <a:srgbClr val="666666"/>
+                </a:solidFill>
+                <a:latin typeface="Calibri"/>
+              </a:defRPr>
+            </a:pPr>
+            <a:r>
+              <a:t>A12</a:t>
+            </a:r>
+          </a:p>
+        </p:txBody>
+      </p:sp>
+    </p:spTree>
+  </p:cSld>
+  <p:clrMapOvr>
+    <a:masterClrMapping/>
+  </p:clrMapOvr>
+</p:sld>
+</file>
+
 <file path=ppt/slides/slide4.xml><?xml version="1.0" encoding="utf-8"?>
 <p:sld xmlns:a="http://schemas.openxmlformats.org/drawingml/2006/main" xmlns:p="http://schemas.openxmlformats.org/presentationml/2006/main" xmlns:r="http://schemas.openxmlformats.org/officeDocument/2006/relationships">
   <p:cSld>
@@ -20472,7 +21096,7 @@
               </a:defRPr>
             </a:pPr>
             <a:r>
-              <a:t>13편 정독 결과 — 각 접근법에는 고유한 강점과 한계가 있습니다</a:t>
+              <a:t>13편 정독 결과 — 각 접근법의 강점과 한계를 풀어 설명합니다</a:t>
             </a:r>
           </a:p>
         </p:txBody>
@@ -20486,8 +21110,8 @@
           <p:nvPr/>
         </p:nvGraphicFramePr>
         <p:xfrm>
-          <a:off x="365760" y="1691640"/>
-          <a:ext cx="11430000" cy="4389120"/>
+          <a:off x="274320" y="1691640"/>
+          <a:ext cx="11612880" cy="4572000"/>
         </p:xfrm>
         <a:graphic>
           <a:graphicData uri="http://schemas.openxmlformats.org/drawingml/2006/table">
@@ -20496,13 +21120,13 @@
                 <a:tableStyleId>{5C22544A-7EE6-4342-B048-85BDC9FD1C3A}</a:tableStyleId>
               </a:tblPr>
               <a:tblGrid>
-                <a:gridCol w="2286000"/>
-                <a:gridCol w="2286000"/>
-                <a:gridCol w="2286000"/>
-                <a:gridCol w="2286000"/>
-                <a:gridCol w="2286000"/>
+                <a:gridCol w="2322576"/>
+                <a:gridCol w="2322576"/>
+                <a:gridCol w="2322576"/>
+                <a:gridCol w="2322576"/>
+                <a:gridCol w="2322576"/>
               </a:tblGrid>
-              <a:tr h="731520">
+              <a:tr h="762000">
                 <a:tc>
                   <a:txBody>
                     <a:bodyPr/>
@@ -20537,7 +21161,7 @@
                             <a:srgbClr val="FFFFFF"/>
                           </a:solidFill>
                         </a:rPr>
-                        <a:t>접근법 (쉬운 설명)</a:t>
+                        <a:t>접근법</a:t>
                       </a:r>
                     </a:p>
                   </a:txBody>
@@ -20559,7 +21183,7 @@
                             <a:srgbClr val="FFFFFF"/>
                           </a:solidFill>
                         </a:rPr>
-                        <a:t>대표 논문 (정독)</a:t>
+                        <a:t>대표 논문</a:t>
                       </a:r>
                     </a:p>
                   </a:txBody>
@@ -20614,7 +21238,7 @@
                   </a:tcPr>
                 </a:tc>
               </a:tr>
-              <a:tr h="731520">
+              <a:tr h="762000">
                 <a:tc>
                   <a:txBody>
                     <a:bodyPr wrap="square"/>
@@ -20647,9 +21271,8 @@
                             <a:srgbClr val="1A1A2E"/>
                           </a:solidFill>
                         </a:rPr>
-                        <a:t>격자 기반 최적화
-(공간을 격자로 나누고
-차이를 최소화)</a:t>
+                        <a:t>격자 기반
+최적화</a:t>
                       </a:r>
                     </a:p>
                   </a:txBody>
@@ -20670,7 +21293,8 @@
                             <a:srgbClr val="1A1A2E"/>
                           </a:solidFill>
                         </a:rPr>
-                        <a:t>Desmars 2018/20/23</a:t>
+                        <a:t>Desmars
+2018/20/23</a:t>
                       </a:r>
                     </a:p>
                   </a:txBody>
@@ -20691,8 +21315,7 @@
                             <a:srgbClr val="1A1A2E"/>
                           </a:solidFill>
                         </a:rPr>
-                        <a:t>성숙한 이론
-실험 검증됨</a:t>
+                        <a:t>관측치와 model 사이 차이를 비용함수로 정의해 최소화. 수치해석에서 안정성·수렴성이 정립되어 검증된 framework</a:t>
                       </a:r>
                     </a:p>
                   </a:txBody>
@@ -20713,8 +21336,7 @@
                             <a:srgbClr val="1A1A2E"/>
                           </a:solidFill>
                         </a:rPr>
-                        <a:t>격자 해상도 한계
-1D 위주</a:t>
+                        <a:t>추정 가능한 wavenumber 가 미리 정한 격자 위에만 한정 — 격자 간격보다 짧은 wave 표현 불가. 거의 모두 1D 가정</a:t>
                       </a:r>
                     </a:p>
                   </a:txBody>
@@ -20725,7 +21347,7 @@
                   </a:tcPr>
                 </a:tc>
               </a:tr>
-              <a:tr h="731520">
+              <a:tr h="762000">
                 <a:tc>
                   <a:txBody>
                     <a:bodyPr wrap="square"/>
@@ -20758,9 +21380,8 @@
                             <a:srgbClr val="1A1A2E"/>
                           </a:solidFill>
                         </a:rPr>
-                        <a:t>앙상블 칼만 필터
-(수백 개 시뮬레이션을
-동시에 돌려 보정)</a:t>
+                        <a:t>앙상블
+칼만 필터</a:t>
                       </a:r>
                     </a:p>
                   </a:txBody>
@@ -20804,7 +21425,7 @@
                             <a:srgbClr val="1A1A2E"/>
                           </a:solidFill>
                         </a:rPr>
-                        <a:t>높은 물리 충실도</a:t>
+                        <a:t>비선형 wave model (HOS, Navier-Stokes) 을 forecast 모델로 사용 가능 — Stokes 비선형, breaking 까지 reconstruction</a:t>
                       </a:r>
                     </a:p>
                   </a:txBody>
@@ -20825,8 +21446,7 @@
                             <a:srgbClr val="1A1A2E"/>
                           </a:solidFill>
                         </a:rPr>
-                        <a:t>실시간 불가
-(앙상블 비용)</a:t>
+                        <a:t>50–300 개 simulation 을 매 step 동시 진행해야 함 → GPU 사용해도 수백 ms 이상 → real-time control loop 에 부적합. 대부분 1D</a:t>
                       </a:r>
                     </a:p>
                   </a:txBody>
@@ -20837,7 +21457,7 @@
                   </a:tcPr>
                 </a:tc>
               </a:tr>
-              <a:tr h="731520">
+              <a:tr h="762000">
                 <a:tc>
                   <a:txBody>
                     <a:bodyPr wrap="square"/>
@@ -20870,9 +21490,8 @@
                             <a:srgbClr val="1A1A2E"/>
                           </a:solidFill>
                         </a:rPr>
-                        <a:t>지도학습 신경망
-(데이터로 미리 학습한
-NN으로 빠르게 추정)</a:t>
+                        <a:t>지도학습
+신경망</a:t>
                       </a:r>
                     </a:p>
                   </a:txBody>
@@ -20893,7 +21512,8 @@
                             <a:srgbClr val="1A1A2E"/>
                           </a:solidFill>
                         </a:rPr>
-                        <a:t>Ehlers 2023 (FNO)</a:t>
+                        <a:t>Ehlers 2023 FNO
+Duan 2020</a:t>
                       </a:r>
                     </a:p>
                   </a:txBody>
@@ -20914,7 +21534,7 @@
                             <a:srgbClr val="1A1A2E"/>
                           </a:solidFill>
                         </a:rPr>
-                        <a:t>매우 빠름 (1.9 ms)</a:t>
+                        <a:t>Pre-train 후 inference 매우 빠름 (1.9 ms) — sparse measurement → wave field 의 mapping 을 NN 이 학습</a:t>
                       </a:r>
                     </a:p>
                   </a:txBody>
@@ -20935,8 +21555,7 @@
                             <a:srgbClr val="1A1A2E"/>
                           </a:solidFill>
                         </a:rPr>
-                        <a:t>학습 데이터 필요
-1D, 일반화 한계</a:t>
+                        <a:t>수천 개 학습 데이터 합성 필요 (Ehlers 의 경우 3120 HOS sample). 학습 분포 밖 (다른 sea state, 다른 sensor) 에서는 정확도 저하. 1D</a:t>
                       </a:r>
                     </a:p>
                   </a:txBody>
@@ -20947,7 +21566,7 @@
                   </a:tcPr>
                 </a:tc>
               </a:tr>
-              <a:tr h="731520">
+              <a:tr h="762000">
                 <a:tc>
                   <a:txBody>
                     <a:bodyPr wrap="square"/>
@@ -20980,9 +21599,8 @@
                             <a:srgbClr val="1A1A2E"/>
                           </a:solidFill>
                         </a:rPr>
-                        <a:t>물리 기반 비지도 NN
-(학습 데이터 없이
-물리 법칙으로 학습)</a:t>
+                        <a:t>물리 기반
+비지도 NN</a:t>
                       </a:r>
                     </a:p>
                   </a:txBody>
@@ -21004,7 +21622,7 @@
                           </a:solidFill>
                         </a:rPr>
                         <a:t>Ehlers 2025
-(PFT-PINN)</a:t>
+PFT-PINN</a:t>
                       </a:r>
                     </a:p>
                   </a:txBody>
@@ -21025,8 +21643,7 @@
                             <a:srgbClr val="1A1A2E"/>
                           </a:solidFill>
                         </a:rPr>
-                        <a:t>학습 데이터 불필요
-비선형 가능</a:t>
+                        <a:t>학습 데이터 0 개 — Laplace 방정식과 표면 boundary condition 을 NN loss 로 강제. Linear/nonlinear 모두 처리 (ε ~ 0.1 까지)</a:t>
                       </a:r>
                     </a:p>
                   </a:txBody>
@@ -21047,8 +21664,7 @@
                             <a:srgbClr val="1A1A2E"/>
                           </a:solidFill>
                         </a:rPr>
-                        <a:t>~30 분/instance
-1D 위주</a:t>
+                        <a:t>Instance 마다 처음부터 30 분 학습 (RTX 3090) — real-time 불가. Buoy time-series 만 처리, sparse spatial LiDAR 미지원. 1D</a:t>
                       </a:r>
                     </a:p>
                   </a:txBody>
@@ -21059,7 +21675,7 @@
                   </a:tcPr>
                 </a:tc>
               </a:tr>
-              <a:tr h="731520">
+              <a:tr h="762000">
                 <a:tc>
                   <a:txBody>
                     <a:bodyPr wrap="square"/>
@@ -21092,9 +21708,8 @@
                             <a:srgbClr val="1A1A2E"/>
                           </a:solidFill>
                         </a:rPr>
-                        <a:t>연속 파라미터 추정 (Ours)
-(격자 없이 파도 성분의
-물리 파라미터를 직접 최적화)</a:t>
+                        <a:t>연속 파라미터
+추정 (Ours) ⭐</a:t>
                       </a:r>
                     </a:p>
                   </a:txBody>
@@ -21136,8 +21751,7 @@
                             <a:srgbClr val="1A1A2E"/>
                           </a:solidFill>
                         </a:rPr>
-                        <a:t>실시간 + 2D
-+ LiDAR 센서 모델</a:t>
+                        <a:t>Wave 를 N 개 plane wave 의 파라미터 (A, k_x, k_y, ω, φ) 로 직접 추정 — 격자 없이 연속 wavenumber 추정. &lt;100 ms inference + 2D directional + LiDAR raydrop 모사</a:t>
                       </a:r>
                     </a:p>
                   </a:txBody>
@@ -21158,7 +21772,7 @@
                             <a:srgbClr val="1A1A2E"/>
                           </a:solidFill>
                         </a:rPr>
-                        <a:t>선형 근사</a:t>
+                        <a:t>Linear superposition 가정 (LWT family) — 비선형 wave (HOSM 류) 처리 못 함. ε &lt; 0.07 operational range 에서만 신뢰</a:t>
                       </a:r>
                     </a:p>
                   </a:txBody>
@@ -21181,8 +21795,8 @@
         </p:nvSpPr>
         <p:spPr>
           <a:xfrm>
-            <a:off x="457200" y="6217920"/>
-            <a:ext cx="11247120" cy="548640"/>
+            <a:off x="457200" y="6400800"/>
+            <a:ext cx="11247120" cy="365760"/>
           </a:xfrm>
           <a:prstGeom prst="rect">
             <a:avLst/>
@@ -21196,7 +21810,7 @@
           <a:lstStyle/>
           <a:p>
             <a:pPr algn="l">
-              <a:defRPr sz="1200" b="0" i="1">
+              <a:defRPr sz="1100" b="0" i="1">
                 <a:solidFill>
                   <a:srgbClr val="007ACC"/>
                 </a:solidFill>
@@ -21204,7 +21818,7 @@
               </a:defRPr>
             </a:pPr>
             <a:r>
-              <a:t>핵심: 실시간(100ms 이내) + 2D 방향성 + 희소 LiDAR + 비지도학습을 모두 만족하는 선행연구는 없었습니다. 우리 WaveSplat이 이 조합을 처음 시도합니다.</a:t>
+              <a:t>핵심: 실시간 + 2D 방향성 + 희소 LiDAR + 비지도학습을 모두 만족하는 선행연구는 없습니다. WaveSplat 이 이 조합의 첫 사례.</a:t>
             </a:r>
           </a:p>
         </p:txBody>
@@ -21422,7 +22036,16 @@
                 </a:solidFill>
                 <a:latin typeface="Calibri"/>
               </a:rPr>
-              <a:t>앙상블 칼만 필터(EnKF) + 파도 시뮬레이터(HOS) 첫 결합</a:t>
+              <a:t>EnKF (Ensemble Kalman Filter)</a:t>
+            </a:r>
+            <a:r>
+              <a:rPr sz="1200" b="0">
+                <a:solidFill>
+                  <a:srgbClr val="1A1A2E"/>
+                </a:solidFill>
+                <a:latin typeface="Calibri"/>
+              </a:rPr>
+              <a:t>: 50–300 개 wave simulation 을 동시에 진행 후 measurement 로 update</a:t>
             </a:r>
           </a:p>
           <a:p>
@@ -21438,7 +22061,7 @@
                 </a:solidFill>
                 <a:latin typeface="Calibri"/>
               </a:rPr>
-              <a:t>   – 쉽게 말해: 300개의 시뮬레이션을 동시에 돌리고, 관측값으로 보정하는 방식</a:t>
+              <a:t>   – Forecast 단계: 각 ensemble member 가 wave model 로 시간 진행</a:t>
             </a:r>
           </a:p>
           <a:p>
@@ -21454,7 +22077,7 @@
                 </a:solidFill>
                 <a:latin typeface="Calibri"/>
               </a:rPr>
-              <a:t>   – 날씨 예보에서 출발한 기법이 파도 추정에 쓰이게 된 것입니다</a:t>
+              <a:t>   – Analysis 단계: ensemble 의 covariance 와 measurement 로 베이지안 update</a:t>
             </a:r>
           </a:p>
           <a:p>
@@ -21479,6 +22102,88 @@
                 </a:solidFill>
                 <a:latin typeface="Calibri"/>
               </a:rPr>
+              <a:t>HOS (High-Order Spectral method)</a:t>
+            </a:r>
+            <a:r>
+              <a:rPr sz="1200" b="0">
+                <a:solidFill>
+                  <a:srgbClr val="1A1A2E"/>
+                </a:solidFill>
+                <a:latin typeface="Calibri"/>
+              </a:rPr>
+              <a:t>: 비선형 wave model — Linear Wave Theory (LWT) 의 확장</a:t>
+            </a:r>
+          </a:p>
+          <a:p>
+            <a:pPr>
+              <a:spcAft>
+                <a:spcPts val="300"/>
+              </a:spcAft>
+            </a:pPr>
+            <a:r>
+              <a:rPr sz="1200">
+                <a:solidFill>
+                  <a:srgbClr val="1A1A2E"/>
+                </a:solidFill>
+                <a:latin typeface="Calibri"/>
+              </a:rPr>
+              <a:t>   – 표면 boundary condition 의 비선형 항 (wave-wave interaction) 까지 spectral 표현으로 계산</a:t>
+            </a:r>
+          </a:p>
+          <a:p>
+            <a:pPr>
+              <a:spcAft>
+                <a:spcPts val="300"/>
+              </a:spcAft>
+            </a:pPr>
+            <a:r>
+              <a:rPr sz="1200">
+                <a:solidFill>
+                  <a:srgbClr val="1A1A2E"/>
+                </a:solidFill>
+                <a:latin typeface="Calibri"/>
+              </a:rPr>
+              <a:t>   – Wave steepness ε ~ 0.1 까지 처리 가능 (LWT 는 ε &lt; 0.07)</a:t>
+            </a:r>
+          </a:p>
+          <a:p>
+            <a:pPr>
+              <a:spcAft>
+                <a:spcPts val="300"/>
+              </a:spcAft>
+            </a:pPr>
+            <a:r>
+              <a:rPr sz="1200">
+                <a:solidFill>
+                  <a:srgbClr val="1A1A2E"/>
+                </a:solidFill>
+                <a:latin typeface="Calibri"/>
+              </a:rPr>
+              <a:t>   – Dommermuth &amp; Yue 1987, West et al. 1987 에서 출발한 표준 비선형 wave model</a:t>
+            </a:r>
+          </a:p>
+          <a:p>
+            <a:pPr>
+              <a:spcAft>
+                <a:spcPts val="300"/>
+              </a:spcAft>
+            </a:pPr>
+            <a:r>
+              <a:rPr sz="1200">
+                <a:solidFill>
+                  <a:srgbClr val="1A1A2E"/>
+                </a:solidFill>
+                <a:latin typeface="Calibri"/>
+              </a:rPr>
+              <a:t>• </a:t>
+            </a:r>
+            <a:r>
+              <a:rPr sz="1200" b="1">
+                <a:solidFill>
+                  <a:srgbClr val="1A1A2E"/>
+                </a:solidFill>
+                <a:latin typeface="Calibri"/>
+              </a:rPr>
               <a:t>Wang 2025 (Coastal Eng 197)</a:t>
             </a:r>
             <a:r>
@@ -21489,22 +22194,6 @@
                 <a:latin typeface="Calibri"/>
               </a:rPr>
               <a:t>: Ne=300, fuzzy R 적응, Delaunay 보간</a:t>
-            </a:r>
-          </a:p>
-          <a:p>
-            <a:pPr>
-              <a:spcAft>
-                <a:spcPts val="300"/>
-              </a:spcAft>
-            </a:pPr>
-            <a:r>
-              <a:rPr sz="1200">
-                <a:solidFill>
-                  <a:srgbClr val="1A1A2E"/>
-                </a:solidFill>
-                <a:latin typeface="Calibri"/>
-              </a:rPr>
-              <a:t>   – → 우리가 원논문 방법을 충실히 재현하여 12개 에피소드에서 비교했습니다</a:t>
             </a:r>
           </a:p>
         </p:txBody>
@@ -21650,7 +22339,7 @@
                 </a:solidFill>
                 <a:latin typeface="Calibri"/>
               </a:rPr>
-              <a:t> — nRMSE가 ~0.25 아래로 내려가지 않음 (격자 밖 파수 표현 불가)</a:t>
+              <a:t> — nRMSE 가 ~0.25 아래로 내려가지 않음 (격자 밖 wavenumber 표현 불가)</a:t>
             </a:r>
           </a:p>
           <a:p>
@@ -21684,7 +22373,7 @@
                 </a:solidFill>
                 <a:latin typeface="Calibri"/>
               </a:rPr>
-              <a:t> — Ne=300개 시뮬레이션 → </a:t>
+              <a:t> — Ne=300 simulation → </a:t>
             </a:r>
             <a:r>
               <a:rPr sz="1200" b="1">
@@ -21693,7 +22382,7 @@
                 </a:solidFill>
                 <a:latin typeface="Calibri"/>
               </a:rPr>
-              <a:t>632 ms/frame</a:t>
+              <a:t>632 ms / frame</a:t>
             </a:r>
             <a:r>
               <a:rPr sz="1200" b="0">
@@ -21702,7 +22391,7 @@
                 </a:solidFill>
                 <a:latin typeface="Calibri"/>
               </a:rPr>
-              <a:t> (실시간 불가)</a:t>
+              <a:t> (real-time control loop 불가)</a:t>
             </a:r>
           </a:p>
         </p:txBody>
@@ -21786,7 +22475,7 @@
                 </a:solidFill>
                 <a:latin typeface="Calibri"/>
               </a:rPr>
-              <a:t>12-episode 비교 결과</a:t>
+              <a:t>12-episode 비교</a:t>
             </a:r>
             <a:r>
               <a:rPr sz="1200" b="0">
@@ -21813,7 +22502,7 @@
                 </a:solidFill>
                 <a:latin typeface="Calibri"/>
               </a:rPr>
-              <a:t> / 13ms  vs  Wang2025 0.253 / 632ms</a:t>
+              <a:t> / 13 ms  vs  Wang2025 0.253 / 632 ms</a:t>
             </a:r>
           </a:p>
           <a:p>
@@ -21847,7 +22536,7 @@
                 </a:solidFill>
                 <a:latin typeface="Calibri"/>
               </a:rPr>
-              <a:t>정확도 16% 우위 + 47배 빠름</a:t>
+              <a:t>정확도 16% 우위 + 47 배 빠름</a:t>
             </a:r>
             <a:r>
               <a:rPr sz="1200" b="0">
@@ -21856,7 +22545,7 @@
                 </a:solidFill>
                 <a:latin typeface="Calibri"/>
               </a:rPr>
-              <a:t> (GPU 없이, CPU만으로도 가능)</a:t>
+              <a:t> (CPU 만으로도 가능)</a:t>
             </a:r>
           </a:p>
         </p:txBody>
@@ -24031,7 +24720,7 @@
               </a:defRPr>
             </a:pPr>
             <a:r>
-              <a:t>Part 2 · WaveSim — 우리가 만든 simulator</a:t>
+              <a:t>Part 2 · WaveSim — LiDAR 모사 (1/2: 어떻게)</a:t>
             </a:r>
           </a:p>
         </p:txBody>
@@ -24067,7 +24756,7 @@
               </a:defRPr>
             </a:pPr>
             <a:r>
-              <a:t>WaveSim — physics + LiDAR sensor model</a:t>
+              <a:t>WaveSim — LiDAR 센서를 어떻게 시뮬레이션했나</a:t>
             </a:r>
           </a:p>
         </p:txBody>
@@ -24103,7 +24792,7 @@
               </a:defRPr>
             </a:pPr>
             <a:r>
-              <a:t>선형 중첩 + 분산 + JONSWAP 스펙트럼, 그리고 LiDAR raydrop 물리까지</a:t>
+              <a:t>Wave 수면 model + ray-mesh intersection + vessel motion 보정</a:t>
             </a:r>
           </a:p>
         </p:txBody>
@@ -24116,8 +24805,8 @@
         </p:nvSpPr>
         <p:spPr>
           <a:xfrm>
-            <a:off x="548640" y="1691640"/>
-            <a:ext cx="7315200" cy="4846320"/>
+            <a:off x="457200" y="1691640"/>
+            <a:ext cx="7772400" cy="4846320"/>
           </a:xfrm>
           <a:prstGeom prst="rect">
             <a:avLst/>
@@ -24136,7 +24825,7 @@
               </a:spcAft>
             </a:pPr>
             <a:r>
-              <a:rPr sz="1200">
+              <a:rPr sz="1100">
                 <a:solidFill>
                   <a:srgbClr val="1A1A2E"/>
                 </a:solidFill>
@@ -24145,16 +24834,16 @@
               <a:t>• </a:t>
             </a:r>
             <a:r>
-              <a:rPr sz="1200" b="1">
-                <a:solidFill>
-                  <a:srgbClr val="1A1A2E"/>
-                </a:solidFill>
-                <a:latin typeface="Calibri"/>
-              </a:rPr>
-              <a:t>Physics (수면 모델)</a:t>
-            </a:r>
-            <a:r>
-              <a:rPr sz="1200" b="0">
+              <a:rPr sz="1100" b="1">
+                <a:solidFill>
+                  <a:srgbClr val="1A1A2E"/>
+                </a:solidFill>
+                <a:latin typeface="Calibri"/>
+              </a:rPr>
+              <a:t>수면 model (간략)</a:t>
+            </a:r>
+            <a:r>
+              <a:rPr sz="1100" b="0">
                 <a:solidFill>
                   <a:srgbClr val="1A1A2E"/>
                 </a:solidFill>
@@ -24170,7 +24859,7 @@
               </a:spcAft>
             </a:pPr>
             <a:r>
-              <a:rPr sz="1200">
+              <a:rPr sz="1100">
                 <a:solidFill>
                   <a:srgbClr val="1A1A2E"/>
                 </a:solidFill>
@@ -24186,13 +24875,13 @@
               </a:spcAft>
             </a:pPr>
             <a:r>
-              <a:rPr sz="1200">
-                <a:solidFill>
-                  <a:srgbClr val="1A1A2E"/>
-                </a:solidFill>
-                <a:latin typeface="Calibri"/>
-              </a:rPr>
-              <a:t>   – N개 plane wave의 선형 중첩 (Linear Wave Theory, LWT)</a:t>
+              <a:rPr sz="1100">
+                <a:solidFill>
+                  <a:srgbClr val="1A1A2E"/>
+                </a:solidFill>
+                <a:latin typeface="Calibri"/>
+              </a:rPr>
+              <a:t>   – N 개 plane wave 의 선형 중첩 (Linear Wave Theory, LWT)</a:t>
             </a:r>
           </a:p>
           <a:p>
@@ -24202,7 +24891,23 @@
               </a:spcAft>
             </a:pPr>
             <a:r>
-              <a:rPr sz="600"/>
+              <a:rPr sz="1100">
+                <a:solidFill>
+                  <a:srgbClr val="1A1A2E"/>
+                </a:solidFill>
+                <a:latin typeface="Calibri"/>
+              </a:rPr>
+              <a:t>   – Dispersion: ω_n = √(g·|k_n|·tanh(|k_n|·d))</a:t>
+            </a:r>
+          </a:p>
+          <a:p>
+            <a:pPr>
+              <a:spcAft>
+                <a:spcPts val="200"/>
+              </a:spcAft>
+            </a:pPr>
+            <a:r>
+              <a:rPr sz="500"/>
               <a:t> </a:t>
             </a:r>
           </a:p>
@@ -24213,7 +24918,7 @@
               </a:spcAft>
             </a:pPr>
             <a:r>
-              <a:rPr sz="1200">
+              <a:rPr sz="1100">
                 <a:solidFill>
                   <a:srgbClr val="1A1A2E"/>
                 </a:solidFill>
@@ -24222,16 +24927,16 @@
               <a:t>• </a:t>
             </a:r>
             <a:r>
-              <a:rPr sz="1200" b="1">
-                <a:solidFill>
-                  <a:srgbClr val="1A1A2E"/>
-                </a:solidFill>
-                <a:latin typeface="Calibri"/>
-              </a:rPr>
-              <a:t>Dispersion relation (분산 관계, 깊은 물)</a:t>
-            </a:r>
-            <a:r>
-              <a:rPr sz="1200" b="0">
+              <a:rPr sz="1100" b="1">
+                <a:solidFill>
+                  <a:srgbClr val="1A1A2E"/>
+                </a:solidFill>
+                <a:latin typeface="Calibri"/>
+              </a:rPr>
+              <a:t>LiDAR 센서 모사 — 단계별 처리</a:t>
+            </a:r>
+            <a:r>
+              <a:rPr sz="1100" b="0">
                 <a:solidFill>
                   <a:srgbClr val="1A1A2E"/>
                 </a:solidFill>
@@ -24247,13 +24952,8 @@
               </a:spcAft>
             </a:pPr>
             <a:r>
-              <a:rPr sz="1200">
-                <a:solidFill>
-                  <a:srgbClr val="1A1A2E"/>
-                </a:solidFill>
-                <a:latin typeface="Calibri"/>
-              </a:rPr>
-              <a:t>   – ω_n = √(g·|k_n|·tanh(|k_n|·d))   — 주파수와 wavenumber의 1-to-1 매핑</a:t>
+              <a:rPr sz="500"/>
+              <a:t> </a:t>
             </a:r>
           </a:p>
           <a:p>
@@ -24263,7 +24963,73 @@
               </a:spcAft>
             </a:pPr>
             <a:r>
-              <a:rPr sz="600"/>
+              <a:rPr sz="1100">
+                <a:solidFill>
+                  <a:srgbClr val="1A1A2E"/>
+                </a:solidFill>
+                <a:latin typeface="Calibri"/>
+              </a:rPr>
+              <a:t>• </a:t>
+            </a:r>
+            <a:r>
+              <a:rPr sz="1100" b="1">
+                <a:solidFill>
+                  <a:srgbClr val="1A1A2E"/>
+                </a:solidFill>
+                <a:latin typeface="Calibri"/>
+              </a:rPr>
+              <a:t>1) Ray emit (광선 발사)</a:t>
+            </a:r>
+            <a:r>
+              <a:rPr sz="1100" b="0">
+                <a:solidFill>
+                  <a:srgbClr val="1A1A2E"/>
+                </a:solidFill>
+                <a:latin typeface="Calibri"/>
+              </a:rPr>
+              <a:t>:</a:t>
+            </a:r>
+          </a:p>
+          <a:p>
+            <a:pPr>
+              <a:spcAft>
+                <a:spcPts val="200"/>
+              </a:spcAft>
+            </a:pPr>
+            <a:r>
+              <a:rPr sz="1100">
+                <a:solidFill>
+                  <a:srgbClr val="1A1A2E"/>
+                </a:solidFill>
+                <a:latin typeface="Calibri"/>
+              </a:rPr>
+              <a:t>   – vessel 위치에서 모든 (azimuth × elevation) 방향으로 laser ray 발사</a:t>
+            </a:r>
+          </a:p>
+          <a:p>
+            <a:pPr>
+              <a:spcAft>
+                <a:spcPts val="200"/>
+              </a:spcAft>
+            </a:pPr>
+            <a:r>
+              <a:rPr sz="1100">
+                <a:solidFill>
+                  <a:srgbClr val="1A1A2E"/>
+                </a:solidFill>
+                <a:latin typeface="Calibri"/>
+              </a:rPr>
+              <a:t>   – 실제 LiDAR (예: Velodyne, Ouster) 의 angular grid 와 동일한 패턴</a:t>
+            </a:r>
+          </a:p>
+          <a:p>
+            <a:pPr>
+              <a:spcAft>
+                <a:spcPts val="200"/>
+              </a:spcAft>
+            </a:pPr>
+            <a:r>
+              <a:rPr sz="500"/>
               <a:t> </a:t>
             </a:r>
           </a:p>
@@ -24274,7 +25040,7 @@
               </a:spcAft>
             </a:pPr>
             <a:r>
-              <a:rPr sz="1200">
+              <a:rPr sz="1100">
                 <a:solidFill>
                   <a:srgbClr val="1A1A2E"/>
                 </a:solidFill>
@@ -24283,22 +25049,22 @@
               <a:t>• </a:t>
             </a:r>
             <a:r>
-              <a:rPr sz="1200" b="1">
-                <a:solidFill>
-                  <a:srgbClr val="1A1A2E"/>
-                </a:solidFill>
-                <a:latin typeface="Calibri"/>
-              </a:rPr>
-              <a:t>Spectrum</a:t>
-            </a:r>
-            <a:r>
-              <a:rPr sz="1200" b="0">
-                <a:solidFill>
-                  <a:srgbClr val="1A1A2E"/>
-                </a:solidFill>
-                <a:latin typeface="Calibri"/>
-              </a:rPr>
-              <a:t>: JONSWAP-2D (Hasselmann 1973 + 방향 spreading), N_components 가변</a:t>
+              <a:rPr sz="1100" b="1">
+                <a:solidFill>
+                  <a:srgbClr val="1A1A2E"/>
+                </a:solidFill>
+                <a:latin typeface="Calibri"/>
+              </a:rPr>
+              <a:t>2) Wave mesh 생성</a:t>
+            </a:r>
+            <a:r>
+              <a:rPr sz="1100" b="0">
+                <a:solidFill>
+                  <a:srgbClr val="1A1A2E"/>
+                </a:solidFill>
+                <a:latin typeface="Calibri"/>
+              </a:rPr>
+              <a:t>:</a:t>
             </a:r>
           </a:p>
           <a:p>
@@ -24308,7 +25074,39 @@
               </a:spcAft>
             </a:pPr>
             <a:r>
-              <a:rPr sz="600"/>
+              <a:rPr sz="1100">
+                <a:solidFill>
+                  <a:srgbClr val="1A1A2E"/>
+                </a:solidFill>
+                <a:latin typeface="Calibri"/>
+              </a:rPr>
+              <a:t>   – η(x, y, t) 를 매 frame 격자 (50×50) 로 sampling 후 triangulation</a:t>
+            </a:r>
+          </a:p>
+          <a:p>
+            <a:pPr>
+              <a:spcAft>
+                <a:spcPts val="200"/>
+              </a:spcAft>
+            </a:pPr>
+            <a:r>
+              <a:rPr sz="1100">
+                <a:solidFill>
+                  <a:srgbClr val="1A1A2E"/>
+                </a:solidFill>
+                <a:latin typeface="Calibri"/>
+              </a:rPr>
+              <a:t>   – → 시간 t 에서의 wave 표면 = triangle 들</a:t>
+            </a:r>
+          </a:p>
+          <a:p>
+            <a:pPr>
+              <a:spcAft>
+                <a:spcPts val="200"/>
+              </a:spcAft>
+            </a:pPr>
+            <a:r>
+              <a:rPr sz="500"/>
               <a:t> </a:t>
             </a:r>
           </a:p>
@@ -24319,7 +25117,7 @@
               </a:spcAft>
             </a:pPr>
             <a:r>
-              <a:rPr sz="1200">
+              <a:rPr sz="1100">
                 <a:solidFill>
                   <a:srgbClr val="1A1A2E"/>
                 </a:solidFill>
@@ -24328,22 +25126,22 @@
               <a:t>• </a:t>
             </a:r>
             <a:r>
-              <a:rPr sz="1200" b="1">
-                <a:solidFill>
-                  <a:srgbClr val="1A1A2E"/>
-                </a:solidFill>
-                <a:latin typeface="Calibri"/>
-              </a:rPr>
-              <a:t>LiDAR sensor model</a:t>
-            </a:r>
-            <a:r>
-              <a:rPr sz="1200" b="0">
-                <a:solidFill>
-                  <a:srgbClr val="1A1A2E"/>
-                </a:solidFill>
-                <a:latin typeface="Calibri"/>
-              </a:rPr>
-              <a:t> (이 부분이 우리의 unique contribution):</a:t>
+              <a:rPr sz="1100" b="1">
+                <a:solidFill>
+                  <a:srgbClr val="1A1A2E"/>
+                </a:solidFill>
+                <a:latin typeface="Calibri"/>
+              </a:rPr>
+              <a:t>3) Ray-triangle intersection</a:t>
+            </a:r>
+            <a:r>
+              <a:rPr sz="1100" b="0">
+                <a:solidFill>
+                  <a:srgbClr val="1A1A2E"/>
+                </a:solidFill>
+                <a:latin typeface="Calibri"/>
+              </a:rPr>
+              <a:t> (Möller-Trumbore 1997):</a:t>
             </a:r>
           </a:p>
           <a:p>
@@ -24353,13 +25151,13 @@
               </a:spcAft>
             </a:pPr>
             <a:r>
-              <a:rPr sz="1200">
-                <a:solidFill>
-                  <a:srgbClr val="1A1A2E"/>
-                </a:solidFill>
-                <a:latin typeface="Calibri"/>
-              </a:rPr>
-              <a:t>   – Ray-triangle intersection (Möller-Trumbore 1997, 검증된 알고리즘)</a:t>
+              <a:rPr sz="1100">
+                <a:solidFill>
+                  <a:srgbClr val="1A1A2E"/>
+                </a:solidFill>
+                <a:latin typeface="Calibri"/>
+              </a:rPr>
+              <a:t>   – 각 ray 가 모든 triangle 과 교차하는지 계산 → first-hit point 반환</a:t>
             </a:r>
           </a:p>
           <a:p>
@@ -24369,13 +25167,13 @@
               </a:spcAft>
             </a:pPr>
             <a:r>
-              <a:rPr sz="1200">
-                <a:solidFill>
-                  <a:srgbClr val="1A1A2E"/>
-                </a:solidFill>
-                <a:latin typeface="Calibri"/>
-              </a:rPr>
-              <a:t>   – Raydrop probability — Fresnel reflectance (specular vs diffuse 선택)</a:t>
+              <a:rPr sz="1100">
+                <a:solidFill>
+                  <a:srgbClr val="1A1A2E"/>
+                </a:solidFill>
+                <a:latin typeface="Calibri"/>
+              </a:rPr>
+              <a:t>   – Möller-Trumbore: graphics 분야 표준 알고리즘, 수치적 안정 + 빠름</a:t>
             </a:r>
           </a:p>
           <a:p>
@@ -24385,13 +25183,13 @@
               </a:spcAft>
             </a:pPr>
             <a:r>
-              <a:rPr sz="1200">
-                <a:solidFill>
-                  <a:srgbClr val="1A1A2E"/>
-                </a:solidFill>
-                <a:latin typeface="Calibri"/>
-              </a:rPr>
-              <a:t>   – Geometric shadowing — 가까운 파도가 먼 파도를 가림</a:t>
+              <a:rPr sz="1100">
+                <a:solidFill>
+                  <a:srgbClr val="1A1A2E"/>
+                </a:solidFill>
+                <a:latin typeface="Calibri"/>
+              </a:rPr>
+              <a:t>   – → first-hit point 까지 거리 = LiDAR 측정값</a:t>
             </a:r>
           </a:p>
           <a:p>
@@ -24401,13 +25199,8 @@
               </a:spcAft>
             </a:pPr>
             <a:r>
-              <a:rPr sz="1200">
-                <a:solidFill>
-                  <a:srgbClr val="1A1A2E"/>
-                </a:solidFill>
-                <a:latin typeface="Calibri"/>
-              </a:rPr>
-              <a:t>   – Vessel motion + ego-velocity correction</a:t>
+              <a:rPr sz="500"/>
+              <a:t> </a:t>
             </a:r>
           </a:p>
           <a:p>
@@ -24417,8 +25210,31 @@
               </a:spcAft>
             </a:pPr>
             <a:r>
-              <a:rPr sz="600"/>
-              <a:t> </a:t>
+              <a:rPr sz="1100">
+                <a:solidFill>
+                  <a:srgbClr val="1A1A2E"/>
+                </a:solidFill>
+                <a:latin typeface="Calibri"/>
+              </a:rPr>
+              <a:t>• </a:t>
+            </a:r>
+            <a:r>
+              <a:rPr sz="1100" b="1">
+                <a:solidFill>
+                  <a:srgbClr val="1A1A2E"/>
+                </a:solidFill>
+                <a:latin typeface="Calibri"/>
+              </a:rPr>
+              <a:t>4) Vessel motion 보정</a:t>
+            </a:r>
+            <a:r>
+              <a:rPr sz="1100" b="0">
+                <a:solidFill>
+                  <a:srgbClr val="1A1A2E"/>
+                </a:solidFill>
+                <a:latin typeface="Calibri"/>
+              </a:rPr>
+              <a:t>:</a:t>
             </a:r>
           </a:p>
           <a:p>
@@ -24428,38 +25244,36 @@
               </a:spcAft>
             </a:pPr>
             <a:r>
-              <a:rPr sz="1200">
-                <a:solidFill>
-                  <a:srgbClr val="1A1A2E"/>
-                </a:solidFill>
-                <a:latin typeface="Calibri"/>
-              </a:rPr>
-              <a:t>• </a:t>
-            </a:r>
-            <a:r>
-              <a:rPr sz="1200" b="1">
-                <a:solidFill>
-                  <a:srgbClr val="1A1A2E"/>
-                </a:solidFill>
-                <a:latin typeface="Calibri"/>
-              </a:rPr>
-              <a:t>검증</a:t>
-            </a:r>
-            <a:r>
-              <a:rPr sz="1200" b="0">
-                <a:solidFill>
-                  <a:srgbClr val="1A1A2E"/>
-                </a:solidFill>
-                <a:latin typeface="Calibri"/>
-              </a:rPr>
-              <a:t>: 108 unit test 통과, 110 episode 합성 dataset 생성</a:t>
+              <a:rPr sz="1100">
+                <a:solidFill>
+                  <a:srgbClr val="1A1A2E"/>
+                </a:solidFill>
+                <a:latin typeface="Calibri"/>
+              </a:rPr>
+              <a:t>   – 선박 V=11.3 m/s 이동 (매 frame Δt=0.1 s 동안 1.13 m 전진)</a:t>
+            </a:r>
+          </a:p>
+          <a:p>
+            <a:pPr>
+              <a:spcAft>
+                <a:spcPts val="200"/>
+              </a:spcAft>
+            </a:pPr>
+            <a:r>
+              <a:rPr sz="1100">
+                <a:solidFill>
+                  <a:srgbClr val="1A1A2E"/>
+                </a:solidFill>
+                <a:latin typeface="Calibri"/>
+              </a:rPr>
+              <a:t>   – vessel-frame 측정 → world-frame 변환 (좌표계 변환)</a:t>
             </a:r>
           </a:p>
         </p:txBody>
       </p:sp>
       <p:pic>
         <p:nvPicPr>
-          <p:cNvPr id="6" name="Picture 5" descr="wavesim_BF4_5c_wave_field.png"/>
+          <p:cNvPr id="6" name="Picture 5" descr="wavesim_BF4_5c_wave_lidar.png"/>
           <p:cNvPicPr>
             <a:picLocks noChangeAspect="1"/>
           </p:cNvPicPr>
@@ -24473,8 +25287,8 @@
         </p:blipFill>
         <p:spPr>
           <a:xfrm>
-            <a:off x="7955279" y="1828800"/>
-            <a:ext cx="3931920" cy="2730176"/>
+            <a:off x="8412480" y="2011680"/>
+            <a:ext cx="3566160" cy="2380831"/>
           </a:xfrm>
           <a:prstGeom prst="rect">
             <a:avLst/>

--- a/wavesplat/docs/labmeeting_2026_05_13.pptx
+++ b/wavesplat/docs/labmeeting_2026_05_13.pptx
@@ -28,6 +28,7 @@
     <p:sldId id="276" r:id="rId28"/>
     <p:sldId id="277" r:id="rId29"/>
     <p:sldId id="278" r:id="rId30"/>
+    <p:sldId id="279" r:id="rId31"/>
   </p:sldIdLst>
   <p:sldSz cx="12191695" cy="6858000" type="screen4x3"/>
   <p:notesSz cx="6858000" cy="9144000"/>
@@ -612,207 +613,128 @@
           <a:lstStyle/>
           <a:p>
             <a:r>
-              <a:t>이전 슬라이드에서 LiDAR 모사 단계 (ray emit → wave mesh → ray tracing → vessel motion 처리) 를 설명드렸습니다. 이 슬라이드는 raydrop (점 누락) 의 핵심 — Fresnel 식의 단계별 계산을 자세히 설명합니다. Snell 의 법칙은 굴절각을 구하는 도구일 뿐, 실제 raydrop 확률을 결정하는 것은 Fresnel 식입니다.</a:t>
+              <a:t>이전 슬라이드에서 wave model + LiDAR 모사 4 단계를 설명드렸습니다. 이 슬라이드는 raydrop / shadowing 의 합당성과 검증을 다룹니다. Fresnel 식 자체의 단계별 계산은 backup A (또는 발표자에게 직접 설명) 으로 두고, 슬라이드는 *왜 합당한가 + 어떻게 검증되었나* 위주.</a:t>
             </a:r>
           </a:p>
           <a:p/>
           <a:p>
             <a:r>
-              <a:t>(1) Raydrop 의 물리:</a:t>
-            </a:r>
-          </a:p>
-          <a:p>
-            <a:r>
-              <a:t>  실제 LiDAR 에서 점이 누락되는 가장 큰 원인은 specular reflection 입니다.</a:t>
-            </a:r>
-          </a:p>
-          <a:p>
-            <a:r>
-              <a:t>  - 물 표면이 매끄러우면 ray 가 거울처럼 한 방향으로 반사. LiDAR receiver 가 그 방향에 없으면 return 없음 → 점 누락.</a:t>
-            </a:r>
-          </a:p>
-          <a:p>
-            <a:r>
-              <a:t>  - 입사각 (θ_i) 가 normal 에 가까우면 일부 ray 가 LiDAR 로 돌아옴 (점 검출).</a:t>
-            </a:r>
-          </a:p>
-          <a:p>
-            <a:r>
-              <a:t>  - θ_i 가 grazing (90°) 에 가까우면 specular 비중이 강해 거의 모든 ray 가 다른 방향으로 가버림.</a:t>
+              <a:t>(1) Raydrop 물리:</a:t>
+            </a:r>
+          </a:p>
+          <a:p>
+            <a:r>
+              <a:t>  - 실제 LiDAR 에서 점 누락의 주 원인은 specular reflection.</a:t>
+            </a:r>
+          </a:p>
+          <a:p>
+            <a:r>
+              <a:t>  - 매끄러운 표면은 ray 를 한 방향으로 반사 → LiDAR receiver 가 그 방향에 없으면 점 누락.</a:t>
+            </a:r>
+          </a:p>
+          <a:p>
+            <a:r>
+              <a:t>  - 입사각 θ_i 가 grazing (90°) 에 가까울수록 specular 가 강해서 raydrop 확률 ↑.</a:t>
+            </a:r>
+          </a:p>
+          <a:p>
+            <a:r>
+              <a:t>  - 모사: Fresnel reflectance R(θ_i) 와 거리 보정 1/d² 으로 종합 계산. 식 detail 은 backup.</a:t>
             </a:r>
           </a:p>
           <a:p/>
           <a:p>
             <a:r>
-              <a:t>(2) Fresnel 식의 계산 — step by step:</a:t>
+              <a:t>(2) Fresnel 의 합당성 — 발표 시 청자 질문에 대비:</a:t>
+            </a:r>
+          </a:p>
+          <a:p>
+            <a:r>
+              <a:t>  - 19 세기 Augustin-Jean Fresnel 정립 (1820 년대). 광학 교과서 Hecht, Optics §4.6 에 표준 등장.</a:t>
+            </a:r>
+          </a:p>
+          <a:p>
+            <a:r>
+              <a:t>  - 모든 광학 시뮬레이션 (rendering, oceanographic optics, satellite remote sensing) 에서 동일한 식 사용.</a:t>
+            </a:r>
+          </a:p>
+          <a:p>
+            <a:r>
+              <a:t>  - Ocean LiDAR 분야 Nouguier-Grilli-Guérin 2014 (IEEE TGRS) 에서 그대로 적용 — 검증된 표준.</a:t>
+            </a:r>
+          </a:p>
+          <a:p>
+            <a:r>
+              <a:t>  - 우리 simulator 의 1550 nm 파장 기준 물 굴절률 n = 1.318 은 광학 표준 데이터.</a:t>
             </a:r>
           </a:p>
           <a:p/>
           <a:p>
             <a:r>
-              <a:t>  [Step 1: Snell 의 법칙으로 굴절각 θ_t 계산]</a:t>
-            </a:r>
-          </a:p>
-          <a:p>
-            <a:r>
-              <a:t>  - air 의 굴절률 n₁ = 1, water 의 굴절률 n₂ = n.</a:t>
-            </a:r>
-          </a:p>
-          <a:p>
-            <a:r>
-              <a:t>  - n 값은 LiDAR 파장에 따라 다름. Falcon K1 LiDAR 는 1550 nm 파장 사용 → water 의 1550 nm 굴절률 n = 1.318.</a:t>
-            </a:r>
-          </a:p>
-          <a:p>
-            <a:r>
-              <a:t>  - Snell 의 법칙: n₁ sin θ_i = n₂ sin θ_t → sin θ_t = sin θ_i / n.</a:t>
-            </a:r>
-          </a:p>
-          <a:p>
-            <a:r>
-              <a:t>  - 이 sin θ_t 로부터 cos θ_t = √(1 − sin²θ_t) 계산.</a:t>
-            </a:r>
-          </a:p>
-          <a:p>
-            <a:r>
-              <a:t>  - Snell 자체는 raydrop 확률을 주지 않음 — 단지 다음 step 의 Fresnel 식 입력으로 쓸 θ_t 를 구하는 도구.</a:t>
+              <a:t>(3) Geometric shadowing — 추가 모델 없음:</a:t>
+            </a:r>
+          </a:p>
+          <a:p>
+            <a:r>
+              <a:t>  - Ray tracing 의 first-hit 결과로 자동 처리.</a:t>
+            </a:r>
+          </a:p>
+          <a:p>
+            <a:r>
+              <a:t>  - 광선 직진 + 첫 충돌점만 측정 = geometric optics 의 자연 결과.</a:t>
+            </a:r>
+          </a:p>
+          <a:p>
+            <a:r>
+              <a:t>  - 추가 가정 0, 자체 일관성 보장.</a:t>
             </a:r>
           </a:p>
           <a:p/>
           <a:p>
             <a:r>
-              <a:t>  [Step 2: Fresnel reflectance — 두 polarization 평균]</a:t>
-            </a:r>
-          </a:p>
-          <a:p>
-            <a:r>
-              <a:t>  - 광선은 두 polarization (s, p) 의 합으로 표현. LiDAR laser 는 polarization 이 무작위이거나 균일 (unpolarized) 이라 가정.</a:t>
-            </a:r>
-          </a:p>
-          <a:p>
-            <a:r>
-              <a:t>  - s-polarization (전기장이 입사 평면 수직): R_s = ((cos θ_i − n·cos θ_t) / (cos θ_i + n·cos θ_t))².</a:t>
-            </a:r>
-          </a:p>
-          <a:p>
-            <a:r>
-              <a:t>  - p-polarization (전기장이 입사 평면 안): R_p = ((n·cos θ_i − cos θ_t) / (n·cos θ_i + cos θ_t))².</a:t>
-            </a:r>
-          </a:p>
-          <a:p>
-            <a:r>
-              <a:t>  - Unpolarized 평균: R(θ_i) = (R_s + R_p) / 2 ∈ [0, 1].</a:t>
-            </a:r>
-          </a:p>
-          <a:p>
-            <a:r>
-              <a:t>  - 특성: θ_i = 0 (수직) 일 때 R ≈ ((1−n)/(1+n))² ≈ 0.02 — 거의 통과 (반사 2%). θ_i → 90° (grazing) 일 때 R → 1 — 거의 모두 specular 반사.</a:t>
+              <a:t>(4) 검증 — 3 단계:</a:t>
+            </a:r>
+          </a:p>
+          <a:p>
+            <a:r>
+              <a:t>  ① Unit test 108 개 — ray tracing 정확성, Fresnel 계산, shadowing edge case 각각 별도 test.</a:t>
+            </a:r>
+          </a:p>
+          <a:p>
+            <a:r>
+              <a:t>  ② 110 episode 합성 dataset 으로 다양한 sea state 에서 동작 확인 (BF2–BF7).</a:t>
+            </a:r>
+          </a:p>
+          <a:p>
+            <a:r>
+              <a:t>  ③ Sea trial 실측 LiDAR 데이터 (sea_trial_lidar.png) 와 점 분포 패턴 정성 비교 — 일치 확인.</a:t>
             </a:r>
           </a:p>
           <a:p/>
           <a:p>
             <a:r>
-              <a:t>  [Step 3: 거리·grazing 보정으로 최종 return probability]</a:t>
-            </a:r>
-          </a:p>
-          <a:p>
-            <a:r>
-              <a:t>  - P = η · R(θ_i) · cos(θ_i) / (d / d_ref)².</a:t>
-            </a:r>
-          </a:p>
-          <a:p>
-            <a:r>
-              <a:t>  - R(θ_i): 위에서 계산한 Fresnel 반사율 (0–1).</a:t>
-            </a:r>
-          </a:p>
-          <a:p>
-            <a:r>
-              <a:t>  - cos(θ_i): 수직 입사일수록 강한 신호 (Lambert cosine law).</a:t>
-            </a:r>
-          </a:p>
-          <a:p>
-            <a:r>
-              <a:t>  - 1/d² 항: 거리 attenuation (LiDAR signal 의 기본 광학). d_ref = 125 m (Falcon K1 spec 의 reference 거리).</a:t>
-            </a:r>
-          </a:p>
-          <a:p>
-            <a:r>
-              <a:t>  - η: calibration scale parameter — sea trial 데이터로 tune.</a:t>
+              <a:t>(5) 정직한 한계:</a:t>
+            </a:r>
+          </a:p>
+          <a:p>
+            <a:r>
+              <a:t>  - 미세파 (capillary, mm 단위): LiDAR raydrop 에 추가 영향, 우리는 미반영.</a:t>
+            </a:r>
+          </a:p>
+          <a:p>
+            <a:r>
+              <a:t>  - Foam, white cap: BF6 이상 wave breaking 시 발생.</a:t>
+            </a:r>
+          </a:p>
+          <a:p>
+            <a:r>
+              <a:t>  - Breaking wave: VOF-EnKF 영역, 우리는 future work.</a:t>
             </a:r>
           </a:p>
           <a:p/>
           <a:p>
             <a:r>
-              <a:t>  [코드 위치]: wavesim/raydrop_uniform.py 의 fresnel_reflectance() 함수가 위 식을 정확히 구현.</a:t>
-            </a:r>
-          </a:p>
-          <a:p/>
-          <a:p>
-            <a:r>
-              <a:t>(3) Fresnel 의 합당성:</a:t>
-            </a:r>
-          </a:p>
-          <a:p>
-            <a:r>
-              <a:t>  - 식 자체는 19 세기 Augustin-Jean Fresnel 이 정립 (1820s). 광학 교과서 (Hecht, Optics §4.6) 표준.</a:t>
-            </a:r>
-          </a:p>
-          <a:p>
-            <a:r>
-              <a:t>  - air-water 경계의 표준 physics — 모든 광학 시뮬레이션 (rendering, oceanographic optics) 에서 사용.</a:t>
-            </a:r>
-          </a:p>
-          <a:p>
-            <a:r>
-              <a:t>  - Ocean LiDAR 분야 (Nouguier-Grilli-Guérin 2014, IEEE TGRS) 에서 검증된 표준.</a:t>
-            </a:r>
-          </a:p>
-          <a:p/>
-          <a:p>
-            <a:r>
-              <a:t>(4) Geometric shadowing 은 별도 모델 없음:</a:t>
-            </a:r>
-          </a:p>
-          <a:p>
-            <a:r>
-              <a:t>  - Ray tracing 의 first-hit 결과로 자동 처리 (ray 가 첫 wave triangle 에 막히면 뒤쪽 못 보임).</a:t>
-            </a:r>
-          </a:p>
-          <a:p>
-            <a:r>
-              <a:t>  - geometric optics (광선 직진 + 첫 충돌점만 측정) 의 자연 결과 — 추가 가정 0.</a:t>
-            </a:r>
-          </a:p>
-          <a:p/>
-          <a:p>
-            <a:r>
-              <a:t>(5) 검증 + 한계:</a:t>
-            </a:r>
-          </a:p>
-          <a:p>
-            <a:r>
-              <a:t>  - 108 unit test 통과 (ray tracing 정확성, Fresnel 계산, shadowing edge case 모두 검증).</a:t>
-            </a:r>
-          </a:p>
-          <a:p>
-            <a:r>
-              <a:t>  - 110 episode 합성 dataset 으로 다양한 sea state 에서 동작 확인.</a:t>
-            </a:r>
-          </a:p>
-          <a:p>
-            <a:r>
-              <a:t>  - Sea trial 실측 LiDAR 데이터와 시각적 비교 (sea_trial_lidar.png) — 점 분포 패턴 일치.</a:t>
-            </a:r>
-          </a:p>
-          <a:p>
-            <a:r>
-              <a:t>  - 한계: 미세파 (capillary), foam, breaking wave 영향 미반영. Operational BF2–BF6 에서는 부차적.</a:t>
-            </a:r>
-          </a:p>
-          <a:p/>
-          <a:p>
-            <a:r>
-              <a:t>이 정도의 sensor 물리까지 포함된 simulator + 110 episode dataset 자체가 paper 의 contribution 일부입니다.</a:t>
+              <a:t>발표 시 청자가 'Fresnel 어떻게 계산?' 물으면: 'Snell 로 굴절각 → 두 polarization 평균 → 거리 보정' 3 단계 라고 답변. 수식 자세히는 backup A 또는 wavesim/raydrop_uniform.py 의 fresnel_reflectance() 함수 참조.</a:t>
             </a:r>
           </a:p>
         </p:txBody>
@@ -882,142 +804,167 @@
           <a:lstStyle/>
           <a:p>
             <a:r>
-              <a:t>WaveSplat 의 발상 시작과 명칭의 유래를 설명합니다.</a:t>
+              <a:t>WaveSplat 의 발상 시작과 명칭의 유래를 설명합니다. 외부 청자 (조선해양 분야 포함) 가 익숙한 표현을 쓰고, jargon 은 풀어 설명합니다.</a:t>
             </a:r>
           </a:p>
           <a:p/>
           <a:p>
             <a:r>
-              <a:t>(1) 왜 격자 기반은 부족한가:</a:t>
-            </a:r>
-          </a:p>
-          <a:p>
-            <a:r>
-              <a:t>  - Wang2025, Desmars 등 기존 방법은 wave field 를 80×60 = 4,800 개 격자 위 높이값으로 표현.</a:t>
-            </a:r>
-          </a:p>
-          <a:p>
-            <a:r>
-              <a:t>  - 추정해야 할 파라미터 수 = 4,800 개. 그러나 관측 점은 LiDAR frame 당 50 개.</a:t>
-            </a:r>
-          </a:p>
-          <a:p>
-            <a:r>
-              <a:t>  - 50 개로 4,800 개 추정 = ill-posed (under-determined). 어떻게든 격자 외 정보 (smoothness prior, ensemble covariance) 를 동원해야 함.</a:t>
-            </a:r>
-          </a:p>
-          <a:p>
-            <a:r>
-              <a:t>  - 추가 한계: 격자 간격보다 짧은 wave 는 Nyquist 한계로 표현 불가.</a:t>
+              <a:t>(1) 격자 기반의 한계 — 왜 부족한가:</a:t>
+            </a:r>
+          </a:p>
+          <a:p>
+            <a:r>
+              <a:t>  - Wang 2025, Desmars 등은 바다 표면 (수면 높이 η) 을 격자 위의 값으로 표현. 80×60 격자면 4,800 개 점.</a:t>
+            </a:r>
+          </a:p>
+          <a:p>
+            <a:r>
+              <a:t>  - 추정해야 할 변수 = 4,800 개. 그러나 LiDAR 관측 점은 frame 당 50 개.</a:t>
+            </a:r>
+          </a:p>
+          <a:p>
+            <a:r>
+              <a:t>  - 50 개 측정으로 4,800 개 변수 추정 = 정보 부족 (under-determined). 격자 외 추가 정보 (부드러움 가정, 앙상블 covariance) 를 동원해야 함.</a:t>
+            </a:r>
+          </a:p>
+          <a:p>
+            <a:r>
+              <a:t>  - 추가 한계: 격자 간격보다 짧은 파장의 파도는 격자로 표현 자체가 불가능 (Nyquist 한계).</a:t>
             </a:r>
           </a:p>
           <a:p/>
           <a:p>
             <a:r>
-              <a:t>(2) 발상의 전환 — atomic parameter 로 직접 표현:</a:t>
-            </a:r>
-          </a:p>
-          <a:p>
-            <a:r>
-              <a:t>  - JONSWAP spectrum 으로 분해해보면 실제 ocean wave 는 N=5–30 개 plane wave 의 합으로 충분히 근사 가능.</a:t>
-            </a:r>
-          </a:p>
-          <a:p>
-            <a:r>
-              <a:t>  - 각 plane wave 는 5 개 파라미터로 완전 결정: A (진폭), k_x, k_y (파수 vector), ω (각주파수), φ (초기 위상).</a:t>
-            </a:r>
-          </a:p>
-          <a:p>
-            <a:r>
-              <a:t>  - N=10 component 면 파라미터 50 개. 관측 50 개로 추정 가능.</a:t>
-            </a:r>
-          </a:p>
-          <a:p>
-            <a:r>
-              <a:t>  - Dispersion 관계 ω = √(g·|k|·tanh(|k|·d)) 를 hard constraint 로 강제 → ω 가 k 로부터 결정됨 → 자유도 5N → 4N.</a:t>
-            </a:r>
-          </a:p>
-          <a:p>
-            <a:r>
-              <a:t>  - 결정적 차이: 격자 간격이라는 한계가 없음 (k 가 연속). Wavelength 가 길든 짧든 자연스럽게 표현.</a:t>
+              <a:t>(2) 발상의 전환 — 파도 성분으로 직접 표현:</a:t>
+            </a:r>
+          </a:p>
+          <a:p>
+            <a:r>
+              <a:t>  - JONSWAP 스펙트럼으로 분해하면 실제 바다 파도는 보통 5-30 개의 sin 파 (성분, component) 의 합으로 충분히 근사.</a:t>
+            </a:r>
+          </a:p>
+          <a:p>
+            <a:r>
+              <a:t>  - 각 sin 파 성분은 5 개의 숫자로 완전히 결정 — 조선해양 분야 표준 wave 표현:</a:t>
+            </a:r>
+          </a:p>
+          <a:p>
+            <a:r>
+              <a:t>    · A (진폭, amplitude): 파고의 크기 (단위: m).</a:t>
+            </a:r>
+          </a:p>
+          <a:p>
+            <a:r>
+              <a:t>    · (k_x, k_y) (파수, wavenumber vector): 파장 λ = 2π/|k| 와 진행 방향 결정.</a:t>
+            </a:r>
+          </a:p>
+          <a:p>
+            <a:r>
+              <a:t>    · ω (각주파수, angular frequency): 주기 T = 2π/ω 의 역수, 시간적 변화율.</a:t>
+            </a:r>
+          </a:p>
+          <a:p>
+            <a:r>
+              <a:t>    · φ (위상, phase): 시작 시점 (어느 파도가 어느 시점에 어디 있는지).</a:t>
+            </a:r>
+          </a:p>
+          <a:p>
+            <a:r>
+              <a:t>  - N=10 개 성분이면 변수 50 개. LiDAR 관측 50 개로 1:1 추정 가능.</a:t>
+            </a:r>
+          </a:p>
+          <a:p>
+            <a:r>
+              <a:t>  - 분산 관계 (dispersion relation) ω = √(g·|k|·tanh(|k|·d)) 를 강제 → ω 가 k 에서 자동 결정 → 변수 5N → 4N.</a:t>
+            </a:r>
+          </a:p>
+          <a:p>
+            <a:r>
+              <a:t>  - 결정적 차이: 격자 간격이라는 한계가 없음. 파장이 짧든 길든 (k 가 연속) 자연스럽게 표현.</a:t>
             </a:r>
           </a:p>
           <a:p/>
           <a:p>
             <a:r>
-              <a:t>(3) 3D Gaussian Splatting (3DGS) 의 영감:</a:t>
-            </a:r>
-          </a:p>
-          <a:p>
-            <a:r>
-              <a:t>  - 3DGS (Kerbl et al. 2023, SIGGRAPH) 는 3D 공간을 voxel grid 또는 implicit NN 대신 *명시적 Gaussian 원소들의 합* 으로 표현.</a:t>
-            </a:r>
-          </a:p>
-          <a:p>
-            <a:r>
-              <a:t>  - 각 Gaussian 의 위치, 크기, 색을 직접 gradient descent 로 최적화.</a:t>
-            </a:r>
-          </a:p>
-          <a:p>
-            <a:r>
-              <a:t>  - 우리는 비슷한 발상을 spectrum 공간에 적용 — wave 를 명시적 plane wave 원소들의 합으로 표현, 각 원소의 5 파라미터를 직접 최적화.</a:t>
-            </a:r>
-          </a:p>
-          <a:p>
-            <a:r>
-              <a:t>  - 도메인은 다름 (3DGS=3D 공간, WaveSplat=spectrum 공간) 이지만 핵심 철학은 같음: grid-free + explicit parametric.</a:t>
+              <a:t>(3) 3D Gaussian Splatting (3DGS) 와의 영감:</a:t>
+            </a:r>
+          </a:p>
+          <a:p>
+            <a:r>
+              <a:t>  - 3DGS (Kerbl et al. 2023, SIGGRAPH 발표) 는 컴퓨터 그래픽 분야의 새로운 3D scene 표현 방법.</a:t>
+            </a:r>
+          </a:p>
+          <a:p>
+            <a:r>
+              <a:t>  - 기존 방법은 voxel grid (3D 격자) 또는 implicit neural network 사용.</a:t>
+            </a:r>
+          </a:p>
+          <a:p>
+            <a:r>
+              <a:t>  - 3DGS 는 3D 공간을 *여러 개의 Gaussian 원소* 의 합으로 표현. 각 Gaussian 의 위치/크기/색을 gradient descent 로 직접 최적화.</a:t>
+            </a:r>
+          </a:p>
+          <a:p>
+            <a:r>
+              <a:t>  - 우리도 비슷한 발상 — 격자 없이 *여러 sin 파 성분의 합* 으로 wave field 를 표현. 각 성분의 5 변수를 직접 최적화.</a:t>
+            </a:r>
+          </a:p>
+          <a:p>
+            <a:r>
+              <a:t>  - 도메인은 다름 (3DGS = 3D 영상, WaveSplat = 바다 파도) 이지만 핵심 철학은 같음.</a:t>
             </a:r>
           </a:p>
           <a:p/>
           <a:p>
             <a:r>
-              <a:t>(4) 'Splat' 이라는 명칭의 정직한 정리:</a:t>
-            </a:r>
-          </a:p>
-          <a:p>
-            <a:r>
-              <a:t>  - 3DGS 의 'splatting' 용어는 graphics 분야의 rendering 기법 (각 Gaussian 을 view plane 에 splat=뿌림).</a:t>
-            </a:r>
-          </a:p>
-          <a:p>
-            <a:r>
-              <a:t>  - 우리 work 의 '명시적 원소를 spectrum 공간에 위치시킨다' 는 발상은 3DGS 의 철학에서 영감.</a:t>
-            </a:r>
-          </a:p>
-          <a:p>
-            <a:r>
-              <a:t>  - 단 우리 알고리즘 자체는 graphics rendering 이 아니라 spectral parametric inversion (Tang 2013 atomic-norm 류).</a:t>
-            </a:r>
-          </a:p>
-          <a:p>
-            <a:r>
-              <a:t>  - 이름이 misleading 할 수 있어 paper 작성 시 명칭 변경 검토 중. 현재는 working name.</a:t>
-            </a:r>
-          </a:p>
-          <a:p>
-            <a:r>
-              <a:t>  - Q&amp;A 답변 준비: '초기 작업명. 3DGS 의 "여러 기저 함수의 가중합으로 연속 필드 표현" 발상에서 영감. 핵심 알고리즘은 표준 spectral parametric inversion.'</a:t>
+              <a:t>(4) 'Splat' 이라는 명칭 — 정직한 정리:</a:t>
+            </a:r>
+          </a:p>
+          <a:p>
+            <a:r>
+              <a:t>  - 3DGS 의 'splatting' 은 그래픽 rendering 기법 (각 Gaussian 을 화면에 'splat'=뿌림).</a:t>
+            </a:r>
+          </a:p>
+          <a:p>
+            <a:r>
+              <a:t>  - 우리는 그래픽 rendering 이 아니라 wave 추정 — 'splat' 의 정확한 의미는 우리 알고리즘에 직접 적용되지 않음.</a:t>
+            </a:r>
+          </a:p>
+          <a:p>
+            <a:r>
+              <a:t>  - 이름은 '명시적 원소를 직접 최적화' 라는 발상의 영감 표시. 초기 working name 으로 사용 중.</a:t>
+            </a:r>
+          </a:p>
+          <a:p>
+            <a:r>
+              <a:t>  - Paper 작성 시 더 적절한 이름 (예: SplatWave, ParametricWave, WaveAtom) 으로 변경 검토 가능.</a:t>
+            </a:r>
+          </a:p>
+          <a:p>
+            <a:r>
+              <a:t>  - Q&amp;A 답변 준비: '초기 작업명입니다. 3DGS 의 *여러 명시적 원소의 합으로 연속 필드를 표현* 한다는 발상에서 영감을 받았습니다. 핵심 알고리즘은 spectral parametric inversion (해양·신호처리 분야 표준).'</a:t>
             </a:r>
           </a:p>
           <a:p/>
           <a:p>
             <a:r>
-              <a:t>(5) 다음 슬라이드의 흐름 — 실제 알고리즘:</a:t>
-            </a:r>
-          </a:p>
-          <a:p>
-            <a:r>
-              <a:t>  - S12 (다음): Init 단계 — 다중 frame 에서 (k_x, k_y) 추정 (beamforming + dispersion).</a:t>
-            </a:r>
-          </a:p>
-          <a:p>
-            <a:r>
-              <a:t>  - S13 (그 다음): Tracking 단계 — 매 frame (A, φ) 만 Adam 으로 빠르게 update + Adaptive N.</a:t>
-            </a:r>
-          </a:p>
-          <a:p>
-            <a:r>
-              <a:t>  - S14 (그 다음): GT vs WaveSplat 비교 시각화.</a:t>
+              <a:t>(5) 다음 슬라이드 흐름 — 실제 알고리즘:</a:t>
+            </a:r>
+          </a:p>
+          <a:p>
+            <a:r>
+              <a:t>  - 다음 (S12): Init 단계 — 여러 frame 에서 파수 (k_x, k_y) 추정 (beamforming).</a:t>
+            </a:r>
+          </a:p>
+          <a:p>
+            <a:r>
+              <a:t>  - 그 다음 (S13): Tracking 단계 — 매 frame 진폭 (A) 과 위상 (φ) 만 Adam 으로 빠르게 update + 성분 수 자동 조정.</a:t>
+            </a:r>
+          </a:p>
+          <a:p>
+            <a:r>
+              <a:t>  - 그 다음 (S13d): GT 와 WaveSplat 의 비교 시각화.</a:t>
             </a:r>
           </a:p>
         </p:txBody>
@@ -1499,7 +1446,7 @@
           <a:lstStyle/>
           <a:p>
             <a:r>
-              <a:t>이 슬라이드는 WaveSplat 의 실제 추정 결과를 시각적으로 보여줍니다.</a:t>
+              <a:t>WaveSplat 추정 결과를 한 episode 의 한 시점에서 시각적으로 보여줍니다. 사용자 정정: 이 figure 는 ETKF 가 아니라 *Error* (잔여 오차) panel 임.</a:t>
             </a:r>
           </a:p>
           <a:p/>
@@ -1510,22 +1457,17 @@
           </a:p>
           <a:p>
             <a:r>
-              <a:t>  - 가로로 3 panel — 각각 다른 sea state / N_components 조합의 wave field.</a:t>
-            </a:r>
-          </a:p>
-          <a:p>
-            <a:r>
-              <a:t>  - 각 row 는 하나의 episode (예: BF3 2-comp, BF4 15-comp, BF5 30-comp).</a:t>
-            </a:r>
-          </a:p>
-          <a:p>
-            <a:r>
-              <a:t>  - 각 column: Ground Truth (좌), WaveSplat (중), ETKF (우).</a:t>
-            </a:r>
-          </a:p>
-          <a:p>
-            <a:r>
-              <a:t>  - Color: blue (음의 변위, wave trough) → white (수면) → red (양의 변위, wave crest).</a:t>
+              <a:t>  - 좌 (Ground Truth): 50×50 격자 위 실제 파도 표면 η(x,y,t). WaveSim 이 만든 합성 데이터의 참값.</a:t>
+            </a:r>
+          </a:p>
+          <a:p>
+            <a:r>
+              <a:t>  - 중 (WaveSplat): 추정된 N 개 sin 파 성분의 합으로 재구성한 파도. 격자 위에서 evaluate 한 값.</a:t>
+            </a:r>
+          </a:p>
+          <a:p>
+            <a:r>
+              <a:t>  - 우 (Error = GT − WaveSplat): 같은 색 스케일 (vmin/vmax) 로 표시한 잔여 오차. 이상적으로 모든 셀이 white (오차 0).</a:t>
             </a:r>
           </a:p>
           <a:p/>
@@ -1536,22 +1478,17 @@
           </a:p>
           <a:p>
             <a:r>
-              <a:t>  - GT 와 WaveSplat 의 wave 패턴이 거의 일치 — 위치, 방향, 진폭 모두 잘 재구성.</a:t>
-            </a:r>
-          </a:p>
-          <a:p>
-            <a:r>
-              <a:t>  - 격자 외 영역에서 WaveSplat 은 자연스럽게 wave 패턴 연장 (parametric model 의 장점).</a:t>
-            </a:r>
-          </a:p>
-          <a:p>
-            <a:r>
-              <a:t>  - ETKF 는 격자 위에서만 추정 → 격자 사이 미세 wave 손실. 격자 해상도 한계가 명확히 보임.</a:t>
-            </a:r>
-          </a:p>
-          <a:p>
-            <a:r>
-              <a:t>  - 단순한 파도 (2 comp) 는 WaveSplat 이 압도적, 복잡한 파도 (30 comp) 는 둘 다 어려움 — 다음 슬라이드에서 정량.</a:t>
+              <a:t>  - 좌-중: GT 와 WaveSplat 의 파도 패턴이 거의 일치 — 위치, 방향, 진폭 모두 잘 재구성.</a:t>
+            </a:r>
+          </a:p>
+          <a:p>
+            <a:r>
+              <a:t>  - 우 (Error): 대부분 white → 추정 잔여 오차가 작음. 일부 영역 (격자 가장자리 또는 복잡한 wave 만나는 곳) 에서 약간의 오차.</a:t>
+            </a:r>
+          </a:p>
+          <a:p>
+            <a:r>
+              <a:t>  - 단일 case 시각화 — 정량 비교는 다음 슬라이드 (S14) 의 12 episode 평균.</a:t>
             </a:r>
           </a:p>
           <a:p/>
@@ -1562,43 +1499,54 @@
           </a:p>
           <a:p>
             <a:r>
-              <a:t>  - paper/figures/demo_wavesplat_static.png — static 버전 (현재 PPT 에 삽입).</a:t>
-            </a:r>
-          </a:p>
-          <a:p>
-            <a:r>
-              <a:t>  - paper/figures/demo_wavesplat.gif — animation 버전 (1481×404, 시간 진행 30 s).</a:t>
-            </a:r>
-          </a:p>
-          <a:p>
-            <a:r>
-              <a:t>  - PowerPoint 에서 GIF 로 교체하면 발표 시 wave 가 시간에 따라 propagate 하는 것을 보여줄 수 있음.</a:t>
-            </a:r>
-          </a:p>
-          <a:p>
-            <a:r>
-              <a:t>  - 추가 figure: paper/figures/fig8_qualitative.pdf 도 같은 비교 (PDF, 더 자세한 nRMSE annotation 포함).</a:t>
+              <a:t>  - paper/figures/demo_wavesplat_static.png — 한 case 의 static 버전 (현재 PPT 삽입).</a:t>
+            </a:r>
+          </a:p>
+          <a:p>
+            <a:r>
+              <a:t>  - paper/figures/demo_wavesplat.gif — animation 버전 (1481×404, 30 s 시간 진행).</a:t>
+            </a:r>
+          </a:p>
+          <a:p>
+            <a:r>
+              <a:t>  - paper/figures/fig8_qualitative.pdf — 여러 sea state × N 조합의 GT/WaveSplat/ETKF 비교 (Appendix C 에 발췌).</a:t>
             </a:r>
           </a:p>
           <a:p/>
           <a:p>
             <a:r>
-              <a:t>(4) 발표 tip:</a:t>
-            </a:r>
-          </a:p>
-          <a:p>
-            <a:r>
-              <a:t>  - 발표 시 이 슬라이드에서 잠깐 멈추고 청자가 GT 와 WaveSplat 의 wave 패턴을 직접 비교하게 함.</a:t>
-            </a:r>
-          </a:p>
-          <a:p>
-            <a:r>
-              <a:t>  - '눈으로 봐도 거의 같은 wave 패턴' 이 WaveSplat 의 효과를 가장 직관적으로 전달.</a:t>
-            </a:r>
-          </a:p>
-          <a:p>
-            <a:r>
-              <a:t>  - 다음 슬라이드의 정량 비교 (nRMSE 0.211 vs 0.253) 가 이 시각적 인상을 뒷받침.</a:t>
+              <a:t>(4) 추가 case 들:</a:t>
+            </a:r>
+          </a:p>
+          <a:p>
+            <a:r>
+              <a:t>  - 사용자 요청: 다른 sea state / N_components 조합의 대표 case 들도 보여달라 → Appendix C 에 추가.</a:t>
+            </a:r>
+          </a:p>
+          <a:p>
+            <a:r>
+              <a:t>  - Appendix C 에는 BF3/BF4/BF5 의 단순 (2 comp) ~ 복잡 (30 comp) 까지 다양한 case.</a:t>
+            </a:r>
+          </a:p>
+          <a:p/>
+          <a:p>
+            <a:r>
+              <a:t>(5) 발표 tip:</a:t>
+            </a:r>
+          </a:p>
+          <a:p>
+            <a:r>
+              <a:t>  - 이 슬라이드에서 잠깐 멈추고 청자가 GT 와 WaveSplat 의 파도 패턴을 직접 비교하게 함.</a:t>
+            </a:r>
+          </a:p>
+          <a:p>
+            <a:r>
+              <a:t>  - '눈으로 봐도 거의 같음, Error panel 이 거의 white' 이 WaveSplat 효과의 직관적 evidence.</a:t>
+            </a:r>
+          </a:p>
+          <a:p>
+            <a:r>
+              <a:t>  - 다음 슬라이드 (S14) 의 정량 비교 (nRMSE 0.211 vs 0.253) 가 이 시각적 인상을 뒷받침.</a:t>
             </a:r>
           </a:p>
         </p:txBody>
@@ -3387,6 +3335,155 @@
 </p:notes>
 </file>
 
+<file path=ppt/notesSlides/notesSlide24.xml><?xml version="1.0" encoding="utf-8"?>
+<p:notes xmlns:a="http://schemas.openxmlformats.org/drawingml/2006/main" xmlns:p="http://schemas.openxmlformats.org/presentationml/2006/main" xmlns:r="http://schemas.openxmlformats.org/officeDocument/2006/relationships">
+  <p:cSld>
+    <p:spTree>
+      <p:nvGrpSpPr>
+        <p:cNvPr id="1" name=""/>
+        <p:cNvGrpSpPr/>
+        <p:nvPr/>
+      </p:nvGrpSpPr>
+      <p:grpSpPr>
+        <a:xfrm>
+          <a:off x="0" y="0"/>
+          <a:ext cx="0" cy="0"/>
+          <a:chOff x="0" y="0"/>
+          <a:chExt cx="0" cy="0"/>
+        </a:xfrm>
+      </p:grpSpPr>
+      <p:sp>
+        <p:nvSpPr>
+          <p:cNvPr id="2" name="Slide Image Placeholder 1"/>
+          <p:cNvSpPr>
+            <a:spLocks noGrp="1"/>
+          </p:cNvSpPr>
+          <p:nvPr>
+            <p:ph type="sldImg" idx="2"/>
+          </p:nvPr>
+        </p:nvSpPr>
+        <p:spPr/>
+      </p:sp>
+      <p:sp>
+        <p:nvSpPr>
+          <p:cNvPr id="3" name="Notes Placeholder 2"/>
+          <p:cNvSpPr>
+            <a:spLocks noGrp="1"/>
+          </p:cNvSpPr>
+          <p:nvPr>
+            <p:ph type="body" idx="3" sz="quarter"/>
+          </p:nvPr>
+        </p:nvSpPr>
+        <p:spPr/>
+        <p:txBody>
+          <a:bodyPr/>
+          <a:lstStyle/>
+          <a:p>
+            <a:r>
+              <a:t>Appendix C — 사용자 요청에 따라 다양한 sea state / N_components 조합의 대표 case 모음.</a:t>
+            </a:r>
+          </a:p>
+          <a:p/>
+          <a:p>
+            <a:r>
+              <a:t>(1) Figure 구성 (paper/figures/fig8_qualitative.pdf 기반):</a:t>
+            </a:r>
+          </a:p>
+          <a:p>
+            <a:r>
+              <a:t>  - 행 마다 하나의 episode (예: BF3 2-comp uniform, BF4 15-comp uniform, BF5 30-comp uniform).</a:t>
+            </a:r>
+          </a:p>
+          <a:p>
+            <a:r>
+              <a:t>  - 열 마다 GT / WaveSplat reconstruction / ETKF reconstruction / GPR reconstruction.</a:t>
+            </a:r>
+          </a:p>
+          <a:p>
+            <a:r>
+              <a:t>  - 각 panel 의 nRMSE annotation 포함 — 정량 비교 가능.</a:t>
+            </a:r>
+          </a:p>
+          <a:p>
+            <a:r>
+              <a:t>  - 색상: blue (음의 변위) → white (수면) → red (양의 변위).</a:t>
+            </a:r>
+          </a:p>
+          <a:p/>
+          <a:p>
+            <a:r>
+              <a:t>(2) 관찰 패턴:</a:t>
+            </a:r>
+          </a:p>
+          <a:p>
+            <a:r>
+              <a:t>  - 단순 wave (BF3 2-comp): WaveSplat 압도적 — nRMSE 0.05 수준. GT 와 거의 구별 안 됨.</a:t>
+            </a:r>
+          </a:p>
+          <a:p>
+            <a:r>
+              <a:t>  - 중간 (BF4 15-comp): 모든 method 가 main wave 패턴은 잘 잡지만 미세 wave 에서 차이.</a:t>
+            </a:r>
+          </a:p>
+          <a:p>
+            <a:r>
+              <a:t>  - 복잡 (BF5 30-comp): WaveSplat 도 N_components 추정에 어려움, ETKF 도 비슷한 어려움.</a:t>
+            </a:r>
+          </a:p>
+          <a:p/>
+          <a:p>
+            <a:r>
+              <a:t>(3) Q&amp;A 시 활용:</a:t>
+            </a:r>
+          </a:p>
+          <a:p>
+            <a:r>
+              <a:t>  - 청자가 'WaveSplat 이 모든 sea state 에서 우위인가?' 묻으면 → 이 figure 보여주며 'BF3 단순 wave 는 압도적, BF5 복잡 wave 는 비슷' 정직 disclosure.</a:t>
+            </a:r>
+          </a:p>
+          <a:p>
+            <a:r>
+              <a:t>  - 'WaveSplat 이 정말 격자 외 영역도 잘 표현하나?' → 격자 가장자리 영역의 wave 패턴이 자연스럽게 이어지는 것을 시각적으로 보여줌.</a:t>
+            </a:r>
+          </a:p>
+          <a:p/>
+          <a:p>
+            <a:r>
+              <a:t>(4) 추가 figure 생성 옵션:</a:t>
+            </a:r>
+          </a:p>
+          <a:p>
+            <a:r>
+              <a:t>  - 새 case 들 (예: BF6 30-comp, slope sensor, bimodal directional) 이 필요하면 scripts/generate_qualitative_figure.py 수정 후 재생성.</a:t>
+            </a:r>
+          </a:p>
+          <a:p>
+            <a:r>
+              <a:t>  - 발표 시간이 부족하면 이 슬라이드는 skip 가능 (Appendix 라 Q&amp;A 시만 참조).</a:t>
+            </a:r>
+          </a:p>
+        </p:txBody>
+      </p:sp>
+      <p:sp>
+        <p:nvSpPr>
+          <p:cNvPr id="4" name="Slide Number Placeholder 3"/>
+          <p:cNvSpPr>
+            <a:spLocks noGrp="1"/>
+          </p:cNvSpPr>
+          <p:nvPr>
+            <p:ph type="sldNum" idx="5" sz="quarter"/>
+          </p:nvPr>
+        </p:nvSpPr>
+        <p:spPr/>
+      </p:sp>
+    </p:spTree>
+  </p:cSld>
+  <p:clrMapOvr>
+    <a:masterClrMapping/>
+  </p:clrMapOvr>
+</p:notes>
+</file>
+
 <file path=ppt/notesSlides/notesSlide3.xml><?xml version="1.0" encoding="utf-8"?>
 <p:notes xmlns:a="http://schemas.openxmlformats.org/drawingml/2006/main" xmlns:p="http://schemas.openxmlformats.org/presentationml/2006/main" xmlns:r="http://schemas.openxmlformats.org/officeDocument/2006/relationships">
   <p:cSld>
@@ -4400,158 +4497,178 @@
           <a:lstStyle/>
           <a:p>
             <a:r>
-              <a:t>WaveSim 의 LiDAR 센서 모사 부분을 단계별로 설명드립니다. 두 부분 — wave model 과 LiDAR 모사.</a:t>
+              <a:t>WaveSim 시뮬레이터의 4 가지 구성 — 파도 모델, 스펙트럼, 분산 관계, LiDAR 센서 — 각각의 물리적 합당성과 검증을 설명드립니다.</a:t>
             </a:r>
           </a:p>
           <a:p/>
           <a:p>
             <a:r>
-              <a:t>(1) Wave model — Gerstner wave (단순 sinusoidal 의 확장):</a:t>
-            </a:r>
-          </a:p>
-          <a:p>
-            <a:r>
-              <a:t>  - 단순 LWT 는 수면 변위만 sinusoidal 로 표현 (η = A cos(...)).</a:t>
-            </a:r>
-          </a:p>
-          <a:p>
-            <a:r>
-              <a:t>  - Gerstner wave 는 입자의 운동까지 모사: 입자가 원 또는 타원 궤적으로 회전하면서 표면을 형성. Gerstner 1802 의 회전 정확해 (rotational exact solution), 후에 Dean &amp; Dalrymple 1991, Tessendorf 2001 에서 시뮬레이션용 수식 정리.</a:t>
-            </a:r>
-          </a:p>
-          <a:p>
-            <a:r>
-              <a:t>  - Q parameter: steepness 의 척도 (0 ≤ Q ≤ 1). Q=0 이면 LWT 와 동일, Q&gt;0 이면 Stokes-1 류 weakly nonlinear (crest 가 sharp, trough 가 flat).</a:t>
-            </a:r>
-          </a:p>
-          <a:p>
-            <a:r>
-              <a:t>  - Q 제약: ΣQ_i·ω_i·A_i ≤ 1 — 입자 궤적이 자체 교차하지 않도록 (particle crossing prevention, Tessendorf 2001).</a:t>
-            </a:r>
-          </a:p>
-          <a:p>
-            <a:r>
-              <a:t>  - 우리 simulator 의 default: Q_max = 0.8, conservative.</a:t>
+              <a:t>(1) 파도 모델 — Gerstner 파:</a:t>
+            </a:r>
+          </a:p>
+          <a:p>
+            <a:r>
+              <a:t>  - 단순 sinusoidal (LWT) 는 수면 변위만 표현 (η = A cos(...)).</a:t>
+            </a:r>
+          </a:p>
+          <a:p>
+            <a:r>
+              <a:t>  - Gerstner 파는 입자의 운동까지 모사 — 입자가 원/타원 궤적으로 회전하면서 표면 형성.</a:t>
+            </a:r>
+          </a:p>
+          <a:p>
+            <a:r>
+              <a:t>  - Q ∈ [0, 1]: 가파름 척도. Q=0 이면 LWT 와 동일, Q&gt;0 이면 약비선형 (crest sharp, trough flat — Stokes-1 풍).</a:t>
+            </a:r>
+          </a:p>
+          <a:p>
+            <a:r>
+              <a:t>  - Q 제약: Σ Q_i · ω_i · A_i ≤ 1. 이 제약을 어기면 입자 궤적이 자체 교차해서 비물리적 — Tessendorf 2001 의 particle crossing prevention.</a:t>
+            </a:r>
+          </a:p>
+          <a:p>
+            <a:r>
+              <a:t>  - 합당성: Tessendorf 2001 SIGGRAPH 의 ocean simulation 표준, Dean &amp; Dalrymple 1991 교과서.</a:t>
+            </a:r>
+          </a:p>
+          <a:p>
+            <a:r>
+              <a:t>  - 검증: wavesim/tests/ 의 Q-constraint test 가 ΣQ·ω·A 가 1 이하 유지 확인.</a:t>
             </a:r>
           </a:p>
           <a:p/>
           <a:p>
             <a:r>
-              <a:t>(2) Spectrum — JONSWAP (Joint North Sea Wave Project):</a:t>
-            </a:r>
-          </a:p>
-          <a:p>
-            <a:r>
-              <a:t>  - Hasselmann et al. 1973 가 북해 측정 데이터로 정립한 표준 wave spectrum.</a:t>
-            </a:r>
-          </a:p>
-          <a:p>
-            <a:r>
-              <a:t>  - S(ω) = α·g²·ω⁻⁵·exp(−5/4·(ω_p/ω)⁴) · γ^r — Pierson-Moskowitz 에 peak enhancement γ 추가.</a:t>
-            </a:r>
-          </a:p>
-          <a:p>
-            <a:r>
-              <a:t>  - 입력: H_s (significant wave height), T_p (peak period), γ (peak factor, default 3.3).</a:t>
-            </a:r>
-          </a:p>
-          <a:p>
-            <a:r>
-              <a:t>  - N 개 wave component 의 (A_n, ω_n) 를 이 spectrum 으로부터 sampling — 각 component 의 amplitude 는 √(2·S(ω)·Δω).</a:t>
-            </a:r>
-          </a:p>
-          <a:p>
-            <a:r>
-              <a:t>  - 방향 spreading: cos²ˢ 함수로 directional component 분배.</a:t>
+              <a:t>(2) 스펙트럼 — JONSWAP (Joint North Sea Wave Project):</a:t>
+            </a:r>
+          </a:p>
+          <a:p>
+            <a:r>
+              <a:t>  - Hasselmann et al. 1973 이 북해 측정 데이터로 정립한 표준 wave spectrum.</a:t>
+            </a:r>
+          </a:p>
+          <a:p>
+            <a:r>
+              <a:t>  - S(ω) = α · g² · ω⁻⁵ · exp(−5/4 · (ω_p/ω)⁴) · γ^r — Pierson-Moskowitz 에 peak enhancement γ 추가.</a:t>
+            </a:r>
+          </a:p>
+          <a:p>
+            <a:r>
+              <a:t>  - 입력: H_s (유의파고), T_p (첨두주기), γ (peak factor, default 3.3).</a:t>
+            </a:r>
+          </a:p>
+          <a:p>
+            <a:r>
+              <a:t>  - N 개 wave 성분의 (A_n, ω_n) 를 spectrum 으로부터 sampling: amplitude 는 √(2·S(ω)·Δω).</a:t>
+            </a:r>
+          </a:p>
+          <a:p>
+            <a:r>
+              <a:t>  - 방향 spreading: cos²ˢ 함수로 방향 성분 분배.</a:t>
+            </a:r>
+          </a:p>
+          <a:p>
+            <a:r>
+              <a:t>  - 합당성: 해양공학 분야 표준 wave spectrum. ITTC (International Towing Tank Conference) 와 IACS (International Association of Classification Societies) 모두 채택.</a:t>
             </a:r>
           </a:p>
           <a:p/>
           <a:p>
             <a:r>
-              <a:t>(3) LiDAR 센서 모사 — Falcon-class spec 기준:</a:t>
-            </a:r>
-          </a:p>
-          <a:p>
-            <a:r>
-              <a:t>  - 우리 simulator 의 default config 가 Falcon LiDAR 의 spec 과 같음.</a:t>
-            </a:r>
-          </a:p>
-          <a:p>
-            <a:r>
-              <a:t>  - Horizontal FOV 120°: 전 방향 360° 가 아니라 선수 방향 ±60° 반구 (실제 marine LiDAR 의 일반적 setup).</a:t>
-            </a:r>
-          </a:p>
-          <a:p>
-            <a:r>
-              <a:t>  - Vertical FOV ±5°: 수평 기준 ±5°, 총 10° 좁음 (먼 거리 표면 측정용).</a:t>
-            </a:r>
-          </a:p>
-          <a:p>
-            <a:r>
-              <a:t>  - 32 channels × 360 horizontal beams = 11,520 ray per scan.</a:t>
-            </a:r>
-          </a:p>
-          <a:p>
-            <a:r>
-              <a:t>  - Range 10–200 m (raydrop 후 valid 점 ~50 개).</a:t>
+              <a:t>(3) 분산 관계 — Airy 1845:</a:t>
+            </a:r>
+          </a:p>
+          <a:p>
+            <a:r>
+              <a:t>  - ω_n = √(g·|k_n|·tanh(|k_n|·d)) — frequency 와 wavenumber 의 표준 관계.</a:t>
+            </a:r>
+          </a:p>
+          <a:p>
+            <a:r>
+              <a:t>  - linear wave theory 의 기본 결과 (Airy 1845 가 처음 정립).</a:t>
+            </a:r>
+          </a:p>
+          <a:p>
+            <a:r>
+              <a:t>  - 입력: 중력 g = 9.81 m/s², 수심 d. 깊은 물 한계 (kd &gt;&gt; 1) 에서 ω = √(g·k).</a:t>
+            </a:r>
+          </a:p>
+          <a:p>
+            <a:r>
+              <a:t>  - 합당성: 100 년 이상 사용된 표준. 모든 wave estimation paper 에서 그대로 사용.</a:t>
             </a:r>
           </a:p>
           <a:p/>
           <a:p>
             <a:r>
-              <a:t>(4) Ray tracing 단계:</a:t>
-            </a:r>
-          </a:p>
-          <a:p>
-            <a:r>
-              <a:t>  - Wave 표면 η(x, y, t) 를 매 frame 격자로 sampling 후 triangle mesh 로 표현.</a:t>
-            </a:r>
-          </a:p>
-          <a:p>
-            <a:r>
-              <a:t>  - 각 ray 가 wave 표면 (mesh) 과 만나는 첫 점 (first-hit) 을 찾음 — 이 점이 LiDAR 측정값.</a:t>
-            </a:r>
-          </a:p>
-          <a:p>
-            <a:r>
-              <a:t>  - 표준 ray-triangle intersection 알고리즘 사용 (Möller-Trumbore 1997, 그래픽 분야 30 년 표준).</a:t>
+              <a:t>(4) LiDAR 센서 모사 — Falcon K1 spec 기준:</a:t>
+            </a:r>
+          </a:p>
+          <a:p>
+            <a:r>
+              <a:t>  - 우리 simulator 의 default config 가 Falcon K1 LiDAR spec 과 일치.</a:t>
+            </a:r>
+          </a:p>
+          <a:p>
+            <a:r>
+              <a:t>  - Horizontal FOV 120°: 전방향 360° 아니라 선수 방향 ±60° 반구 (marine LiDAR 의 일반 setup).</a:t>
+            </a:r>
+          </a:p>
+          <a:p>
+            <a:r>
+              <a:t>  - Vertical FOV ±5°: 수평 기준 ±5° 좁음 (먼 거리 surface 측정용).</a:t>
+            </a:r>
+          </a:p>
+          <a:p>
+            <a:r>
+              <a:t>  - 32 채널 × 360 horizontal beam = 11,520 ray / scan, range 10–200 m, 1550 nm 파장.</a:t>
+            </a:r>
+          </a:p>
+          <a:p>
+            <a:r>
+              <a:t>  - Ray tracing: 각 ray 가 파도 표면 (격자에서 만든 triangle mesh) 과 만나는 첫 점 (first-hit) 을 찾음.</a:t>
+            </a:r>
+          </a:p>
+          <a:p>
+            <a:r>
+              <a:t>  - Möller-Trumbore 1997: graphics 분야 표준 ray-triangle intersection 알고리즘.</a:t>
             </a:r>
           </a:p>
           <a:p/>
           <a:p>
             <a:r>
-              <a:t>(5) Vessel motion 처리 — 사용자 지적의 답:</a:t>
-            </a:r>
-          </a:p>
-          <a:p>
-            <a:r>
-              <a:t>  - Wave 격자는 world frame (고정 절대 좌표) 에 있음.</a:t>
-            </a:r>
-          </a:p>
-          <a:p>
-            <a:r>
-              <a:t>  - Wave 자체가 시간 t 에 따라 propagate (Σ A cos(kx − ωt + φ) 의 t 가 매 frame 진행).</a:t>
-            </a:r>
-          </a:p>
-          <a:p>
-            <a:r>
-              <a:t>  - Vessel 위치 (ray emit 점) 는 매 frame Δt=0.1 s 동안 V·Δt = 1.13 m 전진.</a:t>
-            </a:r>
-          </a:p>
-          <a:p>
-            <a:r>
-              <a:t>  - 즉 wave 격자는 그대로 두고 ray 의 시작점만 따라 이동 — 별도 좌표계 변환 없이 자연 처리.</a:t>
-            </a:r>
-          </a:p>
-          <a:p>
-            <a:r>
-              <a:t>  - 결과: 매 frame 다른 vessel 위치에서 wave 의 다른 부분을 관측 (synthetic aperture 효과).</a:t>
+              <a:t>(5) Vessel motion 처리 — 사용자 질문의 답 ('관측 창만 이동') 맞음:</a:t>
+            </a:r>
+          </a:p>
+          <a:p>
+            <a:r>
+              <a:t>  - 파도 field 는 충분히 큰 world frame 격자 (예: 500 m × 500 m) 에 고정. 시뮬레이션 시작 시 한 번 만들고 변경 없음.</a:t>
+            </a:r>
+          </a:p>
+          <a:p>
+            <a:r>
+              <a:t>  - Vessel (LiDAR mount 점) 만 그 격자 안을 V=11.3 m/s 로 이동.</a:t>
+            </a:r>
+          </a:p>
+          <a:p>
+            <a:r>
+              <a:t>  - 매 frame Δt=0.1 s 동안 vessel 위치가 1.13 m 전진. LiDAR FOV (관측 창) 도 함께 이동 — 매 frame 다른 영역 관측.</a:t>
+            </a:r>
+          </a:p>
+          <a:p>
+            <a:r>
+              <a:t>  - 파도 자체의 시간 변화는 η(x, y, t) 의 t 가 진행하는 것으로 자연 처리. 격자 자체는 그대로.</a:t>
+            </a:r>
+          </a:p>
+          <a:p>
+            <a:r>
+              <a:t>  - 결과: 매 frame 다른 vessel 위치에서 wave 의 다른 부분을 관측 — 이게 paper 의 main framing 인 synthetic aperture 효과의 원천.</a:t>
             </a:r>
           </a:p>
           <a:p/>
           <a:p>
             <a:r>
-              <a:t>다음 슬라이드에서 raydrop (점이 누락되는 현상) 의 합당성 — Snell 법칙 + Fresnel 식 — 을 자세히 설명드립니다.</a:t>
+              <a:t>다음 슬라이드에서 raydrop (점이 왜 누락되는가) 과 검증을 다룹니다 — Fresnel 식 자체의 단계별 계산은 발표자에게는 별도 설명, 슬라이드에는 합당성·검증 위주.</a:t>
             </a:r>
           </a:p>
         </p:txBody>
@@ -7838,7 +7955,7 @@
               </a:defRPr>
             </a:pPr>
             <a:r>
-              <a:t>Part 2 · WaveSim — LiDAR 모사 (2/2: 합당성)</a:t>
+              <a:t>Part 2 · WaveSim (2/2): raydrop 합당성 + 검증</a:t>
             </a:r>
           </a:p>
         </p:txBody>
@@ -7874,7 +7991,7 @@
               </a:defRPr>
             </a:pPr>
             <a:r>
-              <a:t>Raydrop — Fresnel 식의 단계별 계산</a:t>
+              <a:t>Raydrop / shadowing — 왜 합당하고 어떻게 검증되었나</a:t>
             </a:r>
           </a:p>
         </p:txBody>
@@ -7910,7 +8027,7 @@
               </a:defRPr>
             </a:pPr>
             <a:r>
-              <a:t>입사각 θ_i → Snell 로 굴절각 θ_t → Fresnel reflectance R → return probability P</a:t>
+              <a:t>각 물리 모델의 출처 + 우리 검증 방법</a:t>
             </a:r>
           </a:p>
         </p:txBody>
@@ -7958,7 +8075,7 @@
                 </a:solidFill>
                 <a:latin typeface="Calibri"/>
               </a:rPr>
-              <a:t>Raydrop 의 물리</a:t>
+              <a:t>Raydrop (점 누락) 의 물리</a:t>
             </a:r>
             <a:r>
               <a:rPr sz="1000" b="0">
@@ -7967,7 +8084,7 @@
                 </a:solidFill>
                 <a:latin typeface="Calibri"/>
               </a:rPr>
-              <a:t>: 파도 표면이 매끄러우면 specular 반사 — ray 가 LiDAR 가 아닌 방향으로 가서 return 없음</a:t>
+              <a:t>:</a:t>
             </a:r>
           </a:p>
           <a:p>
@@ -7983,7 +8100,39 @@
                 </a:solidFill>
                 <a:latin typeface="Calibri"/>
               </a:rPr>
-              <a:t>   – → 입사각 θ_i 에 따라 specular 비중이 다름 → Fresnel 식으로 정확히 계산</a:t>
+              <a:t>   – 파도 표면이 매끄러우면 ray 가 specular 반사 — LiDAR receiver 가 아닌 방향으로 가서 return 없음</a:t>
+            </a:r>
+          </a:p>
+          <a:p>
+            <a:pPr>
+              <a:spcAft>
+                <a:spcPts val="200"/>
+              </a:spcAft>
+            </a:pPr>
+            <a:r>
+              <a:rPr sz="1000">
+                <a:solidFill>
+                  <a:srgbClr val="1A1A2E"/>
+                </a:solidFill>
+                <a:latin typeface="Calibri"/>
+              </a:rPr>
+              <a:t>   – 입사각 θ_i 가 grazing (90°) 에 가까울수록 specular 비중 ↑ → 점 누락 ↑</a:t>
+            </a:r>
+          </a:p>
+          <a:p>
+            <a:pPr>
+              <a:spcAft>
+                <a:spcPts val="200"/>
+              </a:spcAft>
+            </a:pPr>
+            <a:r>
+              <a:rPr sz="1000">
+                <a:solidFill>
+                  <a:srgbClr val="1A1A2E"/>
+                </a:solidFill>
+                <a:latin typeface="Calibri"/>
+              </a:rPr>
+              <a:t>   – → 모사: Fresnel reflectance R(θ_i) 로 specular 비중 계산 (식은 backup A 참조)</a:t>
             </a:r>
           </a:p>
           <a:p>
@@ -8019,7 +8168,7 @@
                 </a:solidFill>
                 <a:latin typeface="Calibri"/>
               </a:rPr>
-              <a:t>계산 step 1 — Snell 의 법칙으로 굴절각 θ_t 구함</a:t>
+              <a:t>Fresnel 식의 합당성</a:t>
             </a:r>
             <a:r>
               <a:rPr sz="1000" b="0">
@@ -8044,7 +8193,7 @@
                 </a:solidFill>
                 <a:latin typeface="Calibri"/>
               </a:rPr>
-              <a:t>   – air n₁=1 → water n₂=n=1.318 (Falcon K1 의 1550 nm 파장 기준 굴절률)</a:t>
+              <a:t>   – 19 세기 Augustin-Jean Fresnel 정립 (1820 년대)</a:t>
             </a:r>
           </a:p>
           <a:p>
@@ -8060,7 +8209,7 @@
                 </a:solidFill>
                 <a:latin typeface="Calibri"/>
               </a:rPr>
-              <a:t>   – n₁ sin θ_i = n₂ sin θ_t  →  sin θ_t = sin θ_i / n</a:t>
+              <a:t>   – 광학 교과서 표준 (Hecht, Optics §4.6) — 모든 광학 시뮬레이션에서 사용</a:t>
             </a:r>
           </a:p>
           <a:p>
@@ -8076,7 +8225,23 @@
                 </a:solidFill>
                 <a:latin typeface="Calibri"/>
               </a:rPr>
-              <a:t>   – cos θ_t = √(1 − sin²θ_t)   (Snell 은 굴절각 구하는 도구일 뿐, raydrop 계산은 Fresnel)</a:t>
+              <a:t>   – Ocean LiDAR 분야 (Nouguier-Grilli-Guérin 2014, IEEE TGRS) 에서 검증된 표준</a:t>
+            </a:r>
+          </a:p>
+          <a:p>
+            <a:pPr>
+              <a:spcAft>
+                <a:spcPts val="200"/>
+              </a:spcAft>
+            </a:pPr>
+            <a:r>
+              <a:rPr sz="1000">
+                <a:solidFill>
+                  <a:srgbClr val="1A1A2E"/>
+                </a:solidFill>
+                <a:latin typeface="Calibri"/>
+              </a:rPr>
+              <a:t>   – Falcon K1 의 1550 nm 파장 기준 물 굴절률 n = 1.318 사용</a:t>
             </a:r>
           </a:p>
           <a:p>
@@ -8112,7 +8277,7 @@
                 </a:solidFill>
                 <a:latin typeface="Calibri"/>
               </a:rPr>
-              <a:t>계산 step 2 — Fresnel reflectance 두 polarization 평균</a:t>
+              <a:t>Geometric shadowing — 별도 모델 없음</a:t>
             </a:r>
             <a:r>
               <a:rPr sz="1000" b="0">
@@ -8121,7 +8286,7 @@
                 </a:solidFill>
                 <a:latin typeface="Calibri"/>
               </a:rPr>
-              <a:t> (unpolarized 가정):</a:t>
+              <a:t>:</a:t>
             </a:r>
           </a:p>
           <a:p>
@@ -8137,7 +8302,7 @@
                 </a:solidFill>
                 <a:latin typeface="Calibri"/>
               </a:rPr>
-              <a:t>   – R_s = ((cos θ_i − n·cos θ_t) / (cos θ_i + n·cos θ_t))²    (s-polarization)</a:t>
+              <a:t>   – 앞쪽 큰 파도가 뒤쪽을 가림 — ray tracing 의 first-hit 결과로 자동 처리</a:t>
             </a:r>
           </a:p>
           <a:p>
@@ -8153,39 +8318,7 @@
                 </a:solidFill>
                 <a:latin typeface="Calibri"/>
               </a:rPr>
-              <a:t>   – R_p = ((n·cos θ_i − cos θ_t) / (n·cos θ_i + cos θ_t))²    (p-polarization)</a:t>
-            </a:r>
-          </a:p>
-          <a:p>
-            <a:pPr>
-              <a:spcAft>
-                <a:spcPts val="200"/>
-              </a:spcAft>
-            </a:pPr>
-            <a:r>
-              <a:rPr sz="1000">
-                <a:solidFill>
-                  <a:srgbClr val="1A1A2E"/>
-                </a:solidFill>
-                <a:latin typeface="Calibri"/>
-              </a:rPr>
-              <a:t>   – R(θ_i) = (R_s + R_p) / 2 ∈ [0, 1]</a:t>
-            </a:r>
-          </a:p>
-          <a:p>
-            <a:pPr>
-              <a:spcAft>
-                <a:spcPts val="200"/>
-              </a:spcAft>
-            </a:pPr>
-            <a:r>
-              <a:rPr sz="1000">
-                <a:solidFill>
-                  <a:srgbClr val="1A1A2E"/>
-                </a:solidFill>
-                <a:latin typeface="Calibri"/>
-              </a:rPr>
-              <a:t>   – 특성: θ_i = 0 (수직 입사) 에서 R ≈ 0.02 (낮음, 대부분 통과). θ_i → 90° (grazing) 에서 R → 1</a:t>
+              <a:t>   – 광선 직진 + 첫 충돌점 측정 = geometric optics 의 자연 결과 (추가 가정 0)</a:t>
             </a:r>
           </a:p>
           <a:p>
@@ -8221,7 +8354,7 @@
                 </a:solidFill>
                 <a:latin typeface="Calibri"/>
               </a:rPr>
-              <a:t>계산 step 3 — Return probability 종합</a:t>
+              <a:t>검증 (validation)</a:t>
             </a:r>
             <a:r>
               <a:rPr sz="1000" b="0">
@@ -8246,7 +8379,7 @@
                 </a:solidFill>
                 <a:latin typeface="Calibri"/>
               </a:rPr>
-              <a:t>   – P = η · R(θ_i) · cos(θ_i) / (d / d_ref)²    (return likelihood)</a:t>
+              <a:t>   – ① 108 unit test 통과 — ray tracing 정확성, Fresnel 계산, shadowing edge case 모두 검증</a:t>
             </a:r>
           </a:p>
           <a:p>
@@ -8262,7 +8395,7 @@
                 </a:solidFill>
                 <a:latin typeface="Calibri"/>
               </a:rPr>
-              <a:t>   – R(θ_i): Fresnel 반사율 (위에서 계산)</a:t>
+              <a:t>   – ② 110 episode 합성 dataset — BF2–BF7 × N=1–30 다양한 sea state 에서 동작 확인</a:t>
             </a:r>
           </a:p>
           <a:p>
@@ -8278,39 +8411,7 @@
                 </a:solidFill>
                 <a:latin typeface="Calibri"/>
               </a:rPr>
-              <a:t>   – cos(θ_i): grazing 보정 (수직 입사일수록 강한 신호)</a:t>
-            </a:r>
-          </a:p>
-          <a:p>
-            <a:pPr>
-              <a:spcAft>
-                <a:spcPts val="200"/>
-              </a:spcAft>
-            </a:pPr>
-            <a:r>
-              <a:rPr sz="1000">
-                <a:solidFill>
-                  <a:srgbClr val="1A1A2E"/>
-                </a:solidFill>
-                <a:latin typeface="Calibri"/>
-              </a:rPr>
-              <a:t>   – 1/d² 항: 거리 attenuation (Falcon K1 의 d_ref = 125 m)</a:t>
-            </a:r>
-          </a:p>
-          <a:p>
-            <a:pPr>
-              <a:spcAft>
-                <a:spcPts val="200"/>
-              </a:spcAft>
-            </a:pPr>
-            <a:r>
-              <a:rPr sz="1000">
-                <a:solidFill>
-                  <a:srgbClr val="1A1A2E"/>
-                </a:solidFill>
-                <a:latin typeface="Calibri"/>
-              </a:rPr>
-              <a:t>   – η: calibration scale (sea trial 데이터로 tune)</a:t>
+              <a:t>   – ③ Sea trial 실측 LiDAR 데이터 (sea_trial_lidar.png) 와 점 분포 패턴 정성 비교 — 일치</a:t>
             </a:r>
           </a:p>
           <a:p>
@@ -8346,7 +8447,7 @@
                 </a:solidFill>
                 <a:latin typeface="Calibri"/>
               </a:rPr>
-              <a:t>Geometric shadowing</a:t>
+              <a:t>정직한 한계</a:t>
             </a:r>
             <a:r>
               <a:rPr sz="1000" b="0">
@@ -8355,7 +8456,7 @@
                 </a:solidFill>
                 <a:latin typeface="Calibri"/>
               </a:rPr>
-              <a:t>: 앞쪽 wave 가 뒤쪽 가림 — ray tracing 의 first-hit 결과로 자동 처리 (별도 모델 없음)</a:t>
+              <a:t>:</a:t>
             </a:r>
           </a:p>
           <a:p>
@@ -8365,8 +8466,13 @@
               </a:spcAft>
             </a:pPr>
             <a:r>
-              <a:rPr sz="500"/>
-              <a:t> </a:t>
+              <a:rPr sz="1000">
+                <a:solidFill>
+                  <a:srgbClr val="1A1A2E"/>
+                </a:solidFill>
+                <a:latin typeface="Calibri"/>
+              </a:rPr>
+              <a:t>   – 미세파 (capillary, mm 단위 surface roughness): 실제 LiDAR raydrop 에 추가 영향, 우리는 미반영</a:t>
             </a:r>
           </a:p>
           <a:p>
@@ -8382,25 +8488,7 @@
                 </a:solidFill>
                 <a:latin typeface="Calibri"/>
               </a:rPr>
-              <a:t>• </a:t>
-            </a:r>
-            <a:r>
-              <a:rPr sz="1000" b="1">
-                <a:solidFill>
-                  <a:srgbClr val="1A1A2E"/>
-                </a:solidFill>
-                <a:latin typeface="Calibri"/>
-              </a:rPr>
-              <a:t>검증</a:t>
-            </a:r>
-            <a:r>
-              <a:rPr sz="1000" b="0">
-                <a:solidFill>
-                  <a:srgbClr val="1A1A2E"/>
-                </a:solidFill>
-                <a:latin typeface="Calibri"/>
-              </a:rPr>
-              <a:t>: 108 unit test 통과 + 110 episode dataset + sea trial LiDAR 데이터와 분포 패턴 일치</a:t>
+              <a:t>   – Foam, white cap (BF6 이상): wave breaking 시 발생, LWT family 처리 못 함</a:t>
             </a:r>
           </a:p>
           <a:p>
@@ -8416,25 +8504,7 @@
                 </a:solidFill>
                 <a:latin typeface="Calibri"/>
               </a:rPr>
-              <a:t>• </a:t>
-            </a:r>
-            <a:r>
-              <a:rPr sz="1000" b="1">
-                <a:solidFill>
-                  <a:srgbClr val="1A1A2E"/>
-                </a:solidFill>
-                <a:latin typeface="Calibri"/>
-              </a:rPr>
-              <a:t>한계</a:t>
-            </a:r>
-            <a:r>
-              <a:rPr sz="1000" b="0">
-                <a:solidFill>
-                  <a:srgbClr val="1A1A2E"/>
-                </a:solidFill>
-                <a:latin typeface="Calibri"/>
-              </a:rPr>
-              <a:t>: 미세파 (capillary, mm 단위), foam, breaking wave 영향 미반영</a:t>
+              <a:t>   – Operational sea state (BF2–BF6) 에서는 부차적 효과로 가정</a:t>
             </a:r>
           </a:p>
         </p:txBody>
@@ -8568,7 +8638,7 @@
               </a:defRPr>
             </a:pPr>
             <a:r>
-              <a:t>WaveSplat — 아이디어의 시작과 명칭의 유래</a:t>
+              <a:t>WaveSplat — 아이디어의 시작과 'Splat' 이라는 이름</a:t>
             </a:r>
           </a:p>
         </p:txBody>
@@ -8604,7 +8674,7 @@
               </a:defRPr>
             </a:pPr>
             <a:r>
-              <a:t>왜 격자 없이 파라미터 자체를 추정하는가? 왜 'Splat' 이라는 이름인가?</a:t>
+              <a:t>왜 격자가 아닌 '파도 성분 한 개씩' 추정하는가? 왜 'Splat' 이름인가?</a:t>
             </a:r>
           </a:p>
         </p:txBody>
@@ -8617,8 +8687,8 @@
         </p:nvSpPr>
         <p:spPr>
           <a:xfrm>
-            <a:off x="457200" y="1691640"/>
-            <a:ext cx="7772400" cy="4846320"/>
+            <a:off x="365760" y="1691640"/>
+            <a:ext cx="7955279" cy="4937760"/>
           </a:xfrm>
           <a:prstGeom prst="rect">
             <a:avLst/>
@@ -8633,11 +8703,11 @@
           <a:p>
             <a:pPr>
               <a:spcAft>
-                <a:spcPts val="200"/>
-              </a:spcAft>
-            </a:pPr>
-            <a:r>
-              <a:rPr sz="1100">
+                <a:spcPts val="100"/>
+              </a:spcAft>
+            </a:pPr>
+            <a:r>
+              <a:rPr sz="1000">
                 <a:solidFill>
                   <a:srgbClr val="1A1A2E"/>
                 </a:solidFill>
@@ -8646,16 +8716,16 @@
               <a:t>• </a:t>
             </a:r>
             <a:r>
-              <a:rPr sz="1100" b="1">
-                <a:solidFill>
-                  <a:srgbClr val="1A1A2E"/>
-                </a:solidFill>
-                <a:latin typeface="Calibri"/>
-              </a:rPr>
-              <a:t>아이디어 시작 — 격자 기반의 본질적 제약</a:t>
-            </a:r>
-            <a:r>
-              <a:rPr sz="1100" b="0">
+              <a:rPr sz="1000" b="1">
+                <a:solidFill>
+                  <a:srgbClr val="1A1A2E"/>
+                </a:solidFill>
+                <a:latin typeface="Calibri"/>
+              </a:rPr>
+              <a:t>아이디어 출발 — 격자 기반의 한계</a:t>
+            </a:r>
+            <a:r>
+              <a:rPr sz="1000" b="0">
                 <a:solidFill>
                   <a:srgbClr val="1A1A2E"/>
                 </a:solidFill>
@@ -8667,55 +8737,55 @@
           <a:p>
             <a:pPr>
               <a:spcAft>
-                <a:spcPts val="200"/>
-              </a:spcAft>
-            </a:pPr>
-            <a:r>
-              <a:rPr sz="1100">
-                <a:solidFill>
-                  <a:srgbClr val="1A1A2E"/>
-                </a:solidFill>
-                <a:latin typeface="Calibri"/>
-              </a:rPr>
-              <a:t>   – Wang/Desmars 류는 파도를 격자 위 높이값 4,800 개 (80×60) 로 표현</a:t>
-            </a:r>
-          </a:p>
-          <a:p>
-            <a:pPr>
-              <a:spcAft>
-                <a:spcPts val="200"/>
-              </a:spcAft>
-            </a:pPr>
-            <a:r>
-              <a:rPr sz="1100">
-                <a:solidFill>
-                  <a:srgbClr val="1A1A2E"/>
-                </a:solidFill>
-                <a:latin typeface="Calibri"/>
-              </a:rPr>
-              <a:t>   – 관측 점은 frame 당 50 개 — 파라미터 4,800 개 추정에 턱없이 부족 → ill-posed</a:t>
-            </a:r>
-          </a:p>
-          <a:p>
-            <a:pPr>
-              <a:spcAft>
-                <a:spcPts val="200"/>
-              </a:spcAft>
-            </a:pPr>
-            <a:r>
-              <a:rPr sz="1100">
-                <a:solidFill>
-                  <a:srgbClr val="1A1A2E"/>
-                </a:solidFill>
-                <a:latin typeface="Calibri"/>
-              </a:rPr>
-              <a:t>   – 격자 간격보다 짧은 wave 는 표현 불가 (Nyquist 한계)</a:t>
-            </a:r>
-          </a:p>
-          <a:p>
-            <a:pPr>
-              <a:spcAft>
-                <a:spcPts val="200"/>
+                <a:spcPts val="100"/>
+              </a:spcAft>
+            </a:pPr>
+            <a:r>
+              <a:rPr sz="1000">
+                <a:solidFill>
+                  <a:srgbClr val="1A1A2E"/>
+                </a:solidFill>
+                <a:latin typeface="Calibri"/>
+              </a:rPr>
+              <a:t>   – Wang2025/Desmars 류: 바다 표면을 격자 위 높이값으로 표현 (예: 80×60 = 4,800 개 점)</a:t>
+            </a:r>
+          </a:p>
+          <a:p>
+            <a:pPr>
+              <a:spcAft>
+                <a:spcPts val="100"/>
+              </a:spcAft>
+            </a:pPr>
+            <a:r>
+              <a:rPr sz="1000">
+                <a:solidFill>
+                  <a:srgbClr val="1A1A2E"/>
+                </a:solidFill>
+                <a:latin typeface="Calibri"/>
+              </a:rPr>
+              <a:t>   – 관측은 LiDAR 점 50 개뿐 → 4,800 개 높이값 추정은 정보 부족 (under-determined)</a:t>
+            </a:r>
+          </a:p>
+          <a:p>
+            <a:pPr>
+              <a:spcAft>
+                <a:spcPts val="100"/>
+              </a:spcAft>
+            </a:pPr>
+            <a:r>
+              <a:rPr sz="1000">
+                <a:solidFill>
+                  <a:srgbClr val="1A1A2E"/>
+                </a:solidFill>
+                <a:latin typeface="Calibri"/>
+              </a:rPr>
+              <a:t>   – 격자 간격보다 짧은 파장의 파도는 표현 불가 (Nyquist 한계)</a:t>
+            </a:r>
+          </a:p>
+          <a:p>
+            <a:pPr>
+              <a:spcAft>
+                <a:spcPts val="100"/>
               </a:spcAft>
             </a:pPr>
             <a:r>
@@ -8726,11 +8796,11 @@
           <a:p>
             <a:pPr>
               <a:spcAft>
-                <a:spcPts val="200"/>
-              </a:spcAft>
-            </a:pPr>
-            <a:r>
-              <a:rPr sz="1100">
+                <a:spcPts val="100"/>
+              </a:spcAft>
+            </a:pPr>
+            <a:r>
+              <a:rPr sz="1000">
                 <a:solidFill>
                   <a:srgbClr val="1A1A2E"/>
                 </a:solidFill>
@@ -8739,16 +8809,16 @@
               <a:t>• </a:t>
             </a:r>
             <a:r>
-              <a:rPr sz="1100" b="1">
-                <a:solidFill>
-                  <a:srgbClr val="1A1A2E"/>
-                </a:solidFill>
-                <a:latin typeface="Calibri"/>
-              </a:rPr>
-              <a:t>발상의 전환 — wave 의 atomic parameter 로 직접 표현</a:t>
-            </a:r>
-            <a:r>
-              <a:rPr sz="1100" b="0">
+              <a:rPr sz="1000" b="1">
+                <a:solidFill>
+                  <a:srgbClr val="1A1A2E"/>
+                </a:solidFill>
+                <a:latin typeface="Calibri"/>
+              </a:rPr>
+              <a:t>발상 전환 — 파도 성분 한 개씩 직접 추정</a:t>
+            </a:r>
+            <a:r>
+              <a:rPr sz="1000" b="0">
                 <a:solidFill>
                   <a:srgbClr val="1A1A2E"/>
                 </a:solidFill>
@@ -8760,71 +8830,135 @@
           <a:p>
             <a:pPr>
               <a:spcAft>
-                <a:spcPts val="200"/>
-              </a:spcAft>
-            </a:pPr>
-            <a:r>
-              <a:rPr sz="1100">
-                <a:solidFill>
-                  <a:srgbClr val="1A1A2E"/>
-                </a:solidFill>
-                <a:latin typeface="Calibri"/>
-              </a:rPr>
-              <a:t>   – 실제 ocean wave 는 소수 (N=5–30) 의 plane wave 의 합으로 충분히 근사 (JONSWAP 분해)</a:t>
-            </a:r>
-          </a:p>
-          <a:p>
-            <a:pPr>
-              <a:spcAft>
-                <a:spcPts val="200"/>
-              </a:spcAft>
-            </a:pPr>
-            <a:r>
-              <a:rPr sz="1100">
-                <a:solidFill>
-                  <a:srgbClr val="1A1A2E"/>
-                </a:solidFill>
-                <a:latin typeface="Calibri"/>
-              </a:rPr>
-              <a:t>   – 각 plane wave 는 5 개 물리량: A (진폭), k_x, k_y (파수), ω (주파수), φ (위상)</a:t>
-            </a:r>
-          </a:p>
-          <a:p>
-            <a:pPr>
-              <a:spcAft>
-                <a:spcPts val="200"/>
-              </a:spcAft>
-            </a:pPr>
-            <a:r>
-              <a:rPr sz="1100">
-                <a:solidFill>
-                  <a:srgbClr val="1A1A2E"/>
-                </a:solidFill>
-                <a:latin typeface="Calibri"/>
-              </a:rPr>
-              <a:t>   – N=10 이면 파라미터 50 개 — 관측 50 개로 추정 가능</a:t>
-            </a:r>
-          </a:p>
-          <a:p>
-            <a:pPr>
-              <a:spcAft>
-                <a:spcPts val="200"/>
-              </a:spcAft>
-            </a:pPr>
-            <a:r>
-              <a:rPr sz="1100">
-                <a:solidFill>
-                  <a:srgbClr val="1A1A2E"/>
-                </a:solidFill>
-                <a:latin typeface="Calibri"/>
-              </a:rPr>
-              <a:t>   – Dispersion 으로 ω 가 k 에 의해 결정됨: 5N → 4N 자유도</a:t>
-            </a:r>
-          </a:p>
-          <a:p>
-            <a:pPr>
-              <a:spcAft>
-                <a:spcPts val="200"/>
+                <a:spcPts val="100"/>
+              </a:spcAft>
+            </a:pPr>
+            <a:r>
+              <a:rPr sz="1000">
+                <a:solidFill>
+                  <a:srgbClr val="1A1A2E"/>
+                </a:solidFill>
+                <a:latin typeface="Calibri"/>
+              </a:rPr>
+              <a:t>   – 실제 바다 파도는 보통 5–30 개의 sin 파 (성분) 의 합으로 충분히 표현 (JONSWAP 분해)</a:t>
+            </a:r>
+          </a:p>
+          <a:p>
+            <a:pPr>
+              <a:spcAft>
+                <a:spcPts val="100"/>
+              </a:spcAft>
+            </a:pPr>
+            <a:r>
+              <a:rPr sz="1000">
+                <a:solidFill>
+                  <a:srgbClr val="1A1A2E"/>
+                </a:solidFill>
+                <a:latin typeface="Calibri"/>
+              </a:rPr>
+              <a:t>   – 각 파도 성분은 5 개 숫자로 완전 결정:</a:t>
+            </a:r>
+          </a:p>
+          <a:p>
+            <a:pPr>
+              <a:spcAft>
+                <a:spcPts val="100"/>
+              </a:spcAft>
+            </a:pPr>
+            <a:r>
+              <a:rPr sz="1000">
+                <a:solidFill>
+                  <a:srgbClr val="1A1A2E"/>
+                </a:solidFill>
+                <a:latin typeface="Calibri"/>
+              </a:rPr>
+              <a:t>   – · 진폭 A (파고 크기)</a:t>
+            </a:r>
+          </a:p>
+          <a:p>
+            <a:pPr>
+              <a:spcAft>
+                <a:spcPts val="100"/>
+              </a:spcAft>
+            </a:pPr>
+            <a:r>
+              <a:rPr sz="1000">
+                <a:solidFill>
+                  <a:srgbClr val="1A1A2E"/>
+                </a:solidFill>
+                <a:latin typeface="Calibri"/>
+              </a:rPr>
+              <a:t>   – · 파수 (k_x, k_y) — 파장과 진행 방향 결정</a:t>
+            </a:r>
+          </a:p>
+          <a:p>
+            <a:pPr>
+              <a:spcAft>
+                <a:spcPts val="100"/>
+              </a:spcAft>
+            </a:pPr>
+            <a:r>
+              <a:rPr sz="1000">
+                <a:solidFill>
+                  <a:srgbClr val="1A1A2E"/>
+                </a:solidFill>
+                <a:latin typeface="Calibri"/>
+              </a:rPr>
+              <a:t>   – · 주파수 ω (= 2π / 주기 T) — 시간적 변화율</a:t>
+            </a:r>
+          </a:p>
+          <a:p>
+            <a:pPr>
+              <a:spcAft>
+                <a:spcPts val="100"/>
+              </a:spcAft>
+            </a:pPr>
+            <a:r>
+              <a:rPr sz="1000">
+                <a:solidFill>
+                  <a:srgbClr val="1A1A2E"/>
+                </a:solidFill>
+                <a:latin typeface="Calibri"/>
+              </a:rPr>
+              <a:t>   – · 위상 φ (시작 시점)</a:t>
+            </a:r>
+          </a:p>
+          <a:p>
+            <a:pPr>
+              <a:spcAft>
+                <a:spcPts val="100"/>
+              </a:spcAft>
+            </a:pPr>
+            <a:r>
+              <a:rPr sz="1000">
+                <a:solidFill>
+                  <a:srgbClr val="1A1A2E"/>
+                </a:solidFill>
+                <a:latin typeface="Calibri"/>
+              </a:rPr>
+              <a:t>   – 성분 N=10 이면 추정 변수 50 개 — 관측 50 개로 추정 가능</a:t>
+            </a:r>
+          </a:p>
+          <a:p>
+            <a:pPr>
+              <a:spcAft>
+                <a:spcPts val="100"/>
+              </a:spcAft>
+            </a:pPr>
+            <a:r>
+              <a:rPr sz="1000">
+                <a:solidFill>
+                  <a:srgbClr val="1A1A2E"/>
+                </a:solidFill>
+                <a:latin typeface="Calibri"/>
+              </a:rPr>
+              <a:t>   – 분산 관계 ω = √(g·|k|·tanh(|k|·d)) 를 강제 → ω 는 k 에서 자동 → 변수 5N → 4N</a:t>
+            </a:r>
+          </a:p>
+          <a:p>
+            <a:pPr>
+              <a:spcAft>
+                <a:spcPts val="100"/>
               </a:spcAft>
             </a:pPr>
             <a:r>
@@ -8835,11 +8969,11 @@
           <a:p>
             <a:pPr>
               <a:spcAft>
-                <a:spcPts val="200"/>
-              </a:spcAft>
-            </a:pPr>
-            <a:r>
-              <a:rPr sz="1100">
+                <a:spcPts val="100"/>
+              </a:spcAft>
+            </a:pPr>
+            <a:r>
+              <a:rPr sz="1000">
                 <a:solidFill>
                   <a:srgbClr val="1A1A2E"/>
                 </a:solidFill>
@@ -8848,16 +8982,16 @@
               <a:t>• </a:t>
             </a:r>
             <a:r>
-              <a:rPr sz="1100" b="1">
-                <a:solidFill>
-                  <a:srgbClr val="1A1A2E"/>
-                </a:solidFill>
-                <a:latin typeface="Calibri"/>
-              </a:rPr>
-              <a:t>3D Gaussian Splatting (3DGS) 의 영감</a:t>
-            </a:r>
-            <a:r>
-              <a:rPr sz="1100" b="0">
+              <a:rPr sz="1000" b="1">
+                <a:solidFill>
+                  <a:srgbClr val="1A1A2E"/>
+                </a:solidFill>
+                <a:latin typeface="Calibri"/>
+              </a:rPr>
+              <a:t>3D Gaussian Splatting (3DGS) 와의 영감</a:t>
+            </a:r>
+            <a:r>
+              <a:rPr sz="1000" b="0">
                 <a:solidFill>
                   <a:srgbClr val="1A1A2E"/>
                 </a:solidFill>
@@ -8869,55 +9003,55 @@
           <a:p>
             <a:pPr>
               <a:spcAft>
-                <a:spcPts val="200"/>
-              </a:spcAft>
-            </a:pPr>
-            <a:r>
-              <a:rPr sz="1100">
-                <a:solidFill>
-                  <a:srgbClr val="1A1A2E"/>
-                </a:solidFill>
-                <a:latin typeface="Calibri"/>
-              </a:rPr>
-              <a:t>   – 3DGS: 3D 공간을 명시적 Gaussian 원소들의 합으로 표현, 각 원소를 직접 최적화</a:t>
-            </a:r>
-          </a:p>
-          <a:p>
-            <a:pPr>
-              <a:spcAft>
-                <a:spcPts val="200"/>
-              </a:spcAft>
-            </a:pPr>
-            <a:r>
-              <a:rPr sz="1100">
-                <a:solidFill>
-                  <a:srgbClr val="1A1A2E"/>
-                </a:solidFill>
-                <a:latin typeface="Calibri"/>
-              </a:rPr>
-              <a:t>   – WaveSplat: spectrum 공간 (k, ω) 을 명시적 plane wave 원소들의 합으로 표현</a:t>
-            </a:r>
-          </a:p>
-          <a:p>
-            <a:pPr>
-              <a:spcAft>
-                <a:spcPts val="200"/>
-              </a:spcAft>
-            </a:pPr>
-            <a:r>
-              <a:rPr sz="1100">
-                <a:solidFill>
-                  <a:srgbClr val="1A1A2E"/>
-                </a:solidFill>
-                <a:latin typeface="Calibri"/>
-              </a:rPr>
-              <a:t>   – → 핵심 발상 동일: 격자/볼륨 대신 explicit parametric form 으로 직접 최적화</a:t>
-            </a:r>
-          </a:p>
-          <a:p>
-            <a:pPr>
-              <a:spcAft>
-                <a:spcPts val="200"/>
+                <a:spcPts val="100"/>
+              </a:spcAft>
+            </a:pPr>
+            <a:r>
+              <a:rPr sz="1000">
+                <a:solidFill>
+                  <a:srgbClr val="1A1A2E"/>
+                </a:solidFill>
+                <a:latin typeface="Calibri"/>
+              </a:rPr>
+              <a:t>   – 3DGS (Kerbl 2023, SIGGRAPH): 3D 공간을 voxel/NN 대신 'Gaussian 원소 여러 개의 합' 으로 표현, 각 원소를 직접 최적화</a:t>
+            </a:r>
+          </a:p>
+          <a:p>
+            <a:pPr>
+              <a:spcAft>
+                <a:spcPts val="100"/>
+              </a:spcAft>
+            </a:pPr>
+            <a:r>
+              <a:rPr sz="1000">
+                <a:solidFill>
+                  <a:srgbClr val="1A1A2E"/>
+                </a:solidFill>
+                <a:latin typeface="Calibri"/>
+              </a:rPr>
+              <a:t>   – WaveSplat: 바다 파도를 격자 대신 'sin 파 성분 여러 개의 합' 으로 표현, 각 성분을 직접 최적화</a:t>
+            </a:r>
+          </a:p>
+          <a:p>
+            <a:pPr>
+              <a:spcAft>
+                <a:spcPts val="100"/>
+              </a:spcAft>
+            </a:pPr>
+            <a:r>
+              <a:rPr sz="1000">
+                <a:solidFill>
+                  <a:srgbClr val="1A1A2E"/>
+                </a:solidFill>
+                <a:latin typeface="Calibri"/>
+              </a:rPr>
+              <a:t>   – → 같은 철학 (격자 없이 명시적 원소 직접 최적화), 다른 영역 (3DGS=영상, WaveSplat=파도)</a:t>
+            </a:r>
+          </a:p>
+          <a:p>
+            <a:pPr>
+              <a:spcAft>
+                <a:spcPts val="100"/>
               </a:spcAft>
             </a:pPr>
             <a:r>
@@ -8928,11 +9062,11 @@
           <a:p>
             <a:pPr>
               <a:spcAft>
-                <a:spcPts val="200"/>
-              </a:spcAft>
-            </a:pPr>
-            <a:r>
-              <a:rPr sz="1100">
+                <a:spcPts val="100"/>
+              </a:spcAft>
+            </a:pPr>
+            <a:r>
+              <a:rPr sz="1000">
                 <a:solidFill>
                   <a:srgbClr val="1A1A2E"/>
                 </a:solidFill>
@@ -8941,7 +9075,7 @@
               <a:t>• </a:t>
             </a:r>
             <a:r>
-              <a:rPr sz="1100" b="1">
+              <a:rPr sz="1000" b="1">
                 <a:solidFill>
                   <a:srgbClr val="1A1A2E"/>
                 </a:solidFill>
@@ -8950,7 +9084,7 @@
               <a:t>'Splat' 명칭의 의미</a:t>
             </a:r>
             <a:r>
-              <a:rPr sz="1100" b="0">
+              <a:rPr sz="1000" b="0">
                 <a:solidFill>
                   <a:srgbClr val="1A1A2E"/>
                 </a:solidFill>
@@ -8962,76 +9096,33 @@
           <a:p>
             <a:pPr>
               <a:spcAft>
-                <a:spcPts val="200"/>
-              </a:spcAft>
-            </a:pPr>
-            <a:r>
-              <a:rPr sz="1100">
-                <a:solidFill>
-                  <a:srgbClr val="1A1A2E"/>
-                </a:solidFill>
-                <a:latin typeface="Calibri"/>
-              </a:rPr>
-              <a:t>   – 3DGS 처럼 명시적 원소 (component) 를 직접 최적화하되,</a:t>
-            </a:r>
-          </a:p>
-          <a:p>
-            <a:pPr>
-              <a:spcAft>
-                <a:spcPts val="200"/>
-              </a:spcAft>
-            </a:pPr>
-            <a:r>
-              <a:rPr sz="1100">
-                <a:solidFill>
-                  <a:srgbClr val="1A1A2E"/>
-                </a:solidFill>
-                <a:latin typeface="Calibri"/>
-              </a:rPr>
-              <a:t>   – </a:t>
-            </a:r>
-            <a:r>
-              <a:rPr sz="1100" b="0">
-                <a:solidFill>
-                  <a:srgbClr val="1A1A2E"/>
-                </a:solidFill>
-                <a:latin typeface="Calibri"/>
-              </a:rPr>
-              <a:t>격자/볼륨 대신 </a:t>
-            </a:r>
-            <a:r>
-              <a:rPr sz="1100" b="1">
-                <a:solidFill>
-                  <a:srgbClr val="1A1A2E"/>
-                </a:solidFill>
-                <a:latin typeface="Calibri"/>
-              </a:rPr>
-              <a:t>spectrum 공간 (k_x, k_y, ω)</a:t>
-            </a:r>
-            <a:r>
-              <a:rPr sz="1100" b="0">
-                <a:solidFill>
-                  <a:srgbClr val="1A1A2E"/>
-                </a:solidFill>
-                <a:latin typeface="Calibri"/>
-              </a:rPr>
-              <a:t> 에 각 원소가 'splat' 됨</a:t>
-            </a:r>
-          </a:p>
-          <a:p>
-            <a:pPr>
-              <a:spcAft>
-                <a:spcPts val="200"/>
-              </a:spcAft>
-            </a:pPr>
-            <a:r>
-              <a:rPr sz="1100">
-                <a:solidFill>
-                  <a:srgbClr val="1A1A2E"/>
-                </a:solidFill>
-                <a:latin typeface="Calibri"/>
-              </a:rPr>
-              <a:t>   – → Grid-free + Explicit parametric form (3DGS 와 같은 철학, 다른 도메인)</a:t>
+                <a:spcPts val="100"/>
+              </a:spcAft>
+            </a:pPr>
+            <a:r>
+              <a:rPr sz="1000">
+                <a:solidFill>
+                  <a:srgbClr val="1A1A2E"/>
+                </a:solidFill>
+                <a:latin typeface="Calibri"/>
+              </a:rPr>
+              <a:t>   – '여러 명시적 원소를 위치시키고 직접 최적화' 한다는 점에서 3DGS 와 발상 동일</a:t>
+            </a:r>
+          </a:p>
+          <a:p>
+            <a:pPr>
+              <a:spcAft>
+                <a:spcPts val="100"/>
+              </a:spcAft>
+            </a:pPr>
+            <a:r>
+              <a:rPr sz="1000">
+                <a:solidFill>
+                  <a:srgbClr val="1A1A2E"/>
+                </a:solidFill>
+                <a:latin typeface="Calibri"/>
+              </a:rPr>
+              <a:t>   – 단 graphics rendering 은 아님 — paper 작성 시 명칭 변경 검토 가능 (현재 working name)</a:t>
             </a:r>
           </a:p>
         </p:txBody>
@@ -9052,8 +9143,8 @@
         </p:blipFill>
         <p:spPr>
           <a:xfrm>
-            <a:off x="8412480" y="1828800"/>
-            <a:ext cx="3566160" cy="1467786"/>
+            <a:off x="8503920" y="1828800"/>
+            <a:ext cx="3474720" cy="1430150"/>
           </a:xfrm>
           <a:prstGeom prst="rect">
             <a:avLst/>
@@ -10823,7 +10914,7 @@
               </a:defRPr>
             </a:pPr>
             <a:r>
-              <a:t>Ground Truth vs WaveSplat reconstruction — 실제 결과</a:t>
+              <a:t>Ground Truth vs WaveSplat 재구성 — 실제 결과 한 케이스</a:t>
             </a:r>
           </a:p>
         </p:txBody>
@@ -10859,7 +10950,7 @@
               </a:defRPr>
             </a:pPr>
             <a:r>
-              <a:t>BF3/BF4/BF5 episode 의 wave field 재구성: 좌측 GT, 중앙 WaveSplat, 우측 ETKF</a:t>
+              <a:t>한 episode 의 한 시점 — 좌측 GT, 중앙 WaveSplat 추정, 우측 오차 (Error = GT − WaveSplat)</a:t>
             </a:r>
           </a:p>
         </p:txBody>
@@ -10931,7 +11022,7 @@
                 </a:solidFill>
                 <a:latin typeface="Calibri"/>
               </a:rPr>
-              <a:t>좌</a:t>
+              <a:t>좌 (GT)</a:t>
             </a:r>
             <a:r>
               <a:rPr sz="1100" b="0">
@@ -10940,7 +11031,7 @@
                 </a:solidFill>
                 <a:latin typeface="Calibri"/>
               </a:rPr>
-              <a:t>: Ground Truth η(x, y, t=15s) — 50×50 격자 위 wave 표면 (참값)</a:t>
+              <a:t>: Ground Truth η(x, y, t) — 50×50 격자 위 실제 파도 표면 (참값)</a:t>
             </a:r>
           </a:p>
           <a:p>
@@ -10965,7 +11056,7 @@
                 </a:solidFill>
                 <a:latin typeface="Calibri"/>
               </a:rPr>
-              <a:t>중</a:t>
+              <a:t>중 (WaveSplat)</a:t>
             </a:r>
             <a:r>
               <a:rPr sz="1100" b="0">
@@ -10974,7 +11065,7 @@
                 </a:solidFill>
                 <a:latin typeface="Calibri"/>
               </a:rPr>
-              <a:t>: WaveSplat reconstruction — N component 의 합 — 격자 외 영역까지 자연스럽게 표현</a:t>
+              <a:t>: WaveSplat 재구성 — 추정된 N 개 sin 파 성분의 합으로 다시 만든 파도 표면</a:t>
             </a:r>
           </a:p>
           <a:p>
@@ -10999,7 +11090,7 @@
                 </a:solidFill>
                 <a:latin typeface="Calibri"/>
               </a:rPr>
-              <a:t>우</a:t>
+              <a:t>우 (Error)</a:t>
             </a:r>
             <a:r>
               <a:rPr sz="1100" b="0">
@@ -11008,7 +11099,7 @@
                 </a:solidFill>
                 <a:latin typeface="Calibri"/>
               </a:rPr>
-              <a:t>: ETKF reconstruction — 80×60 격자 위 추정 — 격자 해상도 한계로 미세 wave 손실</a:t>
+              <a:t>: 오차 = GT − WaveSplat — 같은 색 스케일로 표시 (잔여 차이가 작을수록 추정 정확)</a:t>
             </a:r>
           </a:p>
           <a:p>
@@ -11024,7 +11115,7 @@
                 </a:solidFill>
                 <a:latin typeface="Calibri"/>
               </a:rPr>
-              <a:t>• 각 panel 의 색상: blue (음의 변위, trough) → white (수면) → red (양의 변위, crest)</a:t>
+              <a:t>• 색상 의미: blue (음의 변위, trough) → white (수면) → red (양의 변위, crest)</a:t>
             </a:r>
           </a:p>
         </p:txBody>
@@ -11060,7 +11151,7 @@
               </a:defRPr>
             </a:pPr>
             <a:r>
-              <a:t>🎬 paper/figures/demo_wavesplat.gif — animation 버전 (PowerPoint 에서 GIF 로 교체 가능)</a:t>
+              <a:t>📂 paper/figures/demo_wavesplat.gif (animation), fig8_qualitative.pdf (다른 case 들) 참조 · 대표 case 모음은 Appendix C</a:t>
             </a:r>
           </a:p>
         </p:txBody>
@@ -18380,6 +18471,236 @@
 </p:sld>
 </file>
 
+<file path=ppt/slides/slide24.xml><?xml version="1.0" encoding="utf-8"?>
+<p:sld xmlns:a="http://schemas.openxmlformats.org/drawingml/2006/main" xmlns:p="http://schemas.openxmlformats.org/presentationml/2006/main" xmlns:r="http://schemas.openxmlformats.org/officeDocument/2006/relationships">
+  <p:cSld>
+    <p:bg>
+      <p:bgPr>
+        <a:solidFill>
+          <a:srgbClr val="FFFFFF"/>
+        </a:solidFill>
+        <a:effectLst/>
+      </p:bgPr>
+    </p:bg>
+    <p:spTree>
+      <p:nvGrpSpPr>
+        <p:cNvPr id="1" name=""/>
+        <p:cNvGrpSpPr/>
+        <p:nvPr/>
+      </p:nvGrpSpPr>
+      <p:grpSpPr/>
+      <p:sp>
+        <p:nvSpPr>
+          <p:cNvPr id="2" name="TextBox 1"/>
+          <p:cNvSpPr txBox="1"/>
+          <p:nvPr/>
+        </p:nvSpPr>
+        <p:spPr>
+          <a:xfrm>
+            <a:off x="457200" y="182880"/>
+            <a:ext cx="4572000" cy="274320"/>
+          </a:xfrm>
+          <a:prstGeom prst="rect">
+            <a:avLst/>
+          </a:prstGeom>
+          <a:noFill/>
+        </p:spPr>
+        <p:txBody>
+          <a:bodyPr wrap="square">
+            <a:spAutoFit/>
+          </a:bodyPr>
+          <a:lstStyle/>
+          <a:p>
+            <a:pPr algn="l">
+              <a:defRPr sz="1100" b="1" i="0">
+                <a:solidFill>
+                  <a:srgbClr val="666666"/>
+                </a:solidFill>
+                <a:latin typeface="Calibri"/>
+              </a:defRPr>
+            </a:pPr>
+            <a:r>
+              <a:t>Appendix C · 대표 case 모음 (GT vs WaveSplat vs ETKF)</a:t>
+            </a:r>
+          </a:p>
+        </p:txBody>
+      </p:sp>
+      <p:sp>
+        <p:nvSpPr>
+          <p:cNvPr id="3" name="TextBox 2"/>
+          <p:cNvSpPr txBox="1"/>
+          <p:nvPr/>
+        </p:nvSpPr>
+        <p:spPr>
+          <a:xfrm>
+            <a:off x="457200" y="502920"/>
+            <a:ext cx="11247120" cy="640080"/>
+          </a:xfrm>
+          <a:prstGeom prst="rect">
+            <a:avLst/>
+          </a:prstGeom>
+          <a:noFill/>
+        </p:spPr>
+        <p:txBody>
+          <a:bodyPr wrap="square">
+            <a:spAutoFit/>
+          </a:bodyPr>
+          <a:lstStyle/>
+          <a:p>
+            <a:pPr algn="l">
+              <a:defRPr sz="2200" b="1" i="0">
+                <a:solidFill>
+                  <a:srgbClr val="1A1A2E"/>
+                </a:solidFill>
+                <a:latin typeface="Calibri"/>
+              </a:defRPr>
+            </a:pPr>
+            <a:r>
+              <a:t>Appendix C — 다양한 sea state × N 조합의 대표 결과</a:t>
+            </a:r>
+          </a:p>
+        </p:txBody>
+      </p:sp>
+      <p:sp>
+        <p:nvSpPr>
+          <p:cNvPr id="4" name="TextBox 3"/>
+          <p:cNvSpPr txBox="1"/>
+          <p:nvPr/>
+        </p:nvSpPr>
+        <p:spPr>
+          <a:xfrm>
+            <a:off x="457200" y="1143000"/>
+            <a:ext cx="11247120" cy="457200"/>
+          </a:xfrm>
+          <a:prstGeom prst="rect">
+            <a:avLst/>
+          </a:prstGeom>
+          <a:noFill/>
+        </p:spPr>
+        <p:txBody>
+          <a:bodyPr wrap="square">
+            <a:spAutoFit/>
+          </a:bodyPr>
+          <a:lstStyle/>
+          <a:p>
+            <a:pPr algn="l">
+              <a:defRPr sz="1100" b="0" i="1">
+                <a:solidFill>
+                  <a:srgbClr val="666666"/>
+                </a:solidFill>
+                <a:latin typeface="Calibri"/>
+              </a:defRPr>
+            </a:pPr>
+            <a:r>
+              <a:t>BF3 2-comp (단순) → BF4 15-comp (중간) → BF5 30-comp (복잡) — 한 시점 비교</a:t>
+            </a:r>
+          </a:p>
+        </p:txBody>
+      </p:sp>
+      <p:pic>
+        <p:nvPicPr>
+          <p:cNvPr id="5" name="Picture 4" descr="fig8_qualitative-1.png"/>
+          <p:cNvPicPr>
+            <a:picLocks noChangeAspect="1"/>
+          </p:cNvPicPr>
+          <p:nvPr/>
+        </p:nvPicPr>
+        <p:blipFill>
+          <a:blip r:embed="rId2"/>
+          <a:stretch>
+            <a:fillRect/>
+          </a:stretch>
+        </p:blipFill>
+        <p:spPr>
+          <a:xfrm>
+            <a:off x="365760" y="1554480"/>
+            <a:ext cx="11430000" cy="7469038"/>
+          </a:xfrm>
+          <a:prstGeom prst="rect">
+            <a:avLst/>
+          </a:prstGeom>
+        </p:spPr>
+      </p:pic>
+      <p:sp>
+        <p:nvSpPr>
+          <p:cNvPr id="6" name="TextBox 5"/>
+          <p:cNvSpPr txBox="1"/>
+          <p:nvPr/>
+        </p:nvSpPr>
+        <p:spPr>
+          <a:xfrm>
+            <a:off x="457200" y="6400800"/>
+            <a:ext cx="11247120" cy="365760"/>
+          </a:xfrm>
+          <a:prstGeom prst="rect">
+            <a:avLst/>
+          </a:prstGeom>
+          <a:noFill/>
+        </p:spPr>
+        <p:txBody>
+          <a:bodyPr wrap="square">
+            <a:spAutoFit/>
+          </a:bodyPr>
+          <a:lstStyle/>
+          <a:p>
+            <a:pPr algn="l">
+              <a:defRPr sz="1000" b="0" i="1">
+                <a:solidFill>
+                  <a:srgbClr val="666666"/>
+                </a:solidFill>
+                <a:latin typeface="Calibri"/>
+              </a:defRPr>
+            </a:pPr>
+            <a:r>
+              <a:t>Source: paper/figures/fig8_qualitative.pdf — 행 마다 다른 episode, 열 마다 GT / WaveSplat / ETKF / GPR. 단순 wave 일수록 WaveSplat 우위.</a:t>
+            </a:r>
+          </a:p>
+        </p:txBody>
+      </p:sp>
+      <p:sp>
+        <p:nvSpPr>
+          <p:cNvPr id="7" name="TextBox 6"/>
+          <p:cNvSpPr txBox="1"/>
+          <p:nvPr/>
+        </p:nvSpPr>
+        <p:spPr>
+          <a:xfrm>
+            <a:off x="11430000" y="6446520"/>
+            <a:ext cx="640080" cy="320040"/>
+          </a:xfrm>
+          <a:prstGeom prst="rect">
+            <a:avLst/>
+          </a:prstGeom>
+          <a:noFill/>
+        </p:spPr>
+        <p:txBody>
+          <a:bodyPr wrap="square">
+            <a:spAutoFit/>
+          </a:bodyPr>
+          <a:lstStyle/>
+          <a:p>
+            <a:pPr algn="r">
+              <a:defRPr sz="1000" b="0" i="0">
+                <a:solidFill>
+                  <a:srgbClr val="666666"/>
+                </a:solidFill>
+                <a:latin typeface="Calibri"/>
+              </a:defRPr>
+            </a:pPr>
+            <a:r>
+              <a:t>C</a:t>
+            </a:r>
+          </a:p>
+        </p:txBody>
+      </p:sp>
+    </p:spTree>
+  </p:cSld>
+  <p:clrMapOvr>
+    <a:masterClrMapping/>
+  </p:clrMapOvr>
+</p:sld>
+</file>
+
 <file path=ppt/slides/slide3.xml><?xml version="1.0" encoding="utf-8"?>
 <p:sld xmlns:a="http://schemas.openxmlformats.org/drawingml/2006/main" xmlns:p="http://schemas.openxmlformats.org/presentationml/2006/main" xmlns:r="http://schemas.openxmlformats.org/officeDocument/2006/relationships">
   <p:cSld>
@@ -22858,7 +23179,7 @@
               </a:defRPr>
             </a:pPr>
             <a:r>
-              <a:t>Part 2 · WaveSim — LiDAR 모사 (1/2: 어떻게)</a:t>
+              <a:t>Part 2 · WaveSim (1/2): 파도 + LiDAR 시뮬레이션</a:t>
             </a:r>
           </a:p>
         </p:txBody>
@@ -22894,7 +23215,7 @@
               </a:defRPr>
             </a:pPr>
             <a:r>
-              <a:t>WaveSim — LiDAR 센서를 어떻게 시뮬레이션했나</a:t>
+              <a:t>WaveSim — 파도와 LiDAR 를 어떻게 모사했나</a:t>
             </a:r>
           </a:p>
         </p:txBody>
@@ -22930,7 +23251,7 @@
               </a:defRPr>
             </a:pPr>
             <a:r>
-              <a:t>Gerstner wave (JONSWAP 분포) + ray tracing + vessel motion 분리 처리</a:t>
+              <a:t>각 구성요소의 물리적 합당성 + 코드 검증</a:t>
             </a:r>
           </a:p>
         </p:txBody>
@@ -22943,8 +23264,8 @@
         </p:nvSpPr>
         <p:spPr>
           <a:xfrm>
-            <a:off x="457200" y="1691640"/>
-            <a:ext cx="7772400" cy="4846320"/>
+            <a:off x="365760" y="1691640"/>
+            <a:ext cx="7955279" cy="4846320"/>
           </a:xfrm>
           <a:prstGeom prst="rect">
             <a:avLst/>
@@ -22959,11 +23280,11 @@
           <a:p>
             <a:pPr>
               <a:spcAft>
-                <a:spcPts val="200"/>
-              </a:spcAft>
-            </a:pPr>
-            <a:r>
-              <a:rPr sz="1000">
+                <a:spcPts val="100"/>
+              </a:spcAft>
+            </a:pPr>
+            <a:r>
+              <a:rPr sz="900">
                 <a:solidFill>
                   <a:srgbClr val="1A1A2E"/>
                 </a:solidFill>
@@ -22972,16 +23293,16 @@
               <a:t>• </a:t>
             </a:r>
             <a:r>
-              <a:rPr sz="1000" b="1">
-                <a:solidFill>
-                  <a:srgbClr val="1A1A2E"/>
-                </a:solidFill>
-                <a:latin typeface="Calibri"/>
-              </a:rPr>
-              <a:t>수면 model — Gerstner wave (회전 정확해, Tessendorf 2001 식)</a:t>
-            </a:r>
-            <a:r>
-              <a:rPr sz="1000" b="0">
+              <a:rPr sz="900" b="1">
+                <a:solidFill>
+                  <a:srgbClr val="1A1A2E"/>
+                </a:solidFill>
+                <a:latin typeface="Calibri"/>
+              </a:rPr>
+              <a:t>파도 모델 — Gerstner 파 + JONSWAP 스펙트럼</a:t>
+            </a:r>
+            <a:r>
+              <a:rPr sz="900" b="0">
                 <a:solidFill>
                   <a:srgbClr val="1A1A2E"/>
                 </a:solidFill>
@@ -22993,102 +23314,86 @@
           <a:p>
             <a:pPr>
               <a:spcAft>
-                <a:spcPts val="200"/>
-              </a:spcAft>
-            </a:pPr>
-            <a:r>
-              <a:rPr sz="1000">
-                <a:solidFill>
-                  <a:srgbClr val="1A1A2E"/>
-                </a:solidFill>
-                <a:latin typeface="Calibri"/>
-              </a:rPr>
-              <a:t>   – 단순 sinusoidal (LWT) 가 아니라 Gerstner — 입자가 원/타원 궤적으로 회전</a:t>
-            </a:r>
-          </a:p>
-          <a:p>
-            <a:pPr>
-              <a:spcAft>
-                <a:spcPts val="200"/>
-              </a:spcAft>
-            </a:pPr>
-            <a:r>
-              <a:rPr sz="1000">
-                <a:solidFill>
-                  <a:srgbClr val="1A1A2E"/>
-                </a:solidFill>
-                <a:latin typeface="Calibri"/>
-              </a:rPr>
-              <a:t>   – η(x, y, t) = Σ_n A_n cos(k_xn·x + k_yn·y − ω_n·t + φ_n) (수면 변위)</a:t>
-            </a:r>
-          </a:p>
-          <a:p>
-            <a:pPr>
-              <a:spcAft>
-                <a:spcPts val="200"/>
-              </a:spcAft>
-            </a:pPr>
-            <a:r>
-              <a:rPr sz="1000">
-                <a:solidFill>
-                  <a:srgbClr val="1A1A2E"/>
-                </a:solidFill>
-                <a:latin typeface="Calibri"/>
-              </a:rPr>
-              <a:t>   – 추가 변위: x, y 방향으로 −Q_n·A_n·(k/|k|)·sin(...) (Gerstner 특성, 비선형)</a:t>
-            </a:r>
-          </a:p>
-          <a:p>
-            <a:pPr>
-              <a:spcAft>
-                <a:spcPts val="200"/>
-              </a:spcAft>
-            </a:pPr>
-            <a:r>
-              <a:rPr sz="1000">
-                <a:solidFill>
-                  <a:srgbClr val="1A1A2E"/>
-                </a:solidFill>
-                <a:latin typeface="Calibri"/>
-              </a:rPr>
-              <a:t>   – Q ∈ [0, 1] = steepness — Q=0 이면 LWT, Q&gt;0 이면 Stokes-1 류 비선형</a:t>
-            </a:r>
-          </a:p>
-          <a:p>
-            <a:pPr>
-              <a:spcAft>
-                <a:spcPts val="200"/>
-              </a:spcAft>
-            </a:pPr>
-            <a:r>
-              <a:rPr sz="1000">
-                <a:solidFill>
-                  <a:srgbClr val="1A1A2E"/>
-                </a:solidFill>
-                <a:latin typeface="Calibri"/>
-              </a:rPr>
-              <a:t>   – Dispersion: ω_n = √(g·|k_n|·tanh(|k_n|·d))</a:t>
-            </a:r>
-          </a:p>
-          <a:p>
-            <a:pPr>
-              <a:spcAft>
-                <a:spcPts val="200"/>
-              </a:spcAft>
-            </a:pPr>
-            <a:r>
-              <a:rPr sz="500"/>
+                <a:spcPts val="100"/>
+              </a:spcAft>
+            </a:pPr>
+            <a:r>
+              <a:rPr sz="900">
+                <a:solidFill>
+                  <a:srgbClr val="1A1A2E"/>
+                </a:solidFill>
+                <a:latin typeface="Calibri"/>
+              </a:rPr>
+              <a:t>   – η(x, y, t) = Σ_n A_n cos(k_xn·x + k_yn·y − ω_n·t + φ_n) + Gerstner 추가 변위</a:t>
+            </a:r>
+          </a:p>
+          <a:p>
+            <a:pPr>
+              <a:spcAft>
+                <a:spcPts val="100"/>
+              </a:spcAft>
+            </a:pPr>
+            <a:r>
+              <a:rPr sz="900">
+                <a:solidFill>
+                  <a:srgbClr val="1A1A2E"/>
+                </a:solidFill>
+                <a:latin typeface="Calibri"/>
+              </a:rPr>
+              <a:t>   – Gerstner 1802 의 회전 정확해 — 입자가 원/타원 궤적으로 회전 (Q=0 → 선형, Q&gt;0 → 약비선형)</a:t>
+            </a:r>
+          </a:p>
+          <a:p>
+            <a:pPr>
+              <a:spcAft>
+                <a:spcPts val="100"/>
+              </a:spcAft>
+            </a:pPr>
+            <a:r>
+              <a:rPr sz="900">
+                <a:solidFill>
+                  <a:srgbClr val="1A1A2E"/>
+                </a:solidFill>
+                <a:latin typeface="Calibri"/>
+              </a:rPr>
+              <a:t>   – → 합당성: Tessendorf 2001 SIGGRAPH ocean 표준, Dean &amp; Dalrymple 1991 교과서</a:t>
+            </a:r>
+          </a:p>
+          <a:p>
+            <a:pPr>
+              <a:spcAft>
+                <a:spcPts val="100"/>
+              </a:spcAft>
+            </a:pPr>
+            <a:r>
+              <a:rPr sz="900">
+                <a:solidFill>
+                  <a:srgbClr val="1A1A2E"/>
+                </a:solidFill>
+                <a:latin typeface="Calibri"/>
+              </a:rPr>
+              <a:t>   – → 검증: Q 제약 (Σ Q·ω·A ≤ 1, 입자 궤적 자체 교차 방지) 의 unit test 통과</a:t>
+            </a:r>
+          </a:p>
+          <a:p>
+            <a:pPr>
+              <a:spcAft>
+                <a:spcPts val="100"/>
+              </a:spcAft>
+            </a:pPr>
+            <a:r>
+              <a:rPr sz="400"/>
               <a:t> </a:t>
             </a:r>
           </a:p>
           <a:p>
             <a:pPr>
               <a:spcAft>
-                <a:spcPts val="200"/>
-              </a:spcAft>
-            </a:pPr>
-            <a:r>
-              <a:rPr sz="1000">
+                <a:spcPts val="100"/>
+              </a:spcAft>
+            </a:pPr>
+            <a:r>
+              <a:rPr sz="900">
                 <a:solidFill>
                   <a:srgbClr val="1A1A2E"/>
                 </a:solidFill>
@@ -23097,16 +23402,16 @@
               <a:t>• </a:t>
             </a:r>
             <a:r>
-              <a:rPr sz="1000" b="1">
-                <a:solidFill>
-                  <a:srgbClr val="1A1A2E"/>
-                </a:solidFill>
-                <a:latin typeface="Calibri"/>
-              </a:rPr>
-              <a:t>Spectrum — JONSWAP (Hasselmann 1973, 북해 표준)</a:t>
-            </a:r>
-            <a:r>
-              <a:rPr sz="1000" b="0">
+              <a:rPr sz="900" b="1">
+                <a:solidFill>
+                  <a:srgbClr val="1A1A2E"/>
+                </a:solidFill>
+                <a:latin typeface="Calibri"/>
+              </a:rPr>
+              <a:t>스펙트럼 — JONSWAP (Hasselmann et al. 1973)</a:t>
+            </a:r>
+            <a:r>
+              <a:rPr sz="900" b="0">
                 <a:solidFill>
                   <a:srgbClr val="1A1A2E"/>
                 </a:solidFill>
@@ -23118,54 +23423,70 @@
           <a:p>
             <a:pPr>
               <a:spcAft>
-                <a:spcPts val="200"/>
-              </a:spcAft>
-            </a:pPr>
-            <a:r>
-              <a:rPr sz="1000">
-                <a:solidFill>
-                  <a:srgbClr val="1A1A2E"/>
-                </a:solidFill>
-                <a:latin typeface="Calibri"/>
-              </a:rPr>
-              <a:t>   – S(ω) = α·g²·ω⁻⁵·exp(−5/4·(ω_p/ω)⁴) · γ^r — H_s, T_p, γ 로 결정</a:t>
-            </a:r>
-          </a:p>
-          <a:p>
-            <a:pPr>
-              <a:spcAft>
-                <a:spcPts val="200"/>
-              </a:spcAft>
-            </a:pPr>
-            <a:r>
-              <a:rPr sz="1000">
-                <a:solidFill>
-                  <a:srgbClr val="1A1A2E"/>
-                </a:solidFill>
-                <a:latin typeface="Calibri"/>
-              </a:rPr>
-              <a:t>   – N 개 component 의 (A_n, ω_n, k_n) 가 이 spectrum 으로부터 sampling</a:t>
-            </a:r>
-          </a:p>
-          <a:p>
-            <a:pPr>
-              <a:spcAft>
-                <a:spcPts val="200"/>
-              </a:spcAft>
-            </a:pPr>
-            <a:r>
-              <a:rPr sz="500"/>
+                <a:spcPts val="100"/>
+              </a:spcAft>
+            </a:pPr>
+            <a:r>
+              <a:rPr sz="900">
+                <a:solidFill>
+                  <a:srgbClr val="1A1A2E"/>
+                </a:solidFill>
+                <a:latin typeface="Calibri"/>
+              </a:rPr>
+              <a:t>   – S(ω) = α·g²·ω⁻⁵·exp(−5/4·(ω_p/ω)⁴) · γ^r — 북해 측정 데이터 기반</a:t>
+            </a:r>
+          </a:p>
+          <a:p>
+            <a:pPr>
+              <a:spcAft>
+                <a:spcPts val="100"/>
+              </a:spcAft>
+            </a:pPr>
+            <a:r>
+              <a:rPr sz="900">
+                <a:solidFill>
+                  <a:srgbClr val="1A1A2E"/>
+                </a:solidFill>
+                <a:latin typeface="Calibri"/>
+              </a:rPr>
+              <a:t>   – 입력: H_s (유의파고), T_p (첨두주기), γ (peak factor)</a:t>
+            </a:r>
+          </a:p>
+          <a:p>
+            <a:pPr>
+              <a:spcAft>
+                <a:spcPts val="100"/>
+              </a:spcAft>
+            </a:pPr>
+            <a:r>
+              <a:rPr sz="900">
+                <a:solidFill>
+                  <a:srgbClr val="1A1A2E"/>
+                </a:solidFill>
+                <a:latin typeface="Calibri"/>
+              </a:rPr>
+              <a:t>   – → 합당성: 해양공학 표준 (ITTC, IACS 채택). 파도 성분 amplitude·주파수 sampling 에 사용</a:t>
+            </a:r>
+          </a:p>
+          <a:p>
+            <a:pPr>
+              <a:spcAft>
+                <a:spcPts val="100"/>
+              </a:spcAft>
+            </a:pPr>
+            <a:r>
+              <a:rPr sz="400"/>
               <a:t> </a:t>
             </a:r>
           </a:p>
           <a:p>
             <a:pPr>
               <a:spcAft>
-                <a:spcPts val="200"/>
-              </a:spcAft>
-            </a:pPr>
-            <a:r>
-              <a:rPr sz="1000">
+                <a:spcPts val="100"/>
+              </a:spcAft>
+            </a:pPr>
+            <a:r>
+              <a:rPr sz="900">
                 <a:solidFill>
                   <a:srgbClr val="1A1A2E"/>
                 </a:solidFill>
@@ -23174,16 +23495,93 @@
               <a:t>• </a:t>
             </a:r>
             <a:r>
-              <a:rPr sz="1000" b="1">
-                <a:solidFill>
-                  <a:srgbClr val="1A1A2E"/>
-                </a:solidFill>
-                <a:latin typeface="Calibri"/>
-              </a:rPr>
-              <a:t>LiDAR 센서 모사</a:t>
-            </a:r>
-            <a:r>
-              <a:rPr sz="1000" b="0">
+              <a:rPr sz="900" b="1">
+                <a:solidFill>
+                  <a:srgbClr val="1A1A2E"/>
+                </a:solidFill>
+                <a:latin typeface="Calibri"/>
+              </a:rPr>
+              <a:t>분산 관계</a:t>
+            </a:r>
+            <a:r>
+              <a:rPr sz="900" b="0">
+                <a:solidFill>
+                  <a:srgbClr val="1A1A2E"/>
+                </a:solidFill>
+                <a:latin typeface="Calibri"/>
+              </a:rPr>
+              <a:t>: ω_n = √(g·|k_n|·tanh(|k_n|·d))</a:t>
+            </a:r>
+          </a:p>
+          <a:p>
+            <a:pPr>
+              <a:spcAft>
+                <a:spcPts val="100"/>
+              </a:spcAft>
+            </a:pPr>
+            <a:r>
+              <a:rPr sz="900">
+                <a:solidFill>
+                  <a:srgbClr val="1A1A2E"/>
+                </a:solidFill>
+                <a:latin typeface="Calibri"/>
+              </a:rPr>
+              <a:t>   – Airy 1845 의 linear wave theory 결과 — 파도의 주파수와 파수의 표준 관계</a:t>
+            </a:r>
+          </a:p>
+          <a:p>
+            <a:pPr>
+              <a:spcAft>
+                <a:spcPts val="100"/>
+              </a:spcAft>
+            </a:pPr>
+            <a:r>
+              <a:rPr sz="900">
+                <a:solidFill>
+                  <a:srgbClr val="1A1A2E"/>
+                </a:solidFill>
+                <a:latin typeface="Calibri"/>
+              </a:rPr>
+              <a:t>   – → 합당성: 100 년 이상 검증된 표준 (수심 d, 중력 g 만 입력)</a:t>
+            </a:r>
+          </a:p>
+          <a:p>
+            <a:pPr>
+              <a:spcAft>
+                <a:spcPts val="100"/>
+              </a:spcAft>
+            </a:pPr>
+            <a:r>
+              <a:rPr sz="400"/>
+              <a:t> </a:t>
+            </a:r>
+          </a:p>
+          <a:p>
+            <a:pPr>
+              <a:spcAft>
+                <a:spcPts val="100"/>
+              </a:spcAft>
+            </a:pPr>
+            <a:r>
+              <a:rPr sz="900">
+                <a:solidFill>
+                  <a:srgbClr val="1A1A2E"/>
+                </a:solidFill>
+                <a:latin typeface="Calibri"/>
+              </a:rPr>
+              <a:t>• </a:t>
+            </a:r>
+            <a:r>
+              <a:rPr sz="900" b="1">
+                <a:solidFill>
+                  <a:srgbClr val="1A1A2E"/>
+                </a:solidFill>
+                <a:latin typeface="Calibri"/>
+              </a:rPr>
+              <a:t>LiDAR 센서 (Falcon K1 spec)</a:t>
+            </a:r>
+            <a:r>
+              <a:rPr sz="900" b="0">
                 <a:solidFill>
                   <a:srgbClr val="1A1A2E"/>
                 </a:solidFill>
@@ -23195,235 +23593,158 @@
           <a:p>
             <a:pPr>
               <a:spcAft>
-                <a:spcPts val="200"/>
-              </a:spcAft>
-            </a:pPr>
-            <a:r>
-              <a:rPr sz="1000">
-                <a:solidFill>
-                  <a:srgbClr val="1A1A2E"/>
-                </a:solidFill>
-                <a:latin typeface="Calibri"/>
-              </a:rPr>
-              <a:t>   – </a:t>
-            </a:r>
-            <a:r>
-              <a:rPr sz="1000" b="1">
-                <a:solidFill>
-                  <a:srgbClr val="1A1A2E"/>
-                </a:solidFill>
-                <a:latin typeface="Calibri"/>
-              </a:rPr>
-              <a:t>1) Ray emit (광선 발사)</a:t>
-            </a:r>
-            <a:r>
-              <a:rPr sz="1000" b="0">
-                <a:solidFill>
-                  <a:srgbClr val="1A1A2E"/>
-                </a:solidFill>
-                <a:latin typeface="Calibri"/>
-              </a:rPr>
-              <a:t> — vessel 위 5 m LiDAR mount 에서 발사</a:t>
-            </a:r>
-          </a:p>
-          <a:p>
-            <a:pPr>
-              <a:spcAft>
-                <a:spcPts val="200"/>
-              </a:spcAft>
-            </a:pPr>
-            <a:r>
-              <a:rPr sz="1000">
-                <a:solidFill>
-                  <a:srgbClr val="1A1A2E"/>
-                </a:solidFill>
-                <a:latin typeface="Calibri"/>
-              </a:rPr>
-              <a:t>   – </a:t>
-            </a:r>
-            <a:r>
-              <a:rPr sz="1000" b="0">
-                <a:solidFill>
-                  <a:srgbClr val="1A1A2E"/>
-                </a:solidFill>
-                <a:latin typeface="Calibri"/>
-              </a:rPr>
-              <a:t>Falcon-class LiDAR spec: horizontal FOV </a:t>
-            </a:r>
-            <a:r>
-              <a:rPr sz="1000" b="1">
-                <a:solidFill>
-                  <a:srgbClr val="1A1A2E"/>
-                </a:solidFill>
-                <a:latin typeface="Calibri"/>
-              </a:rPr>
-              <a:t>120°</a:t>
-            </a:r>
-            <a:r>
-              <a:rPr sz="1000" b="0">
-                <a:solidFill>
-                  <a:srgbClr val="1A1A2E"/>
-                </a:solidFill>
-                <a:latin typeface="Calibri"/>
-              </a:rPr>
-              <a:t>, vertical FOV </a:t>
-            </a:r>
-            <a:r>
-              <a:rPr sz="1000" b="1">
-                <a:solidFill>
-                  <a:srgbClr val="1A1A2E"/>
-                </a:solidFill>
-                <a:latin typeface="Calibri"/>
-              </a:rPr>
-              <a:t>±5°</a:t>
-            </a:r>
-          </a:p>
-          <a:p>
-            <a:pPr>
-              <a:spcAft>
-                <a:spcPts val="200"/>
-              </a:spcAft>
-            </a:pPr>
-            <a:r>
-              <a:rPr sz="1000">
-                <a:solidFill>
-                  <a:srgbClr val="1A1A2E"/>
-                </a:solidFill>
-                <a:latin typeface="Calibri"/>
-              </a:rPr>
-              <a:t>   – 32 channels (vertical) × 360 beams (horizontal) per scan = 11,520 ray</a:t>
-            </a:r>
-          </a:p>
-          <a:p>
-            <a:pPr>
-              <a:spcAft>
-                <a:spcPts val="200"/>
-              </a:spcAft>
-            </a:pPr>
-            <a:r>
-              <a:rPr sz="1000">
-                <a:solidFill>
-                  <a:srgbClr val="1A1A2E"/>
-                </a:solidFill>
-                <a:latin typeface="Calibri"/>
-              </a:rPr>
-              <a:t>   – range 10–200 m (전 방향 360° 아님, 선수 방향 반구만)</a:t>
-            </a:r>
-          </a:p>
-          <a:p>
-            <a:pPr>
-              <a:spcAft>
-                <a:spcPts val="200"/>
-              </a:spcAft>
-            </a:pPr>
-            <a:r>
-              <a:rPr sz="1000">
-                <a:solidFill>
-                  <a:srgbClr val="1A1A2E"/>
-                </a:solidFill>
-                <a:latin typeface="Calibri"/>
-              </a:rPr>
-              <a:t>   – </a:t>
-            </a:r>
-            <a:r>
-              <a:rPr sz="1000" b="1">
-                <a:solidFill>
-                  <a:srgbClr val="1A1A2E"/>
-                </a:solidFill>
-                <a:latin typeface="Calibri"/>
-              </a:rPr>
-              <a:t>2) Ray tracing</a:t>
-            </a:r>
-            <a:r>
-              <a:rPr sz="1000" b="0">
-                <a:solidFill>
-                  <a:srgbClr val="1A1A2E"/>
-                </a:solidFill>
-                <a:latin typeface="Calibri"/>
-              </a:rPr>
-              <a:t> — laser ray 가 wave 표면에 부딪힌 첫 점을 찾음</a:t>
-            </a:r>
-          </a:p>
-          <a:p>
-            <a:pPr>
-              <a:spcAft>
-                <a:spcPts val="200"/>
-              </a:spcAft>
-            </a:pPr>
-            <a:r>
-              <a:rPr sz="1000">
-                <a:solidFill>
-                  <a:srgbClr val="1A1A2E"/>
-                </a:solidFill>
-                <a:latin typeface="Calibri"/>
-              </a:rPr>
-              <a:t>   – 각 ray 마다 wave 표면 (격자) 과의 교차 검사 후 first-hit 반환</a:t>
-            </a:r>
-          </a:p>
-          <a:p>
-            <a:pPr>
-              <a:spcAft>
-                <a:spcPts val="200"/>
-              </a:spcAft>
-            </a:pPr>
-            <a:r>
-              <a:rPr sz="1000">
-                <a:solidFill>
-                  <a:srgbClr val="1A1A2E"/>
-                </a:solidFill>
-                <a:latin typeface="Calibri"/>
-              </a:rPr>
-              <a:t>   – </a:t>
-            </a:r>
-            <a:r>
-              <a:rPr sz="1000" b="1">
-                <a:solidFill>
-                  <a:srgbClr val="1A1A2E"/>
-                </a:solidFill>
-                <a:latin typeface="Calibri"/>
-              </a:rPr>
-              <a:t>3) Vessel motion</a:t>
-            </a:r>
-            <a:r>
-              <a:rPr sz="1000" b="0">
-                <a:solidFill>
-                  <a:srgbClr val="1A1A2E"/>
-                </a:solidFill>
-                <a:latin typeface="Calibri"/>
-              </a:rPr>
-              <a:t>: wave 격자는 world frame 에 고정, vessel 만 이동</a:t>
-            </a:r>
-          </a:p>
-          <a:p>
-            <a:pPr>
-              <a:spcAft>
-                <a:spcPts val="200"/>
-              </a:spcAft>
-            </a:pPr>
-            <a:r>
-              <a:rPr sz="1000">
-                <a:solidFill>
-                  <a:srgbClr val="1A1A2E"/>
-                </a:solidFill>
-                <a:latin typeface="Calibri"/>
-              </a:rPr>
-              <a:t>   – Wave 자체가 시간 t 에 따라 propagate, vessel 위치 (ray emit 점) 는 매 frame 1.13 m 전진</a:t>
-            </a:r>
-          </a:p>
-          <a:p>
-            <a:pPr>
-              <a:spcAft>
-                <a:spcPts val="200"/>
-              </a:spcAft>
-            </a:pPr>
-            <a:r>
-              <a:rPr sz="1000">
-                <a:solidFill>
-                  <a:srgbClr val="1A1A2E"/>
-                </a:solidFill>
-                <a:latin typeface="Calibri"/>
-              </a:rPr>
-              <a:t>   – → 별도 좌표계 변환 없이, ray emit 위치만 frame 별로 update</a:t>
+                <a:spcPts val="100"/>
+              </a:spcAft>
+            </a:pPr>
+            <a:r>
+              <a:rPr sz="900">
+                <a:solidFill>
+                  <a:srgbClr val="1A1A2E"/>
+                </a:solidFill>
+                <a:latin typeface="Calibri"/>
+              </a:rPr>
+              <a:t>   – Vessel 위 5 m mount, FOV 수평 120° × 수직 ±5° (선수 방향 반구만, 전방향 360° 아님)</a:t>
+            </a:r>
+          </a:p>
+          <a:p>
+            <a:pPr>
+              <a:spcAft>
+                <a:spcPts val="100"/>
+              </a:spcAft>
+            </a:pPr>
+            <a:r>
+              <a:rPr sz="900">
+                <a:solidFill>
+                  <a:srgbClr val="1A1A2E"/>
+                </a:solidFill>
+                <a:latin typeface="Calibri"/>
+              </a:rPr>
+              <a:t>   – 32 채널 × 360 beam = 11,520 ray / scan, range 10–200 m, 1550 nm 파장</a:t>
+            </a:r>
+          </a:p>
+          <a:p>
+            <a:pPr>
+              <a:spcAft>
+                <a:spcPts val="100"/>
+              </a:spcAft>
+            </a:pPr>
+            <a:r>
+              <a:rPr sz="900">
+                <a:solidFill>
+                  <a:srgbClr val="1A1A2E"/>
+                </a:solidFill>
+                <a:latin typeface="Calibri"/>
+              </a:rPr>
+              <a:t>   – Ray tracing: laser ray 가 파도 표면에 부딪힌 첫 점을 찾음 (Möller-Trumbore 1997)</a:t>
+            </a:r>
+          </a:p>
+          <a:p>
+            <a:pPr>
+              <a:spcAft>
+                <a:spcPts val="100"/>
+              </a:spcAft>
+            </a:pPr>
+            <a:r>
+              <a:rPr sz="400"/>
+              <a:t> </a:t>
+            </a:r>
+          </a:p>
+          <a:p>
+            <a:pPr>
+              <a:spcAft>
+                <a:spcPts val="100"/>
+              </a:spcAft>
+            </a:pPr>
+            <a:r>
+              <a:rPr sz="900">
+                <a:solidFill>
+                  <a:srgbClr val="1A1A2E"/>
+                </a:solidFill>
+                <a:latin typeface="Calibri"/>
+              </a:rPr>
+              <a:t>• </a:t>
+            </a:r>
+            <a:r>
+              <a:rPr sz="900" b="1">
+                <a:solidFill>
+                  <a:srgbClr val="1A1A2E"/>
+                </a:solidFill>
+                <a:latin typeface="Calibri"/>
+              </a:rPr>
+              <a:t>Vessel motion 처리</a:t>
+            </a:r>
+            <a:r>
+              <a:rPr sz="900" b="0">
+                <a:solidFill>
+                  <a:srgbClr val="1A1A2E"/>
+                </a:solidFill>
+                <a:latin typeface="Calibri"/>
+              </a:rPr>
+              <a:t> (사용자 질문 답: '관측 창만 이동' 맞음):</a:t>
+            </a:r>
+          </a:p>
+          <a:p>
+            <a:pPr>
+              <a:spcAft>
+                <a:spcPts val="100"/>
+              </a:spcAft>
+            </a:pPr>
+            <a:r>
+              <a:rPr sz="900">
+                <a:solidFill>
+                  <a:srgbClr val="1A1A2E"/>
+                </a:solidFill>
+                <a:latin typeface="Calibri"/>
+              </a:rPr>
+              <a:t>   – 파도 격자는 충분히 큰 영역 (수백 m × 수백 m) 의 world frame 에 고정</a:t>
+            </a:r>
+          </a:p>
+          <a:p>
+            <a:pPr>
+              <a:spcAft>
+                <a:spcPts val="100"/>
+              </a:spcAft>
+            </a:pPr>
+            <a:r>
+              <a:rPr sz="900">
+                <a:solidFill>
+                  <a:srgbClr val="1A1A2E"/>
+                </a:solidFill>
+                <a:latin typeface="Calibri"/>
+              </a:rPr>
+              <a:t>   – Vessel 은 그 격자 안을 V=11.3 m/s 로 이동 (매 frame Δt=0.1 s 동안 1.13 m 전진)</a:t>
+            </a:r>
+          </a:p>
+          <a:p>
+            <a:pPr>
+              <a:spcAft>
+                <a:spcPts val="100"/>
+              </a:spcAft>
+            </a:pPr>
+            <a:r>
+              <a:rPr sz="900">
+                <a:solidFill>
+                  <a:srgbClr val="1A1A2E"/>
+                </a:solidFill>
+                <a:latin typeface="Calibri"/>
+              </a:rPr>
+              <a:t>   – → LiDAR FOV (관측 창) 가 vessel 따라 이동, 파도 격자 자체는 변경 없음</a:t>
+            </a:r>
+          </a:p>
+          <a:p>
+            <a:pPr>
+              <a:spcAft>
+                <a:spcPts val="100"/>
+              </a:spcAft>
+            </a:pPr>
+            <a:r>
+              <a:rPr sz="900">
+                <a:solidFill>
+                  <a:srgbClr val="1A1A2E"/>
+                </a:solidFill>
+                <a:latin typeface="Calibri"/>
+              </a:rPr>
+              <a:t>   – → 파도 자체는 t 의 진행으로 자연 propagate (η(x,y,t) 의 t 만 update)</a:t>
             </a:r>
           </a:p>
         </p:txBody>
@@ -23444,8 +23765,8 @@
         </p:blipFill>
         <p:spPr>
           <a:xfrm>
-            <a:off x="8412480" y="2011680"/>
-            <a:ext cx="3566160" cy="2380831"/>
+            <a:off x="8503920" y="2011680"/>
+            <a:ext cx="3474720" cy="2319785"/>
           </a:xfrm>
           <a:prstGeom prst="rect">
             <a:avLst/>

--- a/wavesplat/docs/labmeeting_2026_05_13.pptx
+++ b/wavesplat/docs/labmeeting_2026_05_13.pptx
@@ -525,25 +525,19 @@
           <a:lstStyle/>
           <a:p>
             <a:r>
-              <a:t>안녕하세요. 오늘 발표는 두 부분으로 나뉩니다.</a:t>
+              <a:t>안녕하세요, Saeyong Park 입니다. 오늘 발표는 *선박 LiDAR 로 파도를 실시간 추정하는 연구* 에 관한 것입니다.</a:t>
             </a:r>
           </a:p>
           <a:p/>
           <a:p>
             <a:r>
-              <a:t>[앞 절반] 우리가 지난 6개월 동안 진행한 *exploration phase*의 결과를 정리합니다. 구체적으로 (1) 이 분야 prior art 12편을 정독한 결과, (2) 우리가 만든 simulator(WaveSim)와 estimator(WaveSplat)이 어떻게 작동하는지를 설명드립니다.</a:t>
+              <a:t>발표는 크게 두 부분으로 진행하겠습니다. 앞 절반은 지난 6 개월간 진행한 탐색 단계의 결과 — 선행 연구 13 편을 정독한 결과와, 우리가 만든 시뮬레이터 WaveSim 그리고 추정기 WaveSplat 이 어떻게 작동하는지를 보여드립니다. 뒤 절반은 그 과정에서 발견한 본질적 mechanism — 선박이 움직이면서 생기는 효과와 파도의 분산 관계가 결합해서 LiDAR 의 공간 해상도 한계를 어떻게 우회하는지 — 그리고 이것을 paper 의 main contribution 으로 격상시키려는 plan 입니다.</a:t>
             </a:r>
           </a:p>
           <a:p/>
           <a:p>
             <a:r>
-              <a:t>[뒤 절반] 그 과정에서 발견한 본질적 mechanism을 보여드립니다. 선박이 움직이면서 발생하는 효과(synthetic aperture)와 파도의 분산 관계(dispersion physics)가 어떻게 결합해서 LiDAR의 공간 해상도 한계를 우회하는지 — 이것을 우리 paper의 main contribution으로 격상시키려는 plan입니다.</a:t>
-            </a:r>
-          </a:p>
-          <a:p/>
-          <a:p>
-            <a:r>
-              <a:t>외부 청자분들이 계셔서 도메인 background부터 천천히 시작하겠습니다. 전공 용어가 처음 나오면 옆에 짧게 설명을 붙였으니 부담 없이 들으시면 됩니다.</a:t>
+              <a:t>외부 청자분들이 계시므로 도메인 배경부터 천천히 시작하겠습니다. 전공 용어가 처음 나오면 옆에 짧게 풀어 설명드리니 편하게 들어 주시면 됩니다.</a:t>
             </a:r>
           </a:p>
         </p:txBody>
@@ -2023,173 +2017,51 @@
           <a:lstStyle/>
           <a:p>
             <a:r>
-              <a:t>Ablation study(절제 연구)가 무엇인지부터 설명드리겠습니다.</a:t>
+              <a:t>이번 슬라이드는 ablation study, 즉 *각 기술의 기여도* 를 분리해서 보는 실험입니다.</a:t>
             </a:r>
           </a:p>
           <a:p/>
           <a:p>
             <a:r>
-              <a:t>Ablation이란?</a:t>
-            </a:r>
-          </a:p>
-          <a:p>
-            <a:r>
-              <a:t>  우리 시스템에는 여러 기술이 들어 있습니다.</a:t>
-            </a:r>
-          </a:p>
-          <a:p>
-            <a:r>
-              <a:t>  이 기술들을 하나씩 빼 보면서, 빠진 기술이 실제로 도움이 되는지 확인합니다.</a:t>
-            </a:r>
-          </a:p>
-          <a:p>
-            <a:r>
-              <a:t>  비유하면: 레시피에서 재료를 하나씩 빼 보면서 맛이 어떻게 변하는지 보는 것입니다.</a:t>
-            </a:r>
-          </a:p>
-          <a:p>
-            <a:r>
-              <a:t>  의학에서 '절제(ablation)'라는 용어에서 왔습니다.</a:t>
+              <a:t>Ablation 이란 시스템에 들어간 기술을 하나씩 빼 보면서 빠진 게 실제로 도움이 되는지 확인하는 실험입니다. 의학의 '절제' 라는 용어에서 왔는데요, 논문 심사에서 '각 기술의 기여도를 증명하라' 는 요구가 반드시 나오기 때문에 필수적인 검증입니다.</a:t>
             </a:r>
           </a:p>
           <a:p/>
           <a:p>
             <a:r>
-              <a:t>왜 ablation이 필요한가?</a:t>
-            </a:r>
-          </a:p>
-          <a:p>
-            <a:r>
-              <a:t>  여러 기술을 한꺼번에 넣으면 '전체 결과'는 보이지만,</a:t>
-            </a:r>
-          </a:p>
-          <a:p>
-            <a:r>
-              <a:t>  '어떤 기술이 실제로 효과가 있는지'는 알 수 없습니다.</a:t>
-            </a:r>
-          </a:p>
-          <a:p>
-            <a:r>
-              <a:t>  예를 들어 결과가 좋아도, 실은 한 가지 기술만 효과가 있고</a:t>
-            </a:r>
-          </a:p>
-          <a:p>
-            <a:r>
-              <a:t>  나머지는 아무 도움이 안 될 수도 있습니다.</a:t>
-            </a:r>
-          </a:p>
-          <a:p>
-            <a:r>
-              <a:t>  논문 심사에서 '각 기술의 기여도를 증명하라'는 요구가 반드시 나옵니다.</a:t>
+              <a:t>4 가지 변형을 비교했습니다.</a:t>
+            </a:r>
+          </a:p>
+          <a:p>
+            <a:r>
+              <a:t>  - A 는 가장 기본 — FFT 초기화 + 단일 프레임. nRMSE 0.213.</a:t>
+            </a:r>
+          </a:p>
+          <a:p>
+            <a:r>
+              <a:t>  - B 는 A 에 beamforming 과 multi-frame 을 추가한 버전. 0.208 로 약간 개선.</a:t>
+            </a:r>
+          </a:p>
+          <a:p>
+            <a:r>
+              <a:t>  - C 는 A 에 분산 관계 (물리 법칙) 만 추가한 버전. 그런데 0.226 으로 *오히려 악화* 됩니다.</a:t>
+            </a:r>
+          </a:p>
+          <a:p>
+            <a:r>
+              <a:t>  - D 는 모두 결합한 우리 WaveSplat. 0.211 로 가장 안정적입니다.</a:t>
             </a:r>
           </a:p>
           <a:p/>
           <a:p>
             <a:r>
-              <a:t>4가지 변형의 의미:</a:t>
-            </a:r>
-          </a:p>
-          <a:p>
-            <a:r>
-              <a:t>  A: 가장 기본적인 방법. FFT로 초기 파수를 추정하고, 주파수(omega)를 자유롭게 둠.</a:t>
-            </a:r>
-          </a:p>
-          <a:p>
-            <a:r>
-              <a:t>     단일 프레임(한 순간의 LiDAR 점)만 사용.</a:t>
-            </a:r>
-          </a:p>
-          <a:p>
-            <a:r>
-              <a:t>  B: beamforming이라는 더 좋은 초기화 + 여러 프레임(시간 정보 활용).</a:t>
-            </a:r>
-          </a:p>
-          <a:p>
-            <a:r>
-              <a:t>     주파수는 여전히 자유.</a:t>
-            </a:r>
-          </a:p>
-          <a:p>
-            <a:r>
-              <a:t>  C: beamforming + 물리 법칙(분산 관계) 강제. 하지만 단일 프레임만 사용.</a:t>
-            </a:r>
-          </a:p>
-          <a:p>
-            <a:r>
-              <a:t>  D (WaveSplat): 모든 기술 결합 — beamforming + 물리 법칙 + multi-frame.</a:t>
+              <a:t>여기서 흥미로운 점은 C 가 왜 악화되는가 인데요, 단일 프레임에서 초기 파수 추정이 부정확하면 물리 법칙이 그 오류를 주파수까지 전파시키기 때문입니다. 즉 *물리 법칙은 multi-frame 과 함께 써야 시너지가 난다* 는 게 핵심 메시지입니다.</a:t>
             </a:r>
           </a:p>
           <a:p/>
           <a:p>
             <a:r>
-              <a:t>결과 해석:</a:t>
-            </a:r>
-          </a:p>
-          <a:p>
-            <a:r>
-              <a:t>  - A→B: 0.213 → 0.208 — multi-frame이 도움됨 (시간 정보 활용)</a:t>
-            </a:r>
-          </a:p>
-          <a:p>
-            <a:r>
-              <a:t>  - A→C: 0.213 → 0.226 — 물리 법칙만 넣으면 오히려 악화!</a:t>
-            </a:r>
-          </a:p>
-          <a:p>
-            <a:r>
-              <a:t>    이유: 단일 프레임에서 초기 파수 추정이 부정확하면,</a:t>
-            </a:r>
-          </a:p>
-          <a:p>
-            <a:r>
-              <a:t>    물리 법칙이 그 오류를 주파수로 전파시킵니다.</a:t>
-            </a:r>
-          </a:p>
-          <a:p>
-            <a:r>
-              <a:t>  - D (모두 결합): 0.211 — 가장 안정적인 결과</a:t>
-            </a:r>
-          </a:p>
-          <a:p>
-            <a:r>
-              <a:t>    물리 법칙과 multi-frame을 함께 써야 시너지가 발생합니다.</a:t>
-            </a:r>
-          </a:p>
-          <a:p/>
-          <a:p>
-            <a:r>
-              <a:t>에피소드별 상세:</a:t>
-            </a:r>
-          </a:p>
-          <a:p>
-            <a:r>
-              <a:t>  - 단순 파도에서는 D가 A보다 최대 42% 더 좋음 (물리 법칙 효과)</a:t>
-            </a:r>
-          </a:p>
-          <a:p>
-            <a:r>
-              <a:t>  - 복잡 파도에서는 A가 D보다 더 좋은 경우도 있음 (자유도 높아서 fitting 유리)</a:t>
-            </a:r>
-          </a:p>
-          <a:p>
-            <a:r>
-              <a:t>  - 하지만 D의 해가 물리적으로 더 의미 있는 해입니다.</a:t>
-            </a:r>
-          </a:p>
-          <a:p/>
-          <a:p>
-            <a:r>
-              <a:t>핵심 메시지:</a:t>
-            </a:r>
-          </a:p>
-          <a:p>
-            <a:r>
-              <a:t>  '물리 법칙(dispersion)은 마법이 아니라 정규화(regularizer) 역할을 한다.'</a:t>
-            </a:r>
-          </a:p>
-          <a:p>
-            <a:r>
-              <a:t>  쉽게 말하면, 물리 법칙이 '물리적으로 가능한 답만 찾도록' 범위를 좁혀주는 것입니다.</a:t>
+              <a:t>한마디로, 물리 법칙 (dispersion) 은 마법이 아니라 *정규화* 역할입니다. 물리적으로 가능한 답만 찾도록 범위를 좁혀주는 거죠.</a:t>
             </a:r>
           </a:p>
         </p:txBody>
@@ -2259,121 +2131,25 @@
           <a:lstStyle/>
           <a:p>
             <a:r>
-              <a:t>이 슬라이드가 우리 연구의 핵심 메시지입니다.</a:t>
+              <a:t>이 슬라이드가 우리 연구의 핵심 메시지입니다. 두 가지 메커니즘이 결합해서 작동합니다.</a:t>
             </a:r>
           </a:p>
           <a:p/>
           <a:p>
             <a:r>
-              <a:t>처음에 'super-resolution(초해상도)'이라는 멋진 표현을 쓰려 했지만,</a:t>
-            </a:r>
-          </a:p>
-          <a:p>
-            <a:r>
-              <a:t>정확히 말하면 '물리적 정규화(physical regularization)'가 맞습니다.</a:t>
+              <a:t>첫 번째 메커니즘은 *분산 관계의 정규화 효과* 입니다. 분산 관계란 파도의 주파수와 파수 사이의 물리 법칙인데요, 깊은 바다에서 짧은 파도는 느리고 긴 파도는 빠릅니다. 이 관계를 알면 파수 k 가 결정되는 순간 주파수 ω 가 자동으로 결정됩니다. 추정해야 할 변수가 5N 개에서 4N 개로 20% 줄어들고, 더 중요하게 *물리적으로 불가능한 답이 자동으로 배제* 됩니다.</a:t>
             </a:r>
           </a:p>
           <a:p/>
           <a:p>
             <a:r>
-              <a:t>메커니즘 1을 쉽게 설명하면:</a:t>
-            </a:r>
-          </a:p>
-          <a:p>
-            <a:r>
-              <a:t>  분산 관계란 '파도의 주파수와 파수 사이의 물리 법칙'입니다.</a:t>
-            </a:r>
-          </a:p>
-          <a:p>
-            <a:r>
-              <a:t>  깊은 바다에서 짧은 파도(큰 k)는 느리고, 긴 파도(작은 k)는 빠릅니다.</a:t>
-            </a:r>
-          </a:p>
-          <a:p>
-            <a:r>
-              <a:t>  이 관계를 알고 있으면, 파수(k)를 알면 주파수(ω)를 계산할 수 있습니다.</a:t>
-            </a:r>
-          </a:p>
-          <a:p>
-            <a:r>
-              <a:t>  결과적으로 추정해야 할 변수가 5N개에서 4N개로 20% 줄어듭니다.</a:t>
-            </a:r>
-          </a:p>
-          <a:p>
-            <a:r>
-              <a:t>  게다가, 물리적으로 불가능한 답(예: 짧은 파도인데 빠른 주파수)이 자동으로 배제됩니다.</a:t>
+              <a:t>두 번째 메커니즘은 *선박 이동의 합성 개구 효과* 입니다. 한 순간의 LiDAR 점 50 개만으로는 파도의 방향을 정확히 알기 어렵습니다. 하지만 선박이 이동하면서 여러 순간의 데이터를 모으면 마치 긴 안테나를 만든 것처럼 분해능이 좋아집니다. 이것을 합성 개구 (synthetic aperture) 라 부르고, 레이더 분야의 SAR 과 같은 원리입니다.</a:t>
             </a:r>
           </a:p>
           <a:p/>
           <a:p>
             <a:r>
-              <a:t>메커니즘 2를 쉽게 설명하면:</a:t>
-            </a:r>
-          </a:p>
-          <a:p>
-            <a:r>
-              <a:t>  한 순간(단일 프레임)의 LiDAR 점만으로는 파도의 방향을 정확히 알기 어렵습니다.</a:t>
-            </a:r>
-          </a:p>
-          <a:p>
-            <a:r>
-              <a:t>  하지만 선박이 이동하면서 여러 순간의 데이터를 모으면,</a:t>
-            </a:r>
-          </a:p>
-          <a:p>
-            <a:r>
-              <a:t>  마치 긴 안테나를 만든 것처럼 방향 분해능이 좋아집니다.</a:t>
-            </a:r>
-          </a:p>
-          <a:p>
-            <a:r>
-              <a:t>  이것을 'synthetic aperture(합성 개구)'라고 부릅니다.</a:t>
-            </a:r>
-          </a:p>
-          <a:p>
-            <a:r>
-              <a:t>  레이더 분야의 SAR(Synthetic Aperture Radar)과 같은 원리입니다.</a:t>
-            </a:r>
-          </a:p>
-          <a:p/>
-          <a:p>
-            <a:r>
-              <a:t>Ablation에서 핵심 발견:</a:t>
-            </a:r>
-          </a:p>
-          <a:p>
-            <a:r>
-              <a:t>  물리 법칙과 multi-frame은 각각 단독으로는 불완전합니다.</a:t>
-            </a:r>
-          </a:p>
-          <a:p>
-            <a:r>
-              <a:t>  물리 법칙만 쓰면(C): 초기 파수 추정이 틀렸을 때, 그 오류가 주파수로 전파됩니다.</a:t>
-            </a:r>
-          </a:p>
-          <a:p>
-            <a:r>
-              <a:t>  multi-frame만 쓰면(B): 개선되지만 물리적 제약 없이 자유도가 너무 높아 불안정합니다.</a:t>
-            </a:r>
-          </a:p>
-          <a:p>
-            <a:r>
-              <a:t>  둘을 함께 쓰면(D): 시너지가 발생합니다.</a:t>
-            </a:r>
-          </a:p>
-          <a:p>
-            <a:r>
-              <a:t>  — multi-frame으로 파수를 잘 추정하고,</a:t>
-            </a:r>
-          </a:p>
-          <a:p>
-            <a:r>
-              <a:t>  — 물리 법칙으로 물리적으로 가능한 해만 탐색하고,</a:t>
-            </a:r>
-          </a:p>
-          <a:p>
-            <a:r>
-              <a:t>  — 결과적으로 가장 안정적인 추정이 됩니다.</a:t>
+              <a:t>Ablation 에서 발견한 핵심은 — *두 메커니즘은 각각 단독으로는 불완전하고 함께 써야 시너지가 난다* 는 것입니다. 물리 법칙만 쓰면 초기 파수 오류가 주파수로 전파되고, multi-frame 만 쓰면 자유도가 너무 높아 불안정합니다. 둘을 결합하면 multi-frame 으로 파수를 잘 추정하고 물리 법칙으로 답을 좁혀서 가장 안정적인 추정이 됩니다.</a:t>
             </a:r>
           </a:p>
         </p:txBody>
@@ -2619,31 +2395,31 @@
           <a:lstStyle/>
           <a:p>
             <a:r>
-              <a:t>파도 추정 분야에는 두 단계가 있습니다.</a:t>
+              <a:t>먼저 왜 이 연구가 필요한지 동기부터 말씀드리겠습니다.</a:t>
             </a:r>
           </a:p>
           <a:p/>
           <a:p>
             <a:r>
-              <a:t>첫째 statistical estimation — 우리가 흔히 듣는 H_s (significant wave height, 유의파고), T_p (peak period, 첨두주기), JONSWAP 스펙트럼 같은 '평균적 통계'. 선박 디자인이나 해양 구조물 설계에는 이걸로 충분합니다.</a:t>
+              <a:t>파도 추정 분야에는 두 단계가 있습니다. 첫째는 통계적 추정입니다 — 유의파고 H_s, 첨두주기 T_p, JONSWAP 스펙트럼 같은 *평균적 통계량* 이죠. 이건 선박 설계나 해양 구조물 설계에는 충분합니다.</a:t>
             </a:r>
           </a:p>
           <a:p/>
           <a:p>
             <a:r>
-              <a:t>둘째 phase-resolved estimation — 각 파도의 위치와 시점을 결정론적으로 추정. 예를 들어 'BF4 sea state' 라는 통계가 아니라 'x = 120 m 위치에 5초 후 H = 2 m 파도가 도착한다' 같은 구체적 정보입니다.</a:t>
+              <a:t>둘째는 phase-resolved estimation, 즉 *위상까지 추정* 하는 단계입니다. 각 파도의 위치와 시점을 결정론적으로 추정합니다. 'BF4 sea state' 라는 통계가 아니라 'x = 120 m 위치에 5 초 후 H = 2 m 파도가 도착한다' 같은 구체적인 정보를 얻는 거죠.</a:t>
             </a:r>
           </a:p>
           <a:p/>
           <a:p>
             <a:r>
-              <a:t>왜 phase-resolved가 필요한가? 실시간 제어에서는 '평균적으로 파도가 강하다' 는 정보로는 특정 시점의 제어 결정을 못 합니다. 어디에 큰 파도가 오는지 정확히 알아야 ride control, hydrofoil, autonomous navigation 같은 응용이 가능합니다.</a:t>
+              <a:t>왜 이게 필요할까요? 실시간 제어에서는 '평균적으로 파도가 강하다' 라는 정보로는 특정 시점의 제어 결정을 내릴 수 없습니다. 어디에 큰 파도가 오는지 정확히 알아야 선박 ride control, hydrofoil, autonomous navigation 같은 응용이 가능해집니다.</a:t>
             </a:r>
           </a:p>
           <a:p/>
           <a:p>
             <a:r>
-              <a:t>응용 중 가장 직접적인 것은 hydrofoil ride control입니다 — 우리 연구실에서 진행 중인 hydrofoil 연구의 motivation이기도 합니다. 파도를 미리 보고 hydrofoil의 angle을 조절하면 승차감(ride RMS)을 크게 줄일 수 있습니다.</a:t>
+              <a:t>가장 직접적인 응용은 hydrofoil ride control 입니다. 우리 연구실에서 진행 중인 hydrofoil 연구의 동기이기도 한데요, 파도를 미리 보고 hydrofoil 의 angle 을 미리 조절하면 승차감 (ride RMS) 을 크게 줄일 수 있습니다.</a:t>
             </a:r>
           </a:p>
         </p:txBody>
@@ -2912,132 +2688,37 @@
           <a:lstStyle/>
           <a:p>
             <a:r>
-              <a:t>향후 연구 방향을 3가지로 정리했습니다.</a:t>
+              <a:t>마지막으로 향후 연구 방향 세 가지를 말씀드리겠습니다.</a:t>
             </a:r>
           </a:p>
           <a:p/>
           <a:p>
             <a:r>
-              <a:t>(1) 고복잡도 파도 대응:</a:t>
-            </a:r>
-          </a:p>
-          <a:p>
-            <a:r>
-              <a:t>  지금까지의 실험에서, 파도 성분이 15개 이상이면 정확도가 떨어지는 것을 확인했습니다.</a:t>
-            </a:r>
-          </a:p>
-          <a:p>
-            <a:r>
-              <a:t>  원인은 beamforming 초기화가 많은 성분을 동시에 분리하기 어렵기 때문입니다.</a:t>
-            </a:r>
-          </a:p>
-          <a:p>
-            <a:r>
-              <a:t>  해결 방향 1: hybrid init — 먼저 격자(grid) 방법으로 대략적인 성분을 찾고,</a:t>
-            </a:r>
-          </a:p>
-          <a:p>
-            <a:r>
-              <a:t>    그 결과를 파라미터 초기값으로 사용하여 정밀하게 최적화합니다.</a:t>
-            </a:r>
-          </a:p>
-          <a:p>
-            <a:r>
-              <a:t>  해결 방향 2: learned init — 신경망(NN)을 활용하여</a:t>
-            </a:r>
-          </a:p>
-          <a:p>
-            <a:r>
-              <a:t>    LiDAR 점으로부터 초기 파도 성분을 바로 추정합니다.</a:t>
-            </a:r>
-          </a:p>
-          <a:p>
-            <a:r>
-              <a:t>  기대 효과: 현재 고복잡도에서의 역전 현상을 해소할 수 있습니다.</a:t>
+              <a:t>첫 번째는 *고복잡도 파도 대응* 입니다. 지금까지의 실험에서 파도 성분이 15 개 이상이면 정확도가 떨어지는 것을 확인했습니다. 원인은 beamforming 초기화가 많은 성분을 동시에 분리하기 어렵기 때문인데요, 두 가지 해결 방향이 있습니다. 하나는 hybrid init — 격자 방법으로 먼저 대략적인 성분을 찾고 그 결과를 파라미터 초기값으로 정밀화하는 것이고, 다른 하나는 learned init — 신경망을 활용해서 LiDAR 점으로부터 초기 성분을 바로 추정하는 것입니다.</a:t>
             </a:r>
           </a:p>
           <a:p/>
           <a:p>
             <a:r>
-              <a:t>(2) 비선형 파도 확장:</a:t>
-            </a:r>
-          </a:p>
-          <a:p>
-            <a:r>
-              <a:t>  현재는 파도를 사인파의 합(Linear Wave Theory)으로 표현합니다.</a:t>
-            </a:r>
-          </a:p>
-          <a:p>
-            <a:r>
-              <a:t>  실제 파도는 비선형적이어서(꼭대기가 뾰족, 골이 넓음),</a:t>
-            </a:r>
-          </a:p>
-          <a:p>
-            <a:r>
-              <a:t>  높은 파도에서는 정확도가 떨어집니다.</a:t>
-            </a:r>
-          </a:p>
-          <a:p>
-            <a:r>
-              <a:t>  Stokes 2차 보정을 추가하면, 파도의 비대칭성을 일부 반영할 수 있습니다.</a:t>
-            </a:r>
-          </a:p>
-          <a:p>
-            <a:r>
-              <a:t>  Klein 2020 논문에 따르면, 이 보정으로 적용 범위가 크게 넓어집니다.</a:t>
+              <a:t>두 번째는 *비선형 파도 확장* 입니다. 현재는 사인파의 합 (Linear Wave Theory) 으로 파도를 표현하는데, 실제 파도는 비선형적이어서 꼭대기가 뾰족하고 골이 넓습니다. 높은 파도에서는 정확도가 떨어지죠. Stokes 2 차 보정을 추가하면 파도의 비대칭성을 일부 반영할 수 있고, Klein 2020 논문에 따르면 이 보정으로 적용 범위가 크게 넓어집니다.</a:t>
             </a:r>
           </a:p>
           <a:p/>
           <a:p>
             <a:r>
-              <a:t>(3) 실측 데이터 검증:</a:t>
-            </a:r>
-          </a:p>
-          <a:p>
-            <a:r>
-              <a:t>  현재까지의 결과는 모두 시뮬레이터(합성 데이터)에서 나온 것입니다.</a:t>
-            </a:r>
-          </a:p>
-          <a:p>
-            <a:r>
-              <a:t>  실제 바다에서 실제 LiDAR로 측정한 데이터로 검증해야 합니다.</a:t>
-            </a:r>
-          </a:p>
-          <a:p>
-            <a:r>
-              <a:t>  가장 큰 도전은 'ground-truth(정답)'를 어떻게 확보하느냐입니다.</a:t>
-            </a:r>
-          </a:p>
-          <a:p>
-            <a:r>
-              <a:t>  Wave buoy(파고계)나 X-band radar로 동시 측정하는 방법을 고려하고 있습니다.</a:t>
+              <a:t>세 번째는 *실측 데이터 검증* 입니다. 지금까지 결과는 모두 시뮬레이터에서 나온 것입니다. 실제 바다 LiDAR 데이터로 검증해야 하는데, 가장 큰 도전은 ground-truth 를 어떻게 확보하느냐 입니다. Wave buoy 나 X-band radar 로 동시 측정하는 방법을 고려하고 있습니다.</a:t>
             </a:r>
           </a:p>
           <a:p/>
           <a:p>
             <a:r>
-              <a:t>최종 목표:</a:t>
-            </a:r>
-          </a:p>
-          <a:p>
-            <a:r>
-              <a:t>  선박에 탑재된 LiDAR로 주변 파도를 실시간(13ms 이내)으로 추정하고,</a:t>
-            </a:r>
-          </a:p>
-          <a:p>
-            <a:r>
-              <a:t>  이 정보를 활용하여 선박 제어(hydrofoil ride control, 자율운항 등)에</a:t>
-            </a:r>
-          </a:p>
-          <a:p>
-            <a:r>
-              <a:t>  직접 활용할 수 있는 시스템을 만드는 것입니다.</a:t>
+              <a:t>최종 목표는 *선박 LiDAR 로 주변 파도를 실시간 추정하고 그 정보를 hydrofoil ride control 이나 자율운항 같은 선박 제어에 직접 활용할 수 있는 시스템* 을 만드는 것입니다.</a:t>
             </a:r>
           </a:p>
           <a:p/>
           <a:p>
             <a:r>
-              <a:t>이상으로 발표를 마치겠습니다. 질문이나 피드백을 환영합니다.</a:t>
+              <a:t>이상으로 발표를 마치겠습니다. 질문이나 피드백 환영합니다. 감사합니다.</a:t>
             </a:r>
           </a:p>
         </p:txBody>
@@ -3529,31 +3210,31 @@
           <a:lstStyle/>
           <a:p>
             <a:r>
-              <a:t>이 세 조건을 동시에 만족하는 setup은 prior art에 거의 없습니다. 하나씩 보겠습니다.</a:t>
+              <a:t>그런데 이 문제가 왜 어려운지 세 가지 도전 과제로 나눠서 설명드리겠습니다.</a:t>
             </a:r>
           </a:p>
           <a:p/>
           <a:p>
             <a:r>
-              <a:t>(1) Sparse non-uniform — LiDAR는 흔히 쓰이는 wave gauge나 dense radar와 매우 다릅니다. 한 frame에 점 50개 정도로 매우 희소하고, 거리에 따라 점밀도가 변합니다. 또 raydrop(파도가 LiDAR 빔을 반사하지 못해 점 누락), shadowing(앞쪽 파도가 뒤쪽을 가림) 같은 물리 효과로 점이 더 줄어듭니다. 기존 wave estimation 방법론은 dense·균일 측정 가정으로 설계되어서 LiDAR setup에 직접 적용하기 어렵습니다.</a:t>
+              <a:t>첫 번째는 *희소하고 비균일한 측정* 입니다. LiDAR 는 흔히 쓰이는 wave gauge 나 dense radar 와 매우 다릅니다. 한 frame 에 유효한 점이 50 개 정도로 매우 희소하고, 거리에 따라 점밀도가 변합니다. 또 raydrop — 파도가 LiDAR 빔을 반사하지 못해 점이 누락되는 현상 — 과 shadowing — 앞쪽 파도가 뒤쪽을 가리는 현상 — 같은 물리 효과로 점이 더 줄어듭니다. 기존 wave estimation 방법론은 dense 하고 균일한 측정 가정으로 설계되어 있어서 LiDAR setup 에 직접 적용하기 어렵습니다.</a:t>
             </a:r>
           </a:p>
           <a:p/>
           <a:p>
             <a:r>
-              <a:t>(2) Real-time — 제어 루프에 들어가야 하므로 100 ms 안에 끝나야 합니다. EnKF 같은 ensemble 방법론, PINN 같은 NN 학습 방법론은 분 단위에서 시간 단위까지 걸려서 이 제약을 만족 못 합니다.</a:t>
+              <a:t>두 번째는 *실시간 제약* 입니다. 제어 루프에 들어가야 하므로 한 frame 처리에 100 ms 이내여야 합니다. EnKF 같은 앙상블 방법론이나 PINN 같은 신경망 학습 방법론은 분 단위에서 시간 단위까지 걸려서 이 제약을 만족하지 못합니다.</a:t>
             </a:r>
           </a:p>
           <a:p/>
           <a:p>
             <a:r>
-              <a:t>(3) 2D directional — 실제 바다는 한 방향 파도가 아니라 여러 방향 파도가 섞여 있습니다. Wavenumber도 단순한 k가 아니라 vector (k_x, k_y)를 추정해야 합니다. Klein 2020, Desmars 2023 같은 prior art는 대부분 1D 가정으로 단순화하지만, 우리는 2D를 그대로 다룹니다.</a:t>
+              <a:t>세 번째는 *2D 방향성 sea state* 입니다. 실제 바다는 한 방향 파도가 아니라 여러 방향 파도가 섞여 있습니다. 따라서 wavenumber 도 단순한 k 가 아니라 vector (k_x, k_y) 를 추정해야 합니다. Klein 2020, Desmars 2023 같은 선행 연구는 대부분 1D 가정으로 단순화하지만, 우리는 2D 를 그대로 다룹니다.</a:t>
             </a:r>
           </a:p>
           <a:p/>
           <a:p>
             <a:r>
-              <a:t>다음 슬라이드부터 prior art 12편을 검토한 결과를 보여드리고, 이 niche가 실제로 비어 있다는 것을 보이겠습니다.</a:t>
+              <a:t>다음 슬라이드부터 선행 연구 13 편을 검토한 결과를 보여드리고, 이 niche 가 실제로 비어 있음을 보여드리겠습니다.</a:t>
             </a:r>
           </a:p>
         </p:txBody>
@@ -8056,7 +7737,7 @@
           <a:p>
             <a:pPr>
               <a:spcAft>
-                <a:spcPts val="200"/>
+                <a:spcPts val="100"/>
               </a:spcAft>
             </a:pPr>
             <a:r>
@@ -8075,7 +7756,7 @@
                 </a:solidFill>
                 <a:latin typeface="Calibri"/>
               </a:rPr>
-              <a:t>Raydrop (점 누락) 의 물리</a:t>
+              <a:t>물리적 의미 — 빛이 매질 경계에서 일어나는 일</a:t>
             </a:r>
             <a:r>
               <a:rPr sz="1000" b="0">
@@ -8090,7 +7771,7 @@
           <a:p>
             <a:pPr>
               <a:spcAft>
-                <a:spcPts val="200"/>
+                <a:spcPts val="100"/>
               </a:spcAft>
             </a:pPr>
             <a:r>
@@ -8100,13 +7781,13 @@
                 </a:solidFill>
                 <a:latin typeface="Calibri"/>
               </a:rPr>
-              <a:t>   – 파도 표면이 매끄러우면 ray 가 specular 반사 — LiDAR receiver 가 아닌 방향으로 가서 return 없음</a:t>
-            </a:r>
-          </a:p>
-          <a:p>
-            <a:pPr>
-              <a:spcAft>
-                <a:spcPts val="200"/>
+              <a:t>   – 공기 중 LiDAR 광선이 물 표면에 도달하면 두 부분으로 분리됨:</a:t>
+            </a:r>
+          </a:p>
+          <a:p>
+            <a:pPr>
+              <a:spcAft>
+                <a:spcPts val="100"/>
               </a:spcAft>
             </a:pPr>
             <a:r>
@@ -8116,13 +7797,13 @@
                 </a:solidFill>
                 <a:latin typeface="Calibri"/>
               </a:rPr>
-              <a:t>   – 입사각 θ_i 가 grazing (90°) 에 가까울수록 specular 비중 ↑ → 점 누락 ↑</a:t>
-            </a:r>
-          </a:p>
-          <a:p>
-            <a:pPr>
-              <a:spcAft>
-                <a:spcPts val="200"/>
+              <a:t>   – ① 일부는 반사 (specular reflection) — 표면이 매끄러울수록 한 방향으로 집중</a:t>
+            </a:r>
+          </a:p>
+          <a:p>
+            <a:pPr>
+              <a:spcAft>
+                <a:spcPts val="100"/>
               </a:spcAft>
             </a:pPr>
             <a:r>
@@ -8132,13 +7813,29 @@
                 </a:solidFill>
                 <a:latin typeface="Calibri"/>
               </a:rPr>
-              <a:t>   – → 모사: Fresnel reflectance R(θ_i) 로 specular 비중 계산 (식은 backup A 참조)</a:t>
-            </a:r>
-          </a:p>
-          <a:p>
-            <a:pPr>
-              <a:spcAft>
-                <a:spcPts val="200"/>
+              <a:t>   – ② 나머지는 굴절 (refraction) — 물 속으로 들어가 흡수됨 (LiDAR 못 받음)</a:t>
+            </a:r>
+          </a:p>
+          <a:p>
+            <a:pPr>
+              <a:spcAft>
+                <a:spcPts val="100"/>
+              </a:spcAft>
+            </a:pPr>
+            <a:r>
+              <a:rPr sz="1000">
+                <a:solidFill>
+                  <a:srgbClr val="1A1A2E"/>
+                </a:solidFill>
+                <a:latin typeface="Calibri"/>
+              </a:rPr>
+              <a:t>   – Fresnel 식이 이 두 비율을 결정 — 입사각 θ_i 와 굴절률 n 의 함수</a:t>
+            </a:r>
+          </a:p>
+          <a:p>
+            <a:pPr>
+              <a:spcAft>
+                <a:spcPts val="100"/>
               </a:spcAft>
             </a:pPr>
             <a:r>
@@ -8149,7 +7846,7 @@
           <a:p>
             <a:pPr>
               <a:spcAft>
-                <a:spcPts val="200"/>
+                <a:spcPts val="100"/>
               </a:spcAft>
             </a:pPr>
             <a:r>
@@ -8168,7 +7865,7 @@
                 </a:solidFill>
                 <a:latin typeface="Calibri"/>
               </a:rPr>
-              <a:t>Fresnel 식의 합당성</a:t>
+              <a:t>Fresnel 수식 — 두 polarization 평균</a:t>
             </a:r>
             <a:r>
               <a:rPr sz="1000" b="0">
@@ -8177,13 +7874,13 @@
                 </a:solidFill>
                 <a:latin typeface="Calibri"/>
               </a:rPr>
-              <a:t>:</a:t>
-            </a:r>
-          </a:p>
-          <a:p>
-            <a:pPr>
-              <a:spcAft>
-                <a:spcPts val="200"/>
+              <a:t> (LiDAR laser unpolarized 가정):</a:t>
+            </a:r>
+          </a:p>
+          <a:p>
+            <a:pPr>
+              <a:spcAft>
+                <a:spcPts val="100"/>
               </a:spcAft>
             </a:pPr>
             <a:r>
@@ -8193,13 +7890,13 @@
                 </a:solidFill>
                 <a:latin typeface="Calibri"/>
               </a:rPr>
-              <a:t>   – 19 세기 Augustin-Jean Fresnel 정립 (1820 년대)</a:t>
-            </a:r>
-          </a:p>
-          <a:p>
-            <a:pPr>
-              <a:spcAft>
-                <a:spcPts val="200"/>
+              <a:t>   – Step 1 (Snell): sin θ_t = sin θ_i / n   (n=1.318, water at 1550 nm)</a:t>
+            </a:r>
+          </a:p>
+          <a:p>
+            <a:pPr>
+              <a:spcAft>
+                <a:spcPts val="100"/>
               </a:spcAft>
             </a:pPr>
             <a:r>
@@ -8209,13 +7906,13 @@
                 </a:solidFill>
                 <a:latin typeface="Calibri"/>
               </a:rPr>
-              <a:t>   – 광학 교과서 표준 (Hecht, Optics §4.6) — 모든 광학 시뮬레이션에서 사용</a:t>
-            </a:r>
-          </a:p>
-          <a:p>
-            <a:pPr>
-              <a:spcAft>
-                <a:spcPts val="200"/>
+              <a:t>   – Step 2 (Fresnel s, p):</a:t>
+            </a:r>
+          </a:p>
+          <a:p>
+            <a:pPr>
+              <a:spcAft>
+                <a:spcPts val="100"/>
               </a:spcAft>
             </a:pPr>
             <a:r>
@@ -8225,13 +7922,13 @@
                 </a:solidFill>
                 <a:latin typeface="Calibri"/>
               </a:rPr>
-              <a:t>   – Ocean LiDAR 분야 (Nouguier-Grilli-Guérin 2014, IEEE TGRS) 에서 검증된 표준</a:t>
-            </a:r>
-          </a:p>
-          <a:p>
-            <a:pPr>
-              <a:spcAft>
-                <a:spcPts val="200"/>
+              <a:t>   – R_s = ((cos θ_i − n·cos θ_t) / (cos θ_i + n·cos θ_t))²</a:t>
+            </a:r>
+          </a:p>
+          <a:p>
+            <a:pPr>
+              <a:spcAft>
+                <a:spcPts val="100"/>
               </a:spcAft>
             </a:pPr>
             <a:r>
@@ -8241,13 +7938,45 @@
                 </a:solidFill>
                 <a:latin typeface="Calibri"/>
               </a:rPr>
-              <a:t>   – Falcon K1 의 1550 nm 파장 기준 물 굴절률 n = 1.318 사용</a:t>
-            </a:r>
-          </a:p>
-          <a:p>
-            <a:pPr>
-              <a:spcAft>
-                <a:spcPts val="200"/>
+              <a:t>   – R_p = ((n·cos θ_i − cos θ_t) / (n·cos θ_i + cos θ_t))²</a:t>
+            </a:r>
+          </a:p>
+          <a:p>
+            <a:pPr>
+              <a:spcAft>
+                <a:spcPts val="100"/>
+              </a:spcAft>
+            </a:pPr>
+            <a:r>
+              <a:rPr sz="1000">
+                <a:solidFill>
+                  <a:srgbClr val="1A1A2E"/>
+                </a:solidFill>
+                <a:latin typeface="Calibri"/>
+              </a:rPr>
+              <a:t>   – Step 3: R(θ_i) = (R_s + R_p) / 2 ∈ [0, 1]</a:t>
+            </a:r>
+          </a:p>
+          <a:p>
+            <a:pPr>
+              <a:spcAft>
+                <a:spcPts val="100"/>
+              </a:spcAft>
+            </a:pPr>
+            <a:r>
+              <a:rPr sz="1000">
+                <a:solidFill>
+                  <a:srgbClr val="1A1A2E"/>
+                </a:solidFill>
+                <a:latin typeface="Calibri"/>
+              </a:rPr>
+              <a:t>   – Step 4 (return prob): P = η · R · cos(θ_i) / (d/d_ref)²</a:t>
+            </a:r>
+          </a:p>
+          <a:p>
+            <a:pPr>
+              <a:spcAft>
+                <a:spcPts val="100"/>
               </a:spcAft>
             </a:pPr>
             <a:r>
@@ -8258,7 +7987,7 @@
           <a:p>
             <a:pPr>
               <a:spcAft>
-                <a:spcPts val="200"/>
+                <a:spcPts val="100"/>
               </a:spcAft>
             </a:pPr>
             <a:r>
@@ -8277,7 +8006,7 @@
                 </a:solidFill>
                 <a:latin typeface="Calibri"/>
               </a:rPr>
-              <a:t>Geometric shadowing — 별도 모델 없음</a:t>
+              <a:t>물리적 해석 — R(θ_i) 의 의미</a:t>
             </a:r>
             <a:r>
               <a:rPr sz="1000" b="0">
@@ -8292,7 +8021,7 @@
           <a:p>
             <a:pPr>
               <a:spcAft>
-                <a:spcPts val="200"/>
+                <a:spcPts val="100"/>
               </a:spcAft>
             </a:pPr>
             <a:r>
@@ -8302,13 +8031,13 @@
                 </a:solidFill>
                 <a:latin typeface="Calibri"/>
               </a:rPr>
-              <a:t>   – 앞쪽 큰 파도가 뒤쪽을 가림 — ray tracing 의 first-hit 결과로 자동 처리</a:t>
-            </a:r>
-          </a:p>
-          <a:p>
-            <a:pPr>
-              <a:spcAft>
-                <a:spcPts val="200"/>
+              <a:t>   – θ_i = 0° (수직 입사): R ≈ 0.02 → 2% 만 반사, 98% 굴절 → 점 검출 잘 됨</a:t>
+            </a:r>
+          </a:p>
+          <a:p>
+            <a:pPr>
+              <a:spcAft>
+                <a:spcPts val="100"/>
               </a:spcAft>
             </a:pPr>
             <a:r>
@@ -8318,13 +8047,45 @@
                 </a:solidFill>
                 <a:latin typeface="Calibri"/>
               </a:rPr>
-              <a:t>   – 광선 직진 + 첫 충돌점 측정 = geometric optics 의 자연 결과 (추가 가정 0)</a:t>
-            </a:r>
-          </a:p>
-          <a:p>
-            <a:pPr>
-              <a:spcAft>
-                <a:spcPts val="200"/>
+              <a:t>   – θ_i → 90° (grazing, 표면과 평행): R → 1 → 거의 모두 specular 반사</a:t>
+            </a:r>
+          </a:p>
+          <a:p>
+            <a:pPr>
+              <a:spcAft>
+                <a:spcPts val="100"/>
+              </a:spcAft>
+            </a:pPr>
+            <a:r>
+              <a:rPr sz="1000">
+                <a:solidFill>
+                  <a:srgbClr val="1A1A2E"/>
+                </a:solidFill>
+                <a:latin typeface="Calibri"/>
+              </a:rPr>
+              <a:t>   – → ray 가 LiDAR 가 아닌 다른 방향으로 모두 반사 → 점 누락</a:t>
+            </a:r>
+          </a:p>
+          <a:p>
+            <a:pPr>
+              <a:spcAft>
+                <a:spcPts val="100"/>
+              </a:spcAft>
+            </a:pPr>
+            <a:r>
+              <a:rPr sz="1000">
+                <a:solidFill>
+                  <a:srgbClr val="1A1A2E"/>
+                </a:solidFill>
+                <a:latin typeface="Calibri"/>
+              </a:rPr>
+              <a:t>   – → 비스듬히 들어올수록 raydrop 확률 ↑ (실제 marine LiDAR 의 핵심 현상)</a:t>
+            </a:r>
+          </a:p>
+          <a:p>
+            <a:pPr>
+              <a:spcAft>
+                <a:spcPts val="100"/>
               </a:spcAft>
             </a:pPr>
             <a:r>
@@ -8335,7 +8096,7 @@
           <a:p>
             <a:pPr>
               <a:spcAft>
-                <a:spcPts val="200"/>
+                <a:spcPts val="100"/>
               </a:spcAft>
             </a:pPr>
             <a:r>
@@ -8354,7 +8115,7 @@
                 </a:solidFill>
                 <a:latin typeface="Calibri"/>
               </a:rPr>
-              <a:t>검증 (validation)</a:t>
+              <a:t>Geometric shadowing</a:t>
             </a:r>
             <a:r>
               <a:rPr sz="1000" b="0">
@@ -8363,13 +8124,13 @@
                 </a:solidFill>
                 <a:latin typeface="Calibri"/>
               </a:rPr>
-              <a:t>:</a:t>
-            </a:r>
-          </a:p>
-          <a:p>
-            <a:pPr>
-              <a:spcAft>
-                <a:spcPts val="200"/>
+              <a:t>: ray tracing first-hit 의 자연 결과 (추가 모델 0)</a:t>
+            </a:r>
+          </a:p>
+          <a:p>
+            <a:pPr>
+              <a:spcAft>
+                <a:spcPts val="100"/>
               </a:spcAft>
             </a:pPr>
             <a:r>
@@ -8379,13 +8140,31 @@
                 </a:solidFill>
                 <a:latin typeface="Calibri"/>
               </a:rPr>
-              <a:t>   – ① 108 unit test 통과 — ray tracing 정확성, Fresnel 계산, shadowing edge case 모두 검증</a:t>
-            </a:r>
-          </a:p>
-          <a:p>
-            <a:pPr>
-              <a:spcAft>
-                <a:spcPts val="200"/>
+              <a:t>• </a:t>
+            </a:r>
+            <a:r>
+              <a:rPr sz="1000" b="1">
+                <a:solidFill>
+                  <a:srgbClr val="1A1A2E"/>
+                </a:solidFill>
+                <a:latin typeface="Calibri"/>
+              </a:rPr>
+              <a:t>검증</a:t>
+            </a:r>
+            <a:r>
+              <a:rPr sz="1000" b="0">
+                <a:solidFill>
+                  <a:srgbClr val="1A1A2E"/>
+                </a:solidFill>
+                <a:latin typeface="Calibri"/>
+              </a:rPr>
+              <a:t>: 108 unit test + 110 episode + sea trial 데이터와 점 분포 일치</a:t>
+            </a:r>
+          </a:p>
+          <a:p>
+            <a:pPr>
+              <a:spcAft>
+                <a:spcPts val="100"/>
               </a:spcAft>
             </a:pPr>
             <a:r>
@@ -8395,49 +8174,6 @@
                 </a:solidFill>
                 <a:latin typeface="Calibri"/>
               </a:rPr>
-              <a:t>   – ② 110 episode 합성 dataset — BF2–BF7 × N=1–30 다양한 sea state 에서 동작 확인</a:t>
-            </a:r>
-          </a:p>
-          <a:p>
-            <a:pPr>
-              <a:spcAft>
-                <a:spcPts val="200"/>
-              </a:spcAft>
-            </a:pPr>
-            <a:r>
-              <a:rPr sz="1000">
-                <a:solidFill>
-                  <a:srgbClr val="1A1A2E"/>
-                </a:solidFill>
-                <a:latin typeface="Calibri"/>
-              </a:rPr>
-              <a:t>   – ③ Sea trial 실측 LiDAR 데이터 (sea_trial_lidar.png) 와 점 분포 패턴 정성 비교 — 일치</a:t>
-            </a:r>
-          </a:p>
-          <a:p>
-            <a:pPr>
-              <a:spcAft>
-                <a:spcPts val="200"/>
-              </a:spcAft>
-            </a:pPr>
-            <a:r>
-              <a:rPr sz="500"/>
-              <a:t> </a:t>
-            </a:r>
-          </a:p>
-          <a:p>
-            <a:pPr>
-              <a:spcAft>
-                <a:spcPts val="200"/>
-              </a:spcAft>
-            </a:pPr>
-            <a:r>
-              <a:rPr sz="1000">
-                <a:solidFill>
-                  <a:srgbClr val="1A1A2E"/>
-                </a:solidFill>
-                <a:latin typeface="Calibri"/>
-              </a:rPr>
               <a:t>• </a:t>
             </a:r>
             <a:r>
@@ -8447,7 +8183,7 @@
                 </a:solidFill>
                 <a:latin typeface="Calibri"/>
               </a:rPr>
-              <a:t>정직한 한계</a:t>
+              <a:t>한계</a:t>
             </a:r>
             <a:r>
               <a:rPr sz="1000" b="0">
@@ -8456,55 +8192,7 @@
                 </a:solidFill>
                 <a:latin typeface="Calibri"/>
               </a:rPr>
-              <a:t>:</a:t>
-            </a:r>
-          </a:p>
-          <a:p>
-            <a:pPr>
-              <a:spcAft>
-                <a:spcPts val="200"/>
-              </a:spcAft>
-            </a:pPr>
-            <a:r>
-              <a:rPr sz="1000">
-                <a:solidFill>
-                  <a:srgbClr val="1A1A2E"/>
-                </a:solidFill>
-                <a:latin typeface="Calibri"/>
-              </a:rPr>
-              <a:t>   – 미세파 (capillary, mm 단위 surface roughness): 실제 LiDAR raydrop 에 추가 영향, 우리는 미반영</a:t>
-            </a:r>
-          </a:p>
-          <a:p>
-            <a:pPr>
-              <a:spcAft>
-                <a:spcPts val="200"/>
-              </a:spcAft>
-            </a:pPr>
-            <a:r>
-              <a:rPr sz="1000">
-                <a:solidFill>
-                  <a:srgbClr val="1A1A2E"/>
-                </a:solidFill>
-                <a:latin typeface="Calibri"/>
-              </a:rPr>
-              <a:t>   – Foam, white cap (BF6 이상): wave breaking 시 발생, LWT family 처리 못 함</a:t>
-            </a:r>
-          </a:p>
-          <a:p>
-            <a:pPr>
-              <a:spcAft>
-                <a:spcPts val="200"/>
-              </a:spcAft>
-            </a:pPr>
-            <a:r>
-              <a:rPr sz="1000">
-                <a:solidFill>
-                  <a:srgbClr val="1A1A2E"/>
-                </a:solidFill>
-                <a:latin typeface="Calibri"/>
-              </a:rPr>
-              <a:t>   – Operational sea state (BF2–BF6) 에서는 부차적 효과로 가정</a:t>
+              <a:t>: 미세파 (capillary), foam, breaking 미반영 (BF6 이하 부차적)</a:t>
             </a:r>
           </a:p>
         </p:txBody>
@@ -10950,14 +10638,14 @@
               </a:defRPr>
             </a:pPr>
             <a:r>
-              <a:t>한 episode 의 한 시점 — 좌측 GT, 중앙 WaveSplat 추정, 우측 오차 (Error = GT − WaveSplat)</a:t>
+              <a:t>단순 case (BF3 / N=2) — 위 row: 2D heatmap, 아래 row: 3D surface</a:t>
             </a:r>
           </a:p>
         </p:txBody>
       </p:sp>
       <p:pic>
         <p:nvPicPr>
-          <p:cNvPr id="5" name="Picture 4" descr="demo_wavesplat_static.png"/>
+          <p:cNvPr id="5" name="Picture 4" descr="fig_demo_simple_2d3d.png"/>
           <p:cNvPicPr>
             <a:picLocks noChangeAspect="1"/>
           </p:cNvPicPr>
@@ -10971,8 +10659,8 @@
         </p:blipFill>
         <p:spPr>
           <a:xfrm>
-            <a:off x="365760" y="1554480"/>
-            <a:ext cx="11430000" cy="3117974"/>
+            <a:off x="274320" y="1554480"/>
+            <a:ext cx="11612880" cy="6169992"/>
           </a:xfrm>
           <a:prstGeom prst="rect">
             <a:avLst/>
@@ -10982,147 +10670,6 @@
       <p:sp>
         <p:nvSpPr>
           <p:cNvPr id="6" name="TextBox 5"/>
-          <p:cNvSpPr txBox="1"/>
-          <p:nvPr/>
-        </p:nvSpPr>
-        <p:spPr>
-          <a:xfrm>
-            <a:off x="457200" y="5212080"/>
-            <a:ext cx="11247120" cy="1280160"/>
-          </a:xfrm>
-          <a:prstGeom prst="rect">
-            <a:avLst/>
-          </a:prstGeom>
-          <a:noFill/>
-        </p:spPr>
-        <p:txBody>
-          <a:bodyPr wrap="square">
-            <a:spAutoFit/>
-          </a:bodyPr>
-          <a:lstStyle/>
-          <a:p>
-            <a:pPr>
-              <a:spcAft>
-                <a:spcPts val="200"/>
-              </a:spcAft>
-            </a:pPr>
-            <a:r>
-              <a:rPr sz="1100">
-                <a:solidFill>
-                  <a:srgbClr val="1A1A2E"/>
-                </a:solidFill>
-                <a:latin typeface="Calibri"/>
-              </a:rPr>
-              <a:t>• </a:t>
-            </a:r>
-            <a:r>
-              <a:rPr sz="1100" b="1">
-                <a:solidFill>
-                  <a:srgbClr val="1A1A2E"/>
-                </a:solidFill>
-                <a:latin typeface="Calibri"/>
-              </a:rPr>
-              <a:t>좌 (GT)</a:t>
-            </a:r>
-            <a:r>
-              <a:rPr sz="1100" b="0">
-                <a:solidFill>
-                  <a:srgbClr val="1A1A2E"/>
-                </a:solidFill>
-                <a:latin typeface="Calibri"/>
-              </a:rPr>
-              <a:t>: Ground Truth η(x, y, t) — 50×50 격자 위 실제 파도 표면 (참값)</a:t>
-            </a:r>
-          </a:p>
-          <a:p>
-            <a:pPr>
-              <a:spcAft>
-                <a:spcPts val="200"/>
-              </a:spcAft>
-            </a:pPr>
-            <a:r>
-              <a:rPr sz="1100">
-                <a:solidFill>
-                  <a:srgbClr val="1A1A2E"/>
-                </a:solidFill>
-                <a:latin typeface="Calibri"/>
-              </a:rPr>
-              <a:t>• </a:t>
-            </a:r>
-            <a:r>
-              <a:rPr sz="1100" b="1">
-                <a:solidFill>
-                  <a:srgbClr val="1A1A2E"/>
-                </a:solidFill>
-                <a:latin typeface="Calibri"/>
-              </a:rPr>
-              <a:t>중 (WaveSplat)</a:t>
-            </a:r>
-            <a:r>
-              <a:rPr sz="1100" b="0">
-                <a:solidFill>
-                  <a:srgbClr val="1A1A2E"/>
-                </a:solidFill>
-                <a:latin typeface="Calibri"/>
-              </a:rPr>
-              <a:t>: WaveSplat 재구성 — 추정된 N 개 sin 파 성분의 합으로 다시 만든 파도 표면</a:t>
-            </a:r>
-          </a:p>
-          <a:p>
-            <a:pPr>
-              <a:spcAft>
-                <a:spcPts val="200"/>
-              </a:spcAft>
-            </a:pPr>
-            <a:r>
-              <a:rPr sz="1100">
-                <a:solidFill>
-                  <a:srgbClr val="1A1A2E"/>
-                </a:solidFill>
-                <a:latin typeface="Calibri"/>
-              </a:rPr>
-              <a:t>• </a:t>
-            </a:r>
-            <a:r>
-              <a:rPr sz="1100" b="1">
-                <a:solidFill>
-                  <a:srgbClr val="1A1A2E"/>
-                </a:solidFill>
-                <a:latin typeface="Calibri"/>
-              </a:rPr>
-              <a:t>우 (Error)</a:t>
-            </a:r>
-            <a:r>
-              <a:rPr sz="1100" b="0">
-                <a:solidFill>
-                  <a:srgbClr val="1A1A2E"/>
-                </a:solidFill>
-                <a:latin typeface="Calibri"/>
-              </a:rPr>
-              <a:t>: 오차 = GT − WaveSplat — 같은 색 스케일로 표시 (잔여 차이가 작을수록 추정 정확)</a:t>
-            </a:r>
-          </a:p>
-          <a:p>
-            <a:pPr>
-              <a:spcAft>
-                <a:spcPts val="200"/>
-              </a:spcAft>
-            </a:pPr>
-            <a:r>
-              <a:rPr sz="1100">
-                <a:solidFill>
-                  <a:srgbClr val="1A1A2E"/>
-                </a:solidFill>
-                <a:latin typeface="Calibri"/>
-              </a:rPr>
-              <a:t>• 색상 의미: blue (음의 변위, trough) → white (수면) → red (양의 변위, crest)</a:t>
-            </a:r>
-          </a:p>
-        </p:txBody>
-      </p:sp>
-      <p:sp>
-        <p:nvSpPr>
-          <p:cNvPr id="7" name="TextBox 6"/>
           <p:cNvSpPr txBox="1"/>
           <p:nvPr/>
         </p:nvSpPr>
@@ -11151,14 +10698,14 @@
               </a:defRPr>
             </a:pPr>
             <a:r>
-              <a:t>📂 paper/figures/demo_wavesplat.gif (animation), fig8_qualitative.pdf (다른 case 들) 참조 · 대표 case 모음은 Appendix C</a:t>
+              <a:t>단순 wave (N=2 성분) 에서 WaveSplat nRMSE ~ 0.05 — Error panel 거의 white. 다양한 case 는 Appendix C 참조.</a:t>
             </a:r>
           </a:p>
         </p:txBody>
       </p:sp>
       <p:sp>
         <p:nvSpPr>
-          <p:cNvPr id="8" name="TextBox 7"/>
+          <p:cNvPr id="7" name="TextBox 6"/>
           <p:cNvSpPr txBox="1"/>
           <p:nvPr/>
         </p:nvSpPr>
@@ -17131,7 +16678,7 @@
         </p:nvGraphicFramePr>
         <p:xfrm>
           <a:off x="365760" y="1691640"/>
-          <a:ext cx="11430000" cy="3200400"/>
+          <a:ext cx="11430000" cy="2743200"/>
         </p:xfrm>
         <a:graphic>
           <a:graphicData uri="http://schemas.openxmlformats.org/drawingml/2006/table">
@@ -17140,14 +16687,13 @@
                 <a:tableStyleId>{5C22544A-7EE6-4342-B048-85BDC9FD1C3A}</a:tableStyleId>
               </a:tblPr>
               <a:tblGrid>
-                <a:gridCol w="1905000"/>
-                <a:gridCol w="1905000"/>
-                <a:gridCol w="1905000"/>
-                <a:gridCol w="1905000"/>
-                <a:gridCol w="1905000"/>
-                <a:gridCol w="1905000"/>
+                <a:gridCol w="2286000"/>
+                <a:gridCol w="2286000"/>
+                <a:gridCol w="2286000"/>
+                <a:gridCol w="2286000"/>
+                <a:gridCol w="2286000"/>
               </a:tblGrid>
-              <a:tr h="400050">
+              <a:tr h="342900">
                 <a:tc>
                   <a:txBody>
                     <a:bodyPr/>
@@ -17155,7 +16701,7 @@
                     <a:p>
                       <a:pPr algn="ctr"/>
                       <a:r>
-                        <a:rPr sz="1000" b="1">
+                        <a:rPr sz="1100" b="1">
                           <a:solidFill>
                             <a:srgbClr val="FFFFFF"/>
                           </a:solidFill>
@@ -17177,7 +16723,7 @@
                     <a:p>
                       <a:pPr algn="ctr"/>
                       <a:r>
-                        <a:rPr sz="1000" b="1">
+                        <a:rPr sz="1100" b="1">
                           <a:solidFill>
                             <a:srgbClr val="FFFFFF"/>
                           </a:solidFill>
@@ -17199,7 +16745,7 @@
                     <a:p>
                       <a:pPr algn="ctr"/>
                       <a:r>
-                        <a:rPr sz="1000" b="1">
+                        <a:rPr sz="1100" b="1">
                           <a:solidFill>
                             <a:srgbClr val="FFFFFF"/>
                           </a:solidFill>
@@ -17221,7 +16767,7 @@
                     <a:p>
                       <a:pPr algn="ctr"/>
                       <a:r>
-                        <a:rPr sz="1000" b="1">
+                        <a:rPr sz="1100" b="1">
                           <a:solidFill>
                             <a:srgbClr val="FFFFFF"/>
                           </a:solidFill>
@@ -17243,7 +16789,7 @@
                     <a:p>
                       <a:pPr algn="ctr"/>
                       <a:r>
-                        <a:rPr sz="1000" b="1">
+                        <a:rPr sz="1100" b="1">
                           <a:solidFill>
                             <a:srgbClr val="FFFFFF"/>
                           </a:solidFill>
@@ -17258,37 +16804,15 @@
                     </a:solidFill>
                   </a:tcPr>
                 </a:tc>
-                <a:tc>
-                  <a:txBody>
-                    <a:bodyPr/>
-                    <a:lstStyle/>
-                    <a:p>
-                      <a:pPr algn="ctr"/>
-                      <a:r>
-                        <a:rPr sz="1000" b="1">
-                          <a:solidFill>
-                            <a:srgbClr val="FFFFFF"/>
-                          </a:solidFill>
-                        </a:rPr>
-                        <a:t>용도</a:t>
-                      </a:r>
-                    </a:p>
-                  </a:txBody>
-                  <a:tcPr>
-                    <a:solidFill>
-                      <a:srgbClr val="E8553A"/>
-                    </a:solidFill>
-                  </a:tcPr>
-                </a:tc>
               </a:tr>
-              <a:tr h="400050">
+              <a:tr h="342900">
                 <a:tc>
                   <a:txBody>
                     <a:bodyPr wrap="square"/>
                     <a:lstStyle/>
                     <a:p>
                       <a:r>
-                        <a:rPr sz="1000">
+                        <a:rPr sz="1100">
                           <a:solidFill>
                             <a:srgbClr val="1A1A2E"/>
                           </a:solidFill>
@@ -17309,7 +16833,7 @@
                     <a:lstStyle/>
                     <a:p>
                       <a:r>
-                        <a:rPr sz="1000">
+                        <a:rPr sz="1100">
                           <a:solidFill>
                             <a:srgbClr val="1A1A2E"/>
                           </a:solidFill>
@@ -17330,7 +16854,7 @@
                     <a:lstStyle/>
                     <a:p>
                       <a:r>
-                        <a:rPr sz="1000">
+                        <a:rPr sz="1100">
                           <a:solidFill>
                             <a:srgbClr val="1A1A2E"/>
                           </a:solidFill>
@@ -17351,7 +16875,7 @@
                     <a:lstStyle/>
                     <a:p>
                       <a:r>
-                        <a:rPr sz="1000">
+                        <a:rPr sz="1100">
                           <a:solidFill>
                             <a:srgbClr val="1A1A2E"/>
                           </a:solidFill>
@@ -17372,7 +16896,7 @@
                     <a:lstStyle/>
                     <a:p>
                       <a:r>
-                        <a:rPr sz="1000">
+                        <a:rPr sz="1100">
                           <a:solidFill>
                             <a:srgbClr val="1A1A2E"/>
                           </a:solidFill>
@@ -17387,36 +16911,15 @@
                     </a:solidFill>
                   </a:tcPr>
                 </a:tc>
+              </a:tr>
+              <a:tr h="342900">
                 <a:tc>
                   <a:txBody>
                     <a:bodyPr wrap="square"/>
                     <a:lstStyle/>
                     <a:p>
                       <a:r>
-                        <a:rPr sz="1000">
-                          <a:solidFill>
-                            <a:srgbClr val="1A1A2E"/>
-                          </a:solidFill>
-                        </a:rPr>
-                        <a:t>단순 wave, 알고리즘 sanity check</a:t>
-                      </a:r>
-                    </a:p>
-                  </a:txBody>
-                  <a:tcPr>
-                    <a:solidFill>
-                      <a:srgbClr val="F0F4F8"/>
-                    </a:solidFill>
-                  </a:tcPr>
-                </a:tc>
-              </a:tr>
-              <a:tr h="400050">
-                <a:tc>
-                  <a:txBody>
-                    <a:bodyPr wrap="square"/>
-                    <a:lstStyle/>
-                    <a:p>
-                      <a:r>
-                        <a:rPr sz="1000">
+                        <a:rPr sz="1100">
                           <a:solidFill>
                             <a:srgbClr val="1A1A2E"/>
                           </a:solidFill>
@@ -17437,7 +16940,7 @@
                     <a:lstStyle/>
                     <a:p>
                       <a:r>
-                        <a:rPr sz="1000">
+                        <a:rPr sz="1100">
                           <a:solidFill>
                             <a:srgbClr val="1A1A2E"/>
                           </a:solidFill>
@@ -17458,7 +16961,7 @@
                     <a:lstStyle/>
                     <a:p>
                       <a:r>
-                        <a:rPr sz="1000">
+                        <a:rPr sz="1100">
                           <a:solidFill>
                             <a:srgbClr val="1A1A2E"/>
                           </a:solidFill>
@@ -17479,7 +16982,7 @@
                     <a:lstStyle/>
                     <a:p>
                       <a:r>
-                        <a:rPr sz="1000">
+                        <a:rPr sz="1100">
                           <a:solidFill>
                             <a:srgbClr val="1A1A2E"/>
                           </a:solidFill>
@@ -17500,7 +17003,7 @@
                     <a:lstStyle/>
                     <a:p>
                       <a:r>
-                        <a:rPr sz="1000">
+                        <a:rPr sz="1100">
                           <a:solidFill>
                             <a:srgbClr val="1A1A2E"/>
                           </a:solidFill>
@@ -17515,36 +17018,15 @@
                     </a:solidFill>
                   </a:tcPr>
                 </a:tc>
+              </a:tr>
+              <a:tr h="342900">
                 <a:tc>
                   <a:txBody>
                     <a:bodyPr wrap="square"/>
                     <a:lstStyle/>
                     <a:p>
                       <a:r>
-                        <a:rPr sz="1000">
-                          <a:solidFill>
-                            <a:srgbClr val="1A1A2E"/>
-                          </a:solidFill>
-                        </a:rPr>
-                        <a:t>low complexity, 통계 평가용</a:t>
-                      </a:r>
-                    </a:p>
-                  </a:txBody>
-                  <a:tcPr>
-                    <a:solidFill>
-                      <a:srgbClr val="FFFFFF"/>
-                    </a:solidFill>
-                  </a:tcPr>
-                </a:tc>
-              </a:tr>
-              <a:tr h="400050">
-                <a:tc>
-                  <a:txBody>
-                    <a:bodyPr wrap="square"/>
-                    <a:lstStyle/>
-                    <a:p>
-                      <a:r>
-                        <a:rPr sz="1000">
+                        <a:rPr sz="1100">
                           <a:solidFill>
                             <a:srgbClr val="1A1A2E"/>
                           </a:solidFill>
@@ -17565,7 +17047,7 @@
                     <a:lstStyle/>
                     <a:p>
                       <a:r>
-                        <a:rPr sz="1000">
+                        <a:rPr sz="1100">
                           <a:solidFill>
                             <a:srgbClr val="1A1A2E"/>
                           </a:solidFill>
@@ -17586,7 +17068,7 @@
                     <a:lstStyle/>
                     <a:p>
                       <a:r>
-                        <a:rPr sz="1000">
+                        <a:rPr sz="1100">
                           <a:solidFill>
                             <a:srgbClr val="1A1A2E"/>
                           </a:solidFill>
@@ -17607,7 +17089,7 @@
                     <a:lstStyle/>
                     <a:p>
                       <a:r>
-                        <a:rPr sz="1000">
+                        <a:rPr sz="1100">
                           <a:solidFill>
                             <a:srgbClr val="1A1A2E"/>
                           </a:solidFill>
@@ -17628,7 +17110,7 @@
                     <a:lstStyle/>
                     <a:p>
                       <a:r>
-                        <a:rPr sz="1000">
+                        <a:rPr sz="1100">
                           <a:solidFill>
                             <a:srgbClr val="1A1A2E"/>
                           </a:solidFill>
@@ -17643,36 +17125,15 @@
                     </a:solidFill>
                   </a:tcPr>
                 </a:tc>
+              </a:tr>
+              <a:tr h="342900">
                 <a:tc>
                   <a:txBody>
                     <a:bodyPr wrap="square"/>
                     <a:lstStyle/>
                     <a:p>
                       <a:r>
-                        <a:rPr sz="1000">
-                          <a:solidFill>
-                            <a:srgbClr val="1A1A2E"/>
-                          </a:solidFill>
-                        </a:rPr>
-                        <a:t>operational sea state 중심 평가</a:t>
-                      </a:r>
-                    </a:p>
-                  </a:txBody>
-                  <a:tcPr>
-                    <a:solidFill>
-                      <a:srgbClr val="F0F4F8"/>
-                    </a:solidFill>
-                  </a:tcPr>
-                </a:tc>
-              </a:tr>
-              <a:tr h="400050">
-                <a:tc>
-                  <a:txBody>
-                    <a:bodyPr wrap="square"/>
-                    <a:lstStyle/>
-                    <a:p>
-                      <a:r>
-                        <a:rPr sz="1000">
+                        <a:rPr sz="1100">
                           <a:solidFill>
                             <a:srgbClr val="1A1A2E"/>
                           </a:solidFill>
@@ -17693,7 +17154,7 @@
                     <a:lstStyle/>
                     <a:p>
                       <a:r>
-                        <a:rPr sz="1000">
+                        <a:rPr sz="1100">
                           <a:solidFill>
                             <a:srgbClr val="1A1A2E"/>
                           </a:solidFill>
@@ -17714,7 +17175,7 @@
                     <a:lstStyle/>
                     <a:p>
                       <a:r>
-                        <a:rPr sz="1000">
+                        <a:rPr sz="1100">
                           <a:solidFill>
                             <a:srgbClr val="1A1A2E"/>
                           </a:solidFill>
@@ -17735,7 +17196,7 @@
                     <a:lstStyle/>
                     <a:p>
                       <a:r>
-                        <a:rPr sz="1000">
+                        <a:rPr sz="1100">
                           <a:solidFill>
                             <a:srgbClr val="1A1A2E"/>
                           </a:solidFill>
@@ -17756,7 +17217,7 @@
                     <a:lstStyle/>
                     <a:p>
                       <a:r>
-                        <a:rPr sz="1000">
+                        <a:rPr sz="1100">
                           <a:solidFill>
                             <a:srgbClr val="1A1A2E"/>
                           </a:solidFill>
@@ -17771,36 +17232,15 @@
                     </a:solidFill>
                   </a:tcPr>
                 </a:tc>
+              </a:tr>
+              <a:tr h="342900">
                 <a:tc>
                   <a:txBody>
                     <a:bodyPr wrap="square"/>
                     <a:lstStyle/>
                     <a:p>
                       <a:r>
-                        <a:rPr sz="1000">
-                          <a:solidFill>
-                            <a:srgbClr val="1A1A2E"/>
-                          </a:solidFill>
-                        </a:rPr>
-                        <a:t>high complexity boundary</a:t>
-                      </a:r>
-                    </a:p>
-                  </a:txBody>
-                  <a:tcPr>
-                    <a:solidFill>
-                      <a:srgbClr val="FFFFFF"/>
-                    </a:solidFill>
-                  </a:tcPr>
-                </a:tc>
-              </a:tr>
-              <a:tr h="400050">
-                <a:tc>
-                  <a:txBody>
-                    <a:bodyPr wrap="square"/>
-                    <a:lstStyle/>
-                    <a:p>
-                      <a:r>
-                        <a:rPr sz="1000">
+                        <a:rPr sz="1100">
                           <a:solidFill>
                             <a:srgbClr val="1A1A2E"/>
                           </a:solidFill>
@@ -17821,7 +17261,7 @@
                     <a:lstStyle/>
                     <a:p>
                       <a:r>
-                        <a:rPr sz="1000">
+                        <a:rPr sz="1100">
                           <a:solidFill>
                             <a:srgbClr val="1A1A2E"/>
                           </a:solidFill>
@@ -17842,7 +17282,7 @@
                     <a:lstStyle/>
                     <a:p>
                       <a:r>
-                        <a:rPr sz="1000">
+                        <a:rPr sz="1100">
                           <a:solidFill>
                             <a:srgbClr val="1A1A2E"/>
                           </a:solidFill>
@@ -17863,7 +17303,7 @@
                     <a:lstStyle/>
                     <a:p>
                       <a:r>
-                        <a:rPr sz="1000">
+                        <a:rPr sz="1100">
                           <a:solidFill>
                             <a:srgbClr val="1A1A2E"/>
                           </a:solidFill>
@@ -17884,7 +17324,7 @@
                     <a:lstStyle/>
                     <a:p>
                       <a:r>
-                        <a:rPr sz="1000">
+                        <a:rPr sz="1100">
                           <a:solidFill>
                             <a:srgbClr val="1A1A2E"/>
                           </a:solidFill>
@@ -17899,36 +17339,15 @@
                     </a:solidFill>
                   </a:tcPr>
                 </a:tc>
+              </a:tr>
+              <a:tr h="342900">
                 <a:tc>
                   <a:txBody>
                     <a:bodyPr wrap="square"/>
                     <a:lstStyle/>
                     <a:p>
                       <a:r>
-                        <a:rPr sz="1000">
-                          <a:solidFill>
-                            <a:srgbClr val="1A1A2E"/>
-                          </a:solidFill>
-                        </a:rPr>
-                        <a:t>operational 한계 검증</a:t>
-                      </a:r>
-                    </a:p>
-                  </a:txBody>
-                  <a:tcPr>
-                    <a:solidFill>
-                      <a:srgbClr val="F0F4F8"/>
-                    </a:solidFill>
-                  </a:tcPr>
-                </a:tc>
-              </a:tr>
-              <a:tr h="400050">
-                <a:tc>
-                  <a:txBody>
-                    <a:bodyPr wrap="square"/>
-                    <a:lstStyle/>
-                    <a:p>
-                      <a:r>
-                        <a:rPr sz="1000">
+                        <a:rPr sz="1100">
                           <a:solidFill>
                             <a:srgbClr val="1A1A2E"/>
                           </a:solidFill>
@@ -17949,7 +17368,7 @@
                     <a:lstStyle/>
                     <a:p>
                       <a:r>
-                        <a:rPr sz="1000">
+                        <a:rPr sz="1100">
                           <a:solidFill>
                             <a:srgbClr val="1A1A2E"/>
                           </a:solidFill>
@@ -17970,7 +17389,7 @@
                     <a:lstStyle/>
                     <a:p>
                       <a:r>
-                        <a:rPr sz="1000">
+                        <a:rPr sz="1100">
                           <a:solidFill>
                             <a:srgbClr val="1A1A2E"/>
                           </a:solidFill>
@@ -17991,7 +17410,7 @@
                     <a:lstStyle/>
                     <a:p>
                       <a:r>
-                        <a:rPr sz="1000">
+                        <a:rPr sz="1100">
                           <a:solidFill>
                             <a:srgbClr val="1A1A2E"/>
                           </a:solidFill>
@@ -18012,7 +17431,7 @@
                     <a:lstStyle/>
                     <a:p>
                       <a:r>
-                        <a:rPr sz="1000">
+                        <a:rPr sz="1100">
                           <a:solidFill>
                             <a:srgbClr val="1A1A2E"/>
                           </a:solidFill>
@@ -18027,36 +17446,15 @@
                     </a:solidFill>
                   </a:tcPr>
                 </a:tc>
+              </a:tr>
+              <a:tr h="342900">
                 <a:tc>
                   <a:txBody>
                     <a:bodyPr wrap="square"/>
                     <a:lstStyle/>
                     <a:p>
                       <a:r>
-                        <a:rPr sz="1000">
-                          <a:solidFill>
-                            <a:srgbClr val="1A1A2E"/>
-                          </a:solidFill>
-                        </a:rPr>
-                        <a:t>extreme sea state, LWT 한계</a:t>
-                      </a:r>
-                    </a:p>
-                  </a:txBody>
-                  <a:tcPr>
-                    <a:solidFill>
-                      <a:srgbClr val="FFFFFF"/>
-                    </a:solidFill>
-                  </a:tcPr>
-                </a:tc>
-              </a:tr>
-              <a:tr h="400050">
-                <a:tc>
-                  <a:txBody>
-                    <a:bodyPr wrap="square"/>
-                    <a:lstStyle/>
-                    <a:p>
-                      <a:r>
-                        <a:rPr sz="1000">
+                        <a:rPr sz="1100">
                           <a:solidFill>
                             <a:srgbClr val="1A1A2E"/>
                           </a:solidFill>
@@ -18077,7 +17475,7 @@
                     <a:lstStyle/>
                     <a:p>
                       <a:r>
-                        <a:rPr sz="1000">
+                        <a:rPr sz="1100">
                           <a:solidFill>
                             <a:srgbClr val="1A1A2E"/>
                           </a:solidFill>
@@ -18098,7 +17496,7 @@
                     <a:lstStyle/>
                     <a:p>
                       <a:r>
-                        <a:rPr sz="1000">
+                        <a:rPr sz="1100">
                           <a:solidFill>
                             <a:srgbClr val="1A1A2E"/>
                           </a:solidFill>
@@ -18119,7 +17517,7 @@
                     <a:lstStyle/>
                     <a:p>
                       <a:r>
-                        <a:rPr sz="1000">
+                        <a:rPr sz="1100">
                           <a:solidFill>
                             <a:srgbClr val="1A1A2E"/>
                           </a:solidFill>
@@ -18140,7 +17538,7 @@
                     <a:lstStyle/>
                     <a:p>
                       <a:r>
-                        <a:rPr sz="1000">
+                        <a:rPr sz="1100">
                           <a:solidFill>
                             <a:srgbClr val="1A1A2E"/>
                           </a:solidFill>
@@ -18155,27 +17553,6 @@
                     </a:solidFill>
                   </a:tcPr>
                 </a:tc>
-                <a:tc>
-                  <a:txBody>
-                    <a:bodyPr wrap="square"/>
-                    <a:lstStyle/>
-                    <a:p>
-                      <a:r>
-                        <a:rPr sz="1000">
-                          <a:solidFill>
-                            <a:srgbClr val="1A1A2E"/>
-                          </a:solidFill>
-                        </a:rPr>
-                        <a:t>raydrop η, scale 등 calibration 용</a:t>
-                      </a:r>
-                    </a:p>
-                  </a:txBody>
-                  <a:tcPr>
-                    <a:solidFill>
-                      <a:srgbClr val="F0F4F8"/>
-                    </a:solidFill>
-                  </a:tcPr>
-                </a:tc>
               </a:tr>
             </a:tbl>
           </a:graphicData>
@@ -18184,6 +17561,133 @@
       <p:sp>
         <p:nvSpPr>
           <p:cNvPr id="6" name="TextBox 5"/>
+          <p:cNvSpPr txBox="1"/>
+          <p:nvPr/>
+        </p:nvSpPr>
+        <p:spPr>
+          <a:xfrm>
+            <a:off x="365760" y="4572000"/>
+            <a:ext cx="11430000" cy="365760"/>
+          </a:xfrm>
+          <a:prstGeom prst="rect">
+            <a:avLst/>
+          </a:prstGeom>
+          <a:noFill/>
+        </p:spPr>
+        <p:txBody>
+          <a:bodyPr wrap="square">
+            <a:spAutoFit/>
+          </a:bodyPr>
+          <a:lstStyle/>
+          <a:p>
+            <a:pPr algn="l">
+              <a:defRPr sz="1200" b="1" i="0">
+                <a:solidFill>
+                  <a:srgbClr val="007ACC"/>
+                </a:solidFill>
+                <a:latin typeface="Calibri"/>
+              </a:defRPr>
+            </a:pPr>
+            <a:r>
+              <a:t>용어 설명:</a:t>
+            </a:r>
+          </a:p>
+        </p:txBody>
+      </p:sp>
+      <p:sp>
+        <p:nvSpPr>
+          <p:cNvPr id="7" name="TextBox 6"/>
+          <p:cNvSpPr txBox="1"/>
+          <p:nvPr/>
+        </p:nvSpPr>
+        <p:spPr>
+          <a:xfrm>
+            <a:off x="548640" y="4937760"/>
+            <a:ext cx="11430000" cy="914400"/>
+          </a:xfrm>
+          <a:prstGeom prst="rect">
+            <a:avLst/>
+          </a:prstGeom>
+          <a:noFill/>
+        </p:spPr>
+        <p:txBody>
+          <a:bodyPr wrap="square">
+            <a:spAutoFit/>
+          </a:bodyPr>
+          <a:lstStyle/>
+          <a:p>
+            <a:pPr>
+              <a:spcAft>
+                <a:spcPts val="200"/>
+              </a:spcAft>
+            </a:pPr>
+            <a:r>
+              <a:rPr sz="1100">
+                <a:solidFill>
+                  <a:srgbClr val="1A1A2E"/>
+                </a:solidFill>
+                <a:latin typeface="Calibri"/>
+              </a:rPr>
+              <a:t>• </a:t>
+            </a:r>
+            <a:r>
+              <a:rPr sz="1100" b="1">
+                <a:solidFill>
+                  <a:srgbClr val="1A1A2E"/>
+                </a:solidFill>
+                <a:latin typeface="Calibri"/>
+              </a:rPr>
+              <a:t>ε (steepness, 가파름)</a:t>
+            </a:r>
+            <a:r>
+              <a:rPr sz="1100" b="0">
+                <a:solidFill>
+                  <a:srgbClr val="1A1A2E"/>
+                </a:solidFill>
+                <a:latin typeface="Calibri"/>
+              </a:rPr>
+              <a:t>: H_s · k_p / 2 — 유의파고와 첨두파수의 곱. 클수록 비선형성 강함 (ε&lt;0.07 = LWT 신뢰 영역, ε&gt;0.10 = breaking 위험)</a:t>
+            </a:r>
+          </a:p>
+          <a:p>
+            <a:pPr>
+              <a:spcAft>
+                <a:spcPts val="200"/>
+              </a:spcAft>
+            </a:pPr>
+            <a:r>
+              <a:rPr sz="1100">
+                <a:solidFill>
+                  <a:srgbClr val="1A1A2E"/>
+                </a:solidFill>
+                <a:latin typeface="Calibri"/>
+              </a:rPr>
+              <a:t>• </a:t>
+            </a:r>
+            <a:r>
+              <a:rPr sz="1100" b="1">
+                <a:solidFill>
+                  <a:srgbClr val="1A1A2E"/>
+                </a:solidFill>
+                <a:latin typeface="Calibri"/>
+              </a:rPr>
+              <a:t>Seed</a:t>
+            </a:r>
+            <a:r>
+              <a:rPr sz="1100" b="0">
+                <a:solidFill>
+                  <a:srgbClr val="1A1A2E"/>
+                </a:solidFill>
+                <a:latin typeface="Calibri"/>
+              </a:rPr>
+              <a:t>: 난수 발생기의 초기값 — 같은 (sea state, N) 에 다른 seed 로 여러 realization 생성. 통계 평가의 신뢰도 ↑</a:t>
+            </a:r>
+          </a:p>
+        </p:txBody>
+      </p:sp>
+      <p:sp>
+        <p:nvSpPr>
+          <p:cNvPr id="8" name="TextBox 7"/>
           <p:cNvSpPr txBox="1"/>
           <p:nvPr/>
         </p:nvSpPr>
@@ -18219,7 +17723,7 @@
       </p:sp>
       <p:sp>
         <p:nvSpPr>
-          <p:cNvPr id="7" name="TextBox 6"/>
+          <p:cNvPr id="9" name="TextBox 8"/>
           <p:cNvSpPr txBox="1"/>
           <p:nvPr/>
         </p:nvSpPr>
@@ -18306,7 +17810,7 @@
       </p:sp>
       <p:sp>
         <p:nvSpPr>
-          <p:cNvPr id="8" name="TextBox 7"/>
+          <p:cNvPr id="10" name="TextBox 9"/>
           <p:cNvSpPr txBox="1"/>
           <p:nvPr/>
         </p:nvSpPr>
@@ -18342,7 +17846,7 @@
       </p:sp>
       <p:sp>
         <p:nvSpPr>
-          <p:cNvPr id="9" name="TextBox 8"/>
+          <p:cNvPr id="11" name="TextBox 10"/>
           <p:cNvSpPr txBox="1"/>
           <p:nvPr/>
         </p:nvSpPr>
@@ -18429,7 +17933,7 @@
       </p:sp>
       <p:sp>
         <p:nvSpPr>
-          <p:cNvPr id="10" name="TextBox 9"/>
+          <p:cNvPr id="12" name="TextBox 11"/>
           <p:cNvSpPr txBox="1"/>
           <p:nvPr/>
         </p:nvSpPr>
@@ -18520,7 +18024,7 @@
               </a:defRPr>
             </a:pPr>
             <a:r>
-              <a:t>Appendix C · 대표 case 모음 (GT vs WaveSplat vs ETKF)</a:t>
+              <a:t>Appendix C · 대표 case 모음 (GT vs WaveSplat)</a:t>
             </a:r>
           </a:p>
         </p:txBody>
@@ -18556,7 +18060,7 @@
               </a:defRPr>
             </a:pPr>
             <a:r>
-              <a:t>Appendix C — 다양한 sea state × N 조합의 대표 결과</a:t>
+              <a:t>Appendix C — 단순 case 들의 GT vs WaveSplat (2D + 3D)</a:t>
             </a:r>
           </a:p>
         </p:txBody>
@@ -18592,14 +18096,14 @@
               </a:defRPr>
             </a:pPr>
             <a:r>
-              <a:t>BF3 2-comp (단순) → BF4 15-comp (중간) → BF5 30-comp (복잡) — 한 시점 비교</a:t>
+              <a:t>각 행: BF3 N=2 / BF3 N=5 / BF4 N=5 — 열: GT(2D), WS(2D), Error(2D), GT(3D), WS(3D)</a:t>
             </a:r>
           </a:p>
         </p:txBody>
       </p:sp>
       <p:pic>
         <p:nvPicPr>
-          <p:cNvPr id="5" name="Picture 4" descr="fig8_qualitative-1.png"/>
+          <p:cNvPr id="5" name="Picture 4" descr="fig_appendix_c_cases_2d3d.png"/>
           <p:cNvPicPr>
             <a:picLocks noChangeAspect="1"/>
           </p:cNvPicPr>
@@ -18613,8 +18117,8 @@
         </p:blipFill>
         <p:spPr>
           <a:xfrm>
-            <a:off x="365760" y="1554480"/>
-            <a:ext cx="11430000" cy="7469038"/>
+            <a:off x="274320" y="1554480"/>
+            <a:ext cx="11612880" cy="10589590"/>
           </a:xfrm>
           <a:prstGeom prst="rect">
             <a:avLst/>
@@ -18652,7 +18156,7 @@
               </a:defRPr>
             </a:pPr>
             <a:r>
-              <a:t>Source: paper/figures/fig8_qualitative.pdf — 행 마다 다른 episode, 열 마다 GT / WaveSplat / ETKF / GPR. 단순 wave 일수록 WaveSplat 우위.</a:t>
+              <a:t>Source: scripts/generate_simple_qualitative_figure.py — 옛날 ETKF/GPR 비교 figure 대신 GT/WaveSplat 만으로 새로 생성. Wang 2025 비교는 별도 figure 예정.</a:t>
             </a:r>
           </a:p>
         </p:txBody>
@@ -23299,7 +22803,7 @@
                 </a:solidFill>
                 <a:latin typeface="Calibri"/>
               </a:rPr>
-              <a:t>파도 모델 — Gerstner 파 + JONSWAP 스펙트럼</a:t>
+              <a:t>파도 모델 — Gerstner 파 (1802, rotational exact solution)</a:t>
             </a:r>
             <a:r>
               <a:rPr sz="900" b="0">
@@ -23324,7 +22828,7 @@
                 </a:solidFill>
                 <a:latin typeface="Calibri"/>
               </a:rPr>
-              <a:t>   – η(x, y, t) = Σ_n A_n cos(k_xn·x + k_yn·y − ω_n·t + φ_n) + Gerstner 추가 변위</a:t>
+              <a:t>   – 사인 곡선 LWT (수면 변위만 표현) 의 확장 — 입자의 운동까지 모사</a:t>
             </a:r>
           </a:p>
           <a:p>
@@ -23340,7 +22844,7 @@
                 </a:solidFill>
                 <a:latin typeface="Calibri"/>
               </a:rPr>
-              <a:t>   – Gerstner 1802 의 회전 정확해 — 입자가 원/타원 궤적으로 회전 (Q=0 → 선형, Q&gt;0 → 약비선형)</a:t>
+              <a:t>   – 파도 아래의 물 입자는 *원/타원 궤적으로 회전* (위로 + 진행 방향 → 아래 + 반대 방향)</a:t>
             </a:r>
           </a:p>
           <a:p>
@@ -23356,7 +22860,7 @@
                 </a:solidFill>
                 <a:latin typeface="Calibri"/>
               </a:rPr>
-              <a:t>   – → 합당성: Tessendorf 2001 SIGGRAPH ocean 표준, Dean &amp; Dalrymple 1991 교과서</a:t>
+              <a:t>   – 수식: x = x₀ − Q·A·sin(...), y = y₀ − Q·A·sin(...), z = A·cos(k·x − ω·t + φ)</a:t>
             </a:r>
           </a:p>
           <a:p>
@@ -23372,7 +22876,39 @@
                 </a:solidFill>
                 <a:latin typeface="Calibri"/>
               </a:rPr>
-              <a:t>   – → 검증: Q 제약 (Σ Q·ω·A ≤ 1, 입자 궤적 자체 교차 방지) 의 unit test 통과</a:t>
+              <a:t>   – Q ∈ [0, 1] = 가파름 파라미터 (Q=0: 사인 wave, Q→1: crest sharp / trough flat — Stokes-1 풍)</a:t>
+            </a:r>
+          </a:p>
+          <a:p>
+            <a:pPr>
+              <a:spcAft>
+                <a:spcPts val="100"/>
+              </a:spcAft>
+            </a:pPr>
+            <a:r>
+              <a:rPr sz="900">
+                <a:solidFill>
+                  <a:srgbClr val="1A1A2E"/>
+                </a:solidFill>
+                <a:latin typeface="Calibri"/>
+              </a:rPr>
+              <a:t>   – Q 제약: Σ_n Q_n·ω_n·A_n ≤ 1 (입자 궤적 자체 교차 방지, Tessendorf 2001)</a:t>
+            </a:r>
+          </a:p>
+          <a:p>
+            <a:pPr>
+              <a:spcAft>
+                <a:spcPts val="100"/>
+              </a:spcAft>
+            </a:pPr>
+            <a:r>
+              <a:rPr sz="900">
+                <a:solidFill>
+                  <a:srgbClr val="1A1A2E"/>
+                </a:solidFill>
+                <a:latin typeface="Calibri"/>
+              </a:rPr>
+              <a:t>   – → 합당성: Tessendorf 2001 SIGGRAPH ocean 표준, Dean &amp; Dalrymple 1991 (교과서)</a:t>
             </a:r>
           </a:p>
           <a:p>
@@ -23408,7 +22944,7 @@
                 </a:solidFill>
                 <a:latin typeface="Calibri"/>
               </a:rPr>
-              <a:t>스펙트럼 — JONSWAP (Hasselmann et al. 1973)</a:t>
+              <a:t>스펙트럼 — JONSWAP (Hasselmann 1973, 북해 측정)</a:t>
             </a:r>
             <a:r>
               <a:rPr sz="900" b="0">
@@ -23433,7 +22969,7 @@
                 </a:solidFill>
                 <a:latin typeface="Calibri"/>
               </a:rPr>
-              <a:t>   – S(ω) = α·g²·ω⁻⁵·exp(−5/4·(ω_p/ω)⁴) · γ^r — 북해 측정 데이터 기반</a:t>
+              <a:t>   – S(ω) = α·g²·ω⁻⁵·exp(−5/4·(ω_p/ω)⁴) · γ^r — 입력: H_s, T_p, γ</a:t>
             </a:r>
           </a:p>
           <a:p>
@@ -23449,7 +22985,7 @@
                 </a:solidFill>
                 <a:latin typeface="Calibri"/>
               </a:rPr>
-              <a:t>   – 입력: H_s (유의파고), T_p (첨두주기), γ (peak factor)</a:t>
+              <a:t>   – → N 개 성분의 (A_n, ω_n) sampling, 방향 spreading 으로 (k_xn, k_yn) 분배</a:t>
             </a:r>
           </a:p>
           <a:p>
@@ -23465,7 +23001,7 @@
                 </a:solidFill>
                 <a:latin typeface="Calibri"/>
               </a:rPr>
-              <a:t>   – → 합당성: 해양공학 표준 (ITTC, IACS 채택). 파도 성분 amplitude·주파수 sampling 에 사용</a:t>
+              <a:t>   – → 합당성: 해양공학 표준 (ITTC, IACS 채택)</a:t>
             </a:r>
           </a:p>
           <a:p>
@@ -23501,7 +23037,7 @@
                 </a:solidFill>
                 <a:latin typeface="Calibri"/>
               </a:rPr>
-              <a:t>분산 관계</a:t>
+              <a:t>분산 관계 (Airy 1845)</a:t>
             </a:r>
             <a:r>
               <a:rPr sz="900" b="0">
@@ -23526,23 +23062,7 @@
                 </a:solidFill>
                 <a:latin typeface="Calibri"/>
               </a:rPr>
-              <a:t>   – Airy 1845 의 linear wave theory 결과 — 파도의 주파수와 파수의 표준 관계</a:t>
-            </a:r>
-          </a:p>
-          <a:p>
-            <a:pPr>
-              <a:spcAft>
-                <a:spcPts val="100"/>
-              </a:spcAft>
-            </a:pPr>
-            <a:r>
-              <a:rPr sz="900">
-                <a:solidFill>
-                  <a:srgbClr val="1A1A2E"/>
-                </a:solidFill>
-                <a:latin typeface="Calibri"/>
-              </a:rPr>
-              <a:t>   – → 합당성: 100 년 이상 검증된 표준 (수심 d, 중력 g 만 입력)</a:t>
+              <a:t>   – 파도의 주파수와 파수의 표준 관계 — 100 년 이상 검증</a:t>
             </a:r>
           </a:p>
           <a:p>
@@ -23578,7 +23098,7 @@
                 </a:solidFill>
                 <a:latin typeface="Calibri"/>
               </a:rPr>
-              <a:t>LiDAR 센서 (Falcon K1 spec)</a:t>
+              <a:t>LiDAR (Falcon K1)</a:t>
             </a:r>
             <a:r>
               <a:rPr sz="900" b="0">
@@ -23587,7 +23107,7 @@
                 </a:solidFill>
                 <a:latin typeface="Calibri"/>
               </a:rPr>
-              <a:t>:</a:t>
+              <a:t>: 수평 FOV 120° × 수직 ±5°, 32 채널 × 360 beam, 1550 nm</a:t>
             </a:r>
           </a:p>
           <a:p>
@@ -23603,39 +23123,7 @@
                 </a:solidFill>
                 <a:latin typeface="Calibri"/>
               </a:rPr>
-              <a:t>   – Vessel 위 5 m mount, FOV 수평 120° × 수직 ±5° (선수 방향 반구만, 전방향 360° 아님)</a:t>
-            </a:r>
-          </a:p>
-          <a:p>
-            <a:pPr>
-              <a:spcAft>
-                <a:spcPts val="100"/>
-              </a:spcAft>
-            </a:pPr>
-            <a:r>
-              <a:rPr sz="900">
-                <a:solidFill>
-                  <a:srgbClr val="1A1A2E"/>
-                </a:solidFill>
-                <a:latin typeface="Calibri"/>
-              </a:rPr>
-              <a:t>   – 32 채널 × 360 beam = 11,520 ray / scan, range 10–200 m, 1550 nm 파장</a:t>
-            </a:r>
-          </a:p>
-          <a:p>
-            <a:pPr>
-              <a:spcAft>
-                <a:spcPts val="100"/>
-              </a:spcAft>
-            </a:pPr>
-            <a:r>
-              <a:rPr sz="900">
-                <a:solidFill>
-                  <a:srgbClr val="1A1A2E"/>
-                </a:solidFill>
-                <a:latin typeface="Calibri"/>
-              </a:rPr>
-              <a:t>   – Ray tracing: laser ray 가 파도 표면에 부딪힌 첫 점을 찾음 (Möller-Trumbore 1997)</a:t>
+              <a:t>   – Ray tracing 으로 파도 표면 first-hit 찾음 (Möller-Trumbore 1997)</a:t>
             </a:r>
           </a:p>
           <a:p>
@@ -23671,7 +23159,7 @@
                 </a:solidFill>
                 <a:latin typeface="Calibri"/>
               </a:rPr>
-              <a:t>Vessel motion 처리</a:t>
+              <a:t>Vessel motion</a:t>
             </a:r>
             <a:r>
               <a:rPr sz="900" b="0">
@@ -23680,7 +23168,7 @@
                 </a:solidFill>
                 <a:latin typeface="Calibri"/>
               </a:rPr>
-              <a:t> (사용자 질문 답: '관측 창만 이동' 맞음):</a:t>
+              <a:t>: 파도 격자는 world frame 에 고정 (수백 m × 수백 m)</a:t>
             </a:r>
           </a:p>
           <a:p>
@@ -23696,7 +23184,7 @@
                 </a:solidFill>
                 <a:latin typeface="Calibri"/>
               </a:rPr>
-              <a:t>   – 파도 격자는 충분히 큰 영역 (수백 m × 수백 m) 의 world frame 에 고정</a:t>
+              <a:t>   – Vessel (LiDAR mount) 만 격자 안을 V=11.3 m/s 로 이동 → 관측 창만 이동</a:t>
             </a:r>
           </a:p>
           <a:p>
@@ -23712,39 +23200,7 @@
                 </a:solidFill>
                 <a:latin typeface="Calibri"/>
               </a:rPr>
-              <a:t>   – Vessel 은 그 격자 안을 V=11.3 m/s 로 이동 (매 frame Δt=0.1 s 동안 1.13 m 전진)</a:t>
-            </a:r>
-          </a:p>
-          <a:p>
-            <a:pPr>
-              <a:spcAft>
-                <a:spcPts val="100"/>
-              </a:spcAft>
-            </a:pPr>
-            <a:r>
-              <a:rPr sz="900">
-                <a:solidFill>
-                  <a:srgbClr val="1A1A2E"/>
-                </a:solidFill>
-                <a:latin typeface="Calibri"/>
-              </a:rPr>
-              <a:t>   – → LiDAR FOV (관측 창) 가 vessel 따라 이동, 파도 격자 자체는 변경 없음</a:t>
-            </a:r>
-          </a:p>
-          <a:p>
-            <a:pPr>
-              <a:spcAft>
-                <a:spcPts val="100"/>
-              </a:spcAft>
-            </a:pPr>
-            <a:r>
-              <a:rPr sz="900">
-                <a:solidFill>
-                  <a:srgbClr val="1A1A2E"/>
-                </a:solidFill>
-                <a:latin typeface="Calibri"/>
-              </a:rPr>
-              <a:t>   – → 파도 자체는 t 의 진행으로 자연 propagate (η(x,y,t) 의 t 만 update)</a:t>
+              <a:t>   – 파도는 t 의 진행으로 자연 propagate (격자 자체는 그대로)</a:t>
             </a:r>
           </a:p>
         </p:txBody>
